--- a/docs/lecture_slides/Week 9/2026/Week9_Lecture20_Slides_10_21_2026.pptx
+++ b/docs/lecture_slides/Week 9/2026/Week9_Lecture20_Slides_10_21_2026.pptx
@@ -13,18 +13,6 @@
     <p:sldId id="440" r:id="rId7"/>
     <p:sldId id="441" r:id="rId8"/>
     <p:sldId id="442" r:id="rId9"/>
-    <p:sldId id="443" r:id="rId10"/>
-    <p:sldId id="444" r:id="rId11"/>
-    <p:sldId id="445" r:id="rId12"/>
-    <p:sldId id="446" r:id="rId13"/>
-    <p:sldId id="447" r:id="rId14"/>
-    <p:sldId id="448" r:id="rId15"/>
-    <p:sldId id="449" r:id="rId16"/>
-    <p:sldId id="450" r:id="rId17"/>
-    <p:sldId id="451" r:id="rId18"/>
-    <p:sldId id="452" r:id="rId19"/>
-    <p:sldId id="453" r:id="rId20"/>
-    <p:sldId id="454" r:id="rId21"/>
   </p:sldIdLst>
   <p:sldSz cx="12192000" cy="6858000"/>
   <p:notesSz cx="6858000" cy="9144000"/>
@@ -3395,7 +3383,7 @@
                   <a:srgbClr val="1F3864"/>
                 </a:solidFill>
               </a:rPr>
-              <a:t>Confidence Levels and t Intervals</a:t>
+              <a:t>Confidence Levels and Critical Values</a:t>
             </a:r>
             <a:endParaRPr lang="en-US" dirty="0">
               <a:solidFill>
@@ -3415,6093 +3403,6 @@
   <p:clrMapOvr>
     <a:masterClrMapping/>
   </p:clrMapOvr>
-</p:sld>
-</file>
-
-<file path=ppt/slides/slide10.xml><?xml version="1.0" encoding="utf-8"?>
-<p:sld xmlns:a="http://schemas.openxmlformats.org/drawingml/2006/main" xmlns:r="http://schemas.openxmlformats.org/officeDocument/2006/relationships" xmlns:p="http://schemas.openxmlformats.org/presentationml/2006/main">
-  <p:cSld>
-    <p:spTree>
-      <p:nvGrpSpPr>
-        <p:cNvPr id="1" name=""/>
-        <p:cNvGrpSpPr/>
-        <p:nvPr/>
-      </p:nvGrpSpPr>
-      <p:grpSpPr>
-        <a:xfrm>
-          <a:off x="0" y="0"/>
-          <a:ext cx="0" cy="0"/>
-          <a:chOff x="0" y="0"/>
-          <a:chExt cx="0" cy="0"/>
-        </a:xfrm>
-      </p:grpSpPr>
-      <p:sp>
-        <p:nvSpPr>
-          <p:cNvPr id="2" name="Title 1">
-            <a:extLst>
-              <a:ext uri="{FF2B5EF4-FFF2-40B4-BE49-F238E27FC236}">
-                <a16:creationId xmlns:a16="http://schemas.microsoft.com/office/drawing/2014/main" id="{C08D30B1-1864-30EF-7EAB-9BEE656C0012}"/>
-              </a:ext>
-            </a:extLst>
-          </p:cNvPr>
-          <p:cNvSpPr>
-            <a:spLocks noGrp="1"/>
-          </p:cNvSpPr>
-          <p:nvPr>
-            <p:ph type="title"/>
-          </p:nvPr>
-        </p:nvSpPr>
-        <p:spPr/>
-        <p:txBody>
-          <a:bodyPr>
-            <a:noAutofit/>
-          </a:bodyPr>
-          <a:lstStyle/>
-          <a:p>
-            <a:r>
-              <a:rPr lang="en-US">
-                <a:solidFill>
-                  <a:srgbClr val="1F3864"/>
-                </a:solidFill>
-              </a:rPr>
-              <a:t>What if σ is unknown?</a:t>
-            </a:r>
-          </a:p>
-        </p:txBody>
-      </p:sp>
-      <p:sp>
-        <p:nvSpPr>
-          <p:cNvPr id="4" name="Slide Number Placeholder 3">
-            <a:extLst>
-              <a:ext uri="{FF2B5EF4-FFF2-40B4-BE49-F238E27FC236}">
-                <a16:creationId xmlns:a16="http://schemas.microsoft.com/office/drawing/2014/main" id="{3F875068-D051-44AE-498E-1BEBEDE3A7C8}"/>
-              </a:ext>
-            </a:extLst>
-          </p:cNvPr>
-          <p:cNvSpPr>
-            <a:spLocks noGrp="1"/>
-          </p:cNvSpPr>
-          <p:nvPr>
-            <p:ph type="sldNum" sz="quarter" idx="12"/>
-          </p:nvPr>
-        </p:nvSpPr>
-        <p:spPr/>
-        <p:txBody>
-          <a:bodyPr/>
-          <a:lstStyle/>
-          <a:p>
-            <a:fld id="{A80A81DD-F10A-4B1C-963A-0ABBB4865886}" type="slidenum">
-              <a:rPr lang="en-US" sz="1600" smtClean="0"/>
-              <a:t>10</a:t>
-            </a:fld>
-            <a:endParaRPr lang="en-US" sz="1600"/>
-          </a:p>
-        </p:txBody>
-      </p:sp>
-      <p:sp>
-        <p:nvSpPr>
-          <p:cNvPr id="3" name="Title rule">
-            <a:extLst>
-              <a:ext uri="{FF2B5EF4-FFF2-40B4-BE49-F238E27FC236}">
-                <a16:creationId xmlns:a16="http://schemas.microsoft.com/office/drawing/2014/main" id="{30656AA8-9645-F028-C769-A313710853CC}"/>
-              </a:ext>
-            </a:extLst>
-          </p:cNvPr>
-          <p:cNvSpPr/>
-          <p:nvPr/>
-        </p:nvSpPr>
-        <p:spPr>
-          <a:xfrm>
-            <a:off x="838200" y="1600200"/>
-            <a:ext cx="10515600" cy="38100"/>
-          </a:xfrm>
-          <a:prstGeom prst="rect">
-            <a:avLst/>
-          </a:prstGeom>
-          <a:solidFill>
-            <a:srgbClr val="4472C4"/>
-          </a:solidFill>
-          <a:ln w="12700" cap="flat" cmpd="sng" algn="ctr">
-            <a:noFill/>
-            <a:prstDash val="solid"/>
-            <a:miter lim="800000"/>
-          </a:ln>
-          <a:effectLst/>
-          <a:extLst>
-            <a:ext uri="{91240B29-F687-4F45-9708-019B960494DF}">
-              <a14:hiddenLine xmlns:a14="http://schemas.microsoft.com/office/drawing/2010/main" w="12700" cap="flat" cmpd="sng" algn="ctr">
-                <a:solidFill>
-                  <a:schemeClr val="accent1">
-                    <a:shade val="15000"/>
-                  </a:schemeClr>
-                </a:solidFill>
-                <a:prstDash val="solid"/>
-                <a:miter lim="800000"/>
-              </a14:hiddenLine>
-            </a:ext>
-          </a:extLst>
-        </p:spPr>
-        <p:style>
-          <a:lnRef idx="2">
-            <a:schemeClr val="accent1">
-              <a:shade val="15000"/>
-            </a:schemeClr>
-          </a:lnRef>
-          <a:fillRef idx="1">
-            <a:schemeClr val="accent1"/>
-          </a:fillRef>
-          <a:effectRef idx="0">
-            <a:schemeClr val="accent1"/>
-          </a:effectRef>
-          <a:fontRef idx="minor">
-            <a:schemeClr val="lt1"/>
-          </a:fontRef>
-        </p:style>
-        <p:txBody>
-          <a:bodyPr rtlCol="0" anchor="ctr"/>
-          <a:lstStyle/>
-          <a:p>
-            <a:pPr algn="ctr"/>
-            <a:endParaRPr lang="en-US"/>
-          </a:p>
-        </p:txBody>
-      </p:sp>
-      <p:sp>
-        <p:nvSpPr>
-          <p:cNvPr id="8" name="Context">
-            <a:extLst>
-              <a:ext uri="{FF2B5EF4-FFF2-40B4-BE49-F238E27FC236}">
-                <a16:creationId xmlns:a16="http://schemas.microsoft.com/office/drawing/2014/main" id="{71E3EA8C-31B4-DAD4-BC4A-65D72E59AD46}"/>
-              </a:ext>
-            </a:extLst>
-          </p:cNvPr>
-          <p:cNvSpPr txBox="1"/>
-          <p:nvPr/>
-        </p:nvSpPr>
-        <p:spPr>
-          <a:xfrm>
-            <a:off x="762000" y="1879600"/>
-            <a:ext cx="10668000" cy="381000"/>
-          </a:xfrm>
-          <a:prstGeom prst="rect">
-            <a:avLst/>
-          </a:prstGeom>
-          <a:noFill/>
-        </p:spPr>
-        <p:txBody>
-          <a:bodyPr vert="horz" wrap="square" rtlCol="0">
-            <a:spAutoFit/>
-          </a:bodyPr>
-          <a:lstStyle/>
-          <a:p>
-            <a:pPr>
-              <a:spcAft>
-                <a:spcPts val="200"/>
-              </a:spcAft>
-            </a:pPr>
-            <a:r>
-              <a:rPr lang="en-US">
-                <a:solidFill>
-                  <a:srgbClr val="000000"/>
-                </a:solidFill>
-                <a:latin typeface="Calibri" panose="020F0502020204030204" pitchFamily="34" charset="0"/>
-              </a:rPr>
-              <a:t>Every interval for μ so far used σ, the population standard deviation.</a:t>
-            </a:r>
-          </a:p>
-        </p:txBody>
-      </p:sp>
-      <p:sp>
-        <p:nvSpPr>
-          <p:cNvPr id="9" name="Numbers">
-            <a:extLst>
-              <a:ext uri="{FF2B5EF4-FFF2-40B4-BE49-F238E27FC236}">
-                <a16:creationId xmlns:a16="http://schemas.microsoft.com/office/drawing/2014/main" id="{C419F151-05B2-3E4B-BAE8-BB1F06D9D1FD}"/>
-              </a:ext>
-            </a:extLst>
-          </p:cNvPr>
-          <p:cNvSpPr txBox="1"/>
-          <p:nvPr/>
-        </p:nvSpPr>
-        <p:spPr>
-          <a:xfrm>
-            <a:off x="762000" y="2286000"/>
-            <a:ext cx="10668000" cy="400110"/>
-          </a:xfrm>
-          <a:prstGeom prst="rect">
-            <a:avLst/>
-          </a:prstGeom>
-          <a:noFill/>
-        </p:spPr>
-        <p:txBody>
-          <a:bodyPr vert="horz" wrap="square" rtlCol="0">
-            <a:spAutoFit/>
-          </a:bodyPr>
-          <a:lstStyle/>
-          <a:p>
-            <a:pPr>
-              <a:spcAft>
-                <a:spcPts val="200"/>
-              </a:spcAft>
-            </a:pPr>
-            <a:r>
-              <a:rPr lang="en-US" sz="2000" b="1">
-                <a:solidFill>
-                  <a:srgbClr val="000000"/>
-                </a:solidFill>
-                <a:latin typeface="Calibri" panose="020F0502020204030204" pitchFamily="34" charset="0"/>
-              </a:rPr>
-              <a:t>x̄ ± z </a:t>
-            </a:r>
-            <a:r>
-              <a:rPr lang="el-GR" sz="2000" b="1">
-                <a:solidFill>
-                  <a:srgbClr val="000000"/>
-                </a:solidFill>
-                <a:latin typeface="Calibri" panose="020F0502020204030204" pitchFamily="34" charset="0"/>
-              </a:rPr>
-              <a:t>σ / √</a:t>
-            </a:r>
-            <a:r>
-              <a:rPr lang="en-US" sz="2000" b="1">
-                <a:solidFill>
-                  <a:srgbClr val="000000"/>
-                </a:solidFill>
-                <a:latin typeface="Calibri" panose="020F0502020204030204" pitchFamily="34" charset="0"/>
-              </a:rPr>
-              <a:t>n</a:t>
-            </a:r>
-          </a:p>
-        </p:txBody>
-      </p:sp>
-      <p:sp>
-        <p:nvSpPr>
-          <p:cNvPr id="10" name="Question">
-            <a:extLst>
-              <a:ext uri="{FF2B5EF4-FFF2-40B4-BE49-F238E27FC236}">
-                <a16:creationId xmlns:a16="http://schemas.microsoft.com/office/drawing/2014/main" id="{B31E395F-B84E-D1E9-D22A-222467FC4105}"/>
-              </a:ext>
-            </a:extLst>
-          </p:cNvPr>
-          <p:cNvSpPr txBox="1"/>
-          <p:nvPr/>
-        </p:nvSpPr>
-        <p:spPr>
-          <a:xfrm>
-            <a:off x="762000" y="2711510"/>
-            <a:ext cx="10668000" cy="671979"/>
-          </a:xfrm>
-          <a:prstGeom prst="rect">
-            <a:avLst/>
-          </a:prstGeom>
-          <a:noFill/>
-        </p:spPr>
-        <p:txBody>
-          <a:bodyPr vert="horz" wrap="square" rtlCol="0">
-            <a:spAutoFit/>
-          </a:bodyPr>
-          <a:lstStyle/>
-          <a:p>
-            <a:pPr>
-              <a:spcAft>
-                <a:spcPts val="200"/>
-              </a:spcAft>
-            </a:pPr>
-            <a:r>
-              <a:rPr lang="en-US" b="1">
-                <a:solidFill>
-                  <a:srgbClr val="C00000"/>
-                </a:solidFill>
-                <a:latin typeface="Calibri" panose="020F0502020204030204" pitchFamily="34" charset="0"/>
-              </a:rPr>
-              <a:t>(a)  If we don’t know μ, do we know σ?</a:t>
-            </a:r>
-          </a:p>
-          <a:p>
-            <a:pPr>
-              <a:spcAft>
-                <a:spcPts val="200"/>
-              </a:spcAft>
-            </a:pPr>
-            <a:r>
-              <a:rPr lang="en-US" b="1">
-                <a:solidFill>
-                  <a:srgbClr val="C00000"/>
-                </a:solidFill>
-                <a:latin typeface="Calibri" panose="020F0502020204030204" pitchFamily="34" charset="0"/>
-              </a:rPr>
-              <a:t>(b)  What could we use in its place?</a:t>
-            </a:r>
-          </a:p>
-        </p:txBody>
-      </p:sp>
-      <p:sp>
-        <p:nvSpPr>
-          <p:cNvPr id="11" name="Result">
-            <a:extLst>
-              <a:ext uri="{FF2B5EF4-FFF2-40B4-BE49-F238E27FC236}">
-                <a16:creationId xmlns:a16="http://schemas.microsoft.com/office/drawing/2014/main" id="{5A70F68E-0D93-07B8-82B2-4D8F2F681D0D}"/>
-              </a:ext>
-            </a:extLst>
-          </p:cNvPr>
-          <p:cNvSpPr/>
-          <p:nvPr/>
-        </p:nvSpPr>
-        <p:spPr>
-          <a:xfrm>
-            <a:off x="762000" y="3535889"/>
-            <a:ext cx="10668000" cy="784324"/>
-          </a:xfrm>
-          <a:prstGeom prst="roundRect">
-            <a:avLst>
-              <a:gd name="adj" fmla="val 4000"/>
-            </a:avLst>
-          </a:prstGeom>
-          <a:solidFill>
-            <a:srgbClr val="F2F6FC"/>
-          </a:solidFill>
-          <a:ln w="15875">
-            <a:solidFill>
-              <a:srgbClr val="4472C4"/>
-            </a:solidFill>
-          </a:ln>
-        </p:spPr>
-        <p:style>
-          <a:lnRef idx="2">
-            <a:schemeClr val="accent1">
-              <a:shade val="15000"/>
-            </a:schemeClr>
-          </a:lnRef>
-          <a:fillRef idx="1">
-            <a:schemeClr val="accent1"/>
-          </a:fillRef>
-          <a:effectRef idx="0">
-            <a:schemeClr val="accent1"/>
-          </a:effectRef>
-          <a:fontRef idx="minor">
-            <a:schemeClr val="lt1"/>
-          </a:fontRef>
-        </p:style>
-        <p:txBody>
-          <a:bodyPr wrap="square" lIns="152400" tIns="76200" rIns="152400" bIns="76200" rtlCol="0" anchor="ctr">
-            <a:spAutoFit/>
-          </a:bodyPr>
-          <a:lstStyle/>
-          <a:p>
-            <a:r>
-              <a:rPr lang="en-US" sz="2000" b="1">
-                <a:solidFill>
-                  <a:srgbClr val="C00000"/>
-                </a:solidFill>
-                <a:latin typeface="Calibri" panose="020F0502020204030204" pitchFamily="34" charset="0"/>
-              </a:rPr>
-              <a:t>(a)  Almost never</a:t>
-            </a:r>
-          </a:p>
-          <a:p>
-            <a:r>
-              <a:rPr lang="en-US" sz="2000" b="1">
-                <a:solidFill>
-                  <a:srgbClr val="C00000"/>
-                </a:solidFill>
-                <a:latin typeface="Calibri" panose="020F0502020204030204" pitchFamily="34" charset="0"/>
-              </a:rPr>
-              <a:t>(b)  s, the sample standard deviation:   x̄ ± z s / √n.   Does that still work?</a:t>
-            </a:r>
-          </a:p>
-        </p:txBody>
-      </p:sp>
-    </p:spTree>
-    <p:extLst>
-      <p:ext uri="{BB962C8B-B14F-4D97-AF65-F5344CB8AC3E}">
-        <p14:creationId xmlns:p14="http://schemas.microsoft.com/office/powerpoint/2010/main" val="2692125319"/>
-      </p:ext>
-    </p:extLst>
-  </p:cSld>
-  <p:clrMapOvr>
-    <a:masterClrMapping/>
-  </p:clrMapOvr>
-  <p:timing>
-    <p:tnLst>
-      <p:par>
-        <p:cTn id="1" dur="indefinite" restart="never" nodeType="tmRoot">
-          <p:childTnLst>
-            <p:seq concurrent="1" nextAc="seek">
-              <p:cTn id="2" dur="indefinite" nodeType="mainSeq">
-                <p:childTnLst>
-                  <p:par>
-                    <p:cTn id="3" fill="hold">
-                      <p:stCondLst>
-                        <p:cond delay="indefinite"/>
-                      </p:stCondLst>
-                      <p:childTnLst>
-                        <p:par>
-                          <p:cTn id="4" fill="hold">
-                            <p:stCondLst>
-                              <p:cond delay="0"/>
-                            </p:stCondLst>
-                            <p:childTnLst>
-                              <p:par>
-                                <p:cTn id="5" presetID="1" presetClass="entr" presetSubtype="0" fill="hold" grpId="0" nodeType="clickEffect">
-                                  <p:stCondLst>
-                                    <p:cond delay="0"/>
-                                  </p:stCondLst>
-                                  <p:childTnLst>
-                                    <p:set>
-                                      <p:cBhvr>
-                                        <p:cTn id="6" dur="1" fill="hold">
-                                          <p:stCondLst>
-                                            <p:cond delay="0"/>
-                                          </p:stCondLst>
-                                        </p:cTn>
-                                        <p:tgtEl>
-                                          <p:spTgt spid="11"/>
-                                        </p:tgtEl>
-                                        <p:attrNameLst>
-                                          <p:attrName>style.visibility</p:attrName>
-                                        </p:attrNameLst>
-                                      </p:cBhvr>
-                                      <p:to>
-                                        <p:strVal val="visible"/>
-                                      </p:to>
-                                    </p:set>
-                                  </p:childTnLst>
-                                </p:cTn>
-                              </p:par>
-                            </p:childTnLst>
-                          </p:cTn>
-                        </p:par>
-                      </p:childTnLst>
-                    </p:cTn>
-                  </p:par>
-                </p:childTnLst>
-              </p:cTn>
-              <p:prevCondLst>
-                <p:cond evt="onPrev" delay="0">
-                  <p:tgtEl>
-                    <p:sldTgt/>
-                  </p:tgtEl>
-                </p:cond>
-              </p:prevCondLst>
-              <p:nextCondLst>
-                <p:cond evt="onNext" delay="0">
-                  <p:tgtEl>
-                    <p:sldTgt/>
-                  </p:tgtEl>
-                </p:cond>
-              </p:nextCondLst>
-            </p:seq>
-          </p:childTnLst>
-        </p:cTn>
-      </p:par>
-    </p:tnLst>
-    <p:bldLst>
-      <p:bldP spid="11" grpId="0" animBg="1"/>
-    </p:bldLst>
-  </p:timing>
-</p:sld>
-</file>
-
-<file path=ppt/slides/slide11.xml><?xml version="1.0" encoding="utf-8"?>
-<p:sld xmlns:a="http://schemas.openxmlformats.org/drawingml/2006/main" xmlns:r="http://schemas.openxmlformats.org/officeDocument/2006/relationships" xmlns:p="http://schemas.openxmlformats.org/presentationml/2006/main">
-  <p:cSld>
-    <p:spTree>
-      <p:nvGrpSpPr>
-        <p:cNvPr id="1" name=""/>
-        <p:cNvGrpSpPr/>
-        <p:nvPr/>
-      </p:nvGrpSpPr>
-      <p:grpSpPr>
-        <a:xfrm>
-          <a:off x="0" y="0"/>
-          <a:ext cx="0" cy="0"/>
-          <a:chOff x="0" y="0"/>
-          <a:chExt cx="0" cy="0"/>
-        </a:xfrm>
-      </p:grpSpPr>
-      <p:sp>
-        <p:nvSpPr>
-          <p:cNvPr id="2" name="Title 1">
-            <a:extLst>
-              <a:ext uri="{FF2B5EF4-FFF2-40B4-BE49-F238E27FC236}">
-                <a16:creationId xmlns:a16="http://schemas.microsoft.com/office/drawing/2014/main" id="{C08D30B1-1864-30EF-7EAB-9BEE656C0012}"/>
-              </a:ext>
-            </a:extLst>
-          </p:cNvPr>
-          <p:cNvSpPr>
-            <a:spLocks noGrp="1"/>
-          </p:cNvSpPr>
-          <p:nvPr>
-            <p:ph type="title"/>
-          </p:nvPr>
-        </p:nvSpPr>
-        <p:spPr/>
-        <p:txBody>
-          <a:bodyPr>
-            <a:noAutofit/>
-          </a:bodyPr>
-          <a:lstStyle/>
-          <a:p>
-            <a:r>
-              <a:rPr lang="en-US">
-                <a:solidFill>
-                  <a:srgbClr val="1F3864"/>
-                </a:solidFill>
-              </a:rPr>
-              <a:t>Does s in place of σ work?</a:t>
-            </a:r>
-          </a:p>
-        </p:txBody>
-      </p:sp>
-      <p:sp>
-        <p:nvSpPr>
-          <p:cNvPr id="4" name="Slide Number Placeholder 3">
-            <a:extLst>
-              <a:ext uri="{FF2B5EF4-FFF2-40B4-BE49-F238E27FC236}">
-                <a16:creationId xmlns:a16="http://schemas.microsoft.com/office/drawing/2014/main" id="{3F875068-D051-44AE-498E-1BEBEDE3A7C8}"/>
-              </a:ext>
-            </a:extLst>
-          </p:cNvPr>
-          <p:cNvSpPr>
-            <a:spLocks noGrp="1"/>
-          </p:cNvSpPr>
-          <p:nvPr>
-            <p:ph type="sldNum" sz="quarter" idx="12"/>
-          </p:nvPr>
-        </p:nvSpPr>
-        <p:spPr/>
-        <p:txBody>
-          <a:bodyPr/>
-          <a:lstStyle/>
-          <a:p>
-            <a:fld id="{A80A81DD-F10A-4B1C-963A-0ABBB4865886}" type="slidenum">
-              <a:rPr lang="en-US" sz="1600" smtClean="0"/>
-              <a:t>11</a:t>
-            </a:fld>
-            <a:endParaRPr lang="en-US" sz="1600"/>
-          </a:p>
-        </p:txBody>
-      </p:sp>
-      <p:sp>
-        <p:nvSpPr>
-          <p:cNvPr id="3" name="Title rule">
-            <a:extLst>
-              <a:ext uri="{FF2B5EF4-FFF2-40B4-BE49-F238E27FC236}">
-                <a16:creationId xmlns:a16="http://schemas.microsoft.com/office/drawing/2014/main" id="{30656AA8-9645-F028-C769-A313710853CC}"/>
-              </a:ext>
-            </a:extLst>
-          </p:cNvPr>
-          <p:cNvSpPr/>
-          <p:nvPr/>
-        </p:nvSpPr>
-        <p:spPr>
-          <a:xfrm>
-            <a:off x="838200" y="1600200"/>
-            <a:ext cx="10515600" cy="38100"/>
-          </a:xfrm>
-          <a:prstGeom prst="rect">
-            <a:avLst/>
-          </a:prstGeom>
-          <a:solidFill>
-            <a:srgbClr val="4472C4"/>
-          </a:solidFill>
-          <a:ln w="12700" cap="flat" cmpd="sng" algn="ctr">
-            <a:noFill/>
-            <a:prstDash val="solid"/>
-            <a:miter lim="800000"/>
-          </a:ln>
-          <a:effectLst/>
-          <a:extLst>
-            <a:ext uri="{91240B29-F687-4F45-9708-019B960494DF}">
-              <a14:hiddenLine xmlns:a14="http://schemas.microsoft.com/office/drawing/2010/main" w="12700" cap="flat" cmpd="sng" algn="ctr">
-                <a:solidFill>
-                  <a:schemeClr val="accent1">
-                    <a:shade val="15000"/>
-                  </a:schemeClr>
-                </a:solidFill>
-                <a:prstDash val="solid"/>
-                <a:miter lim="800000"/>
-              </a14:hiddenLine>
-            </a:ext>
-          </a:extLst>
-        </p:spPr>
-        <p:style>
-          <a:lnRef idx="2">
-            <a:schemeClr val="accent1">
-              <a:shade val="15000"/>
-            </a:schemeClr>
-          </a:lnRef>
-          <a:fillRef idx="1">
-            <a:schemeClr val="accent1"/>
-          </a:fillRef>
-          <a:effectRef idx="0">
-            <a:schemeClr val="accent1"/>
-          </a:effectRef>
-          <a:fontRef idx="minor">
-            <a:schemeClr val="lt1"/>
-          </a:fontRef>
-        </p:style>
-        <p:txBody>
-          <a:bodyPr rtlCol="0" anchor="ctr"/>
-          <a:lstStyle/>
-          <a:p>
-            <a:pPr algn="ctr"/>
-            <a:endParaRPr lang="en-US"/>
-          </a:p>
-        </p:txBody>
-      </p:sp>
-      <p:sp>
-        <p:nvSpPr>
-          <p:cNvPr id="8" name="Context">
-            <a:extLst>
-              <a:ext uri="{FF2B5EF4-FFF2-40B4-BE49-F238E27FC236}">
-                <a16:creationId xmlns:a16="http://schemas.microsoft.com/office/drawing/2014/main" id="{71E3EA8C-31B4-DAD4-BC4A-65D72E59AD46}"/>
-              </a:ext>
-            </a:extLst>
-          </p:cNvPr>
-          <p:cNvSpPr txBox="1"/>
-          <p:nvPr/>
-        </p:nvSpPr>
-        <p:spPr>
-          <a:xfrm>
-            <a:off x="762000" y="1879600"/>
-            <a:ext cx="10668000" cy="381000"/>
-          </a:xfrm>
-          <a:prstGeom prst="rect">
-            <a:avLst/>
-          </a:prstGeom>
-          <a:noFill/>
-        </p:spPr>
-        <p:txBody>
-          <a:bodyPr vert="horz" wrap="square" rtlCol="0">
-            <a:spAutoFit/>
-          </a:bodyPr>
-          <a:lstStyle/>
-          <a:p>
-            <a:pPr>
-              <a:spcAft>
-                <a:spcPts val="200"/>
-              </a:spcAft>
-            </a:pPr>
-            <a:r>
-              <a:rPr lang="en-US">
-                <a:solidFill>
-                  <a:srgbClr val="000000"/>
-                </a:solidFill>
-                <a:latin typeface="Calibri" panose="020F0502020204030204" pitchFamily="34" charset="0"/>
-              </a:rPr>
-              <a:t>Simulated:  100 samples of n = 5 whiskers from N(91, 8) mm;  each line is x̄ ± 1.96 s / √5.</a:t>
-            </a:r>
-          </a:p>
-        </p:txBody>
-      </p:sp>
-      <p:sp>
-        <p:nvSpPr>
-          <p:cNvPr id="10" name="Question">
-            <a:extLst>
-              <a:ext uri="{FF2B5EF4-FFF2-40B4-BE49-F238E27FC236}">
-                <a16:creationId xmlns:a16="http://schemas.microsoft.com/office/drawing/2014/main" id="{B31E395F-B84E-D1E9-D22A-222467FC4105}"/>
-              </a:ext>
-            </a:extLst>
-          </p:cNvPr>
-          <p:cNvSpPr txBox="1"/>
-          <p:nvPr/>
-        </p:nvSpPr>
-        <p:spPr>
-          <a:xfrm>
-            <a:off x="762000" y="2286000"/>
-            <a:ext cx="10668000" cy="369332"/>
-          </a:xfrm>
-          <a:prstGeom prst="rect">
-            <a:avLst/>
-          </a:prstGeom>
-          <a:noFill/>
-        </p:spPr>
-        <p:txBody>
-          <a:bodyPr vert="horz" wrap="square" rtlCol="0">
-            <a:spAutoFit/>
-          </a:bodyPr>
-          <a:lstStyle/>
-          <a:p>
-            <a:pPr>
-              <a:spcAft>
-                <a:spcPts val="200"/>
-              </a:spcAft>
-            </a:pPr>
-            <a:r>
-              <a:rPr lang="en-US" b="1">
-                <a:solidFill>
-                  <a:srgbClr val="C00000"/>
-                </a:solidFill>
-                <a:latin typeface="Calibri" panose="020F0502020204030204" pitchFamily="34" charset="0"/>
-              </a:rPr>
-              <a:t>A 95% method should miss about 5 times.  How many of these 100 miss μ?</a:t>
-            </a:r>
-          </a:p>
-        </p:txBody>
-      </p:sp>
-      <p:sp>
-        <p:nvSpPr>
-          <p:cNvPr id="11" name="Result">
-            <a:extLst>
-              <a:ext uri="{FF2B5EF4-FFF2-40B4-BE49-F238E27FC236}">
-                <a16:creationId xmlns:a16="http://schemas.microsoft.com/office/drawing/2014/main" id="{5A70F68E-0D93-07B8-82B2-4D8F2F681D0D}"/>
-              </a:ext>
-            </a:extLst>
-          </p:cNvPr>
-          <p:cNvSpPr/>
-          <p:nvPr/>
-        </p:nvSpPr>
-        <p:spPr>
-          <a:xfrm>
-            <a:off x="762000" y="5487432"/>
-            <a:ext cx="10668000" cy="470595"/>
-          </a:xfrm>
-          <a:prstGeom prst="roundRect">
-            <a:avLst>
-              <a:gd name="adj" fmla="val 4000"/>
-            </a:avLst>
-          </a:prstGeom>
-          <a:solidFill>
-            <a:srgbClr val="F2F6FC"/>
-          </a:solidFill>
-          <a:ln w="15875">
-            <a:solidFill>
-              <a:srgbClr val="4472C4"/>
-            </a:solidFill>
-          </a:ln>
-        </p:spPr>
-        <p:style>
-          <a:lnRef idx="2">
-            <a:schemeClr val="accent1">
-              <a:shade val="15000"/>
-            </a:schemeClr>
-          </a:lnRef>
-          <a:fillRef idx="1">
-            <a:schemeClr val="accent1"/>
-          </a:fillRef>
-          <a:effectRef idx="0">
-            <a:schemeClr val="accent1"/>
-          </a:effectRef>
-          <a:fontRef idx="minor">
-            <a:schemeClr val="lt1"/>
-          </a:fontRef>
-        </p:style>
-        <p:txBody>
-          <a:bodyPr wrap="square" lIns="152400" tIns="76200" rIns="152400" bIns="76200" rtlCol="0" anchor="ctr">
-            <a:spAutoFit/>
-          </a:bodyPr>
-          <a:lstStyle/>
-          <a:p>
-            <a:r>
-              <a:rPr lang="en-US" sz="2000" b="1">
-                <a:solidFill>
-                  <a:srgbClr val="C00000"/>
-                </a:solidFill>
-                <a:latin typeface="Calibri" panose="020F0502020204030204" pitchFamily="34" charset="0"/>
-              </a:rPr>
-              <a:t>12 of 100:  s changes from sample to sample, so the intervals are too narrow too often</a:t>
-            </a:r>
-          </a:p>
-        </p:txBody>
-      </p:sp>
-      <p:pic>
-        <p:nvPicPr>
-          <p:cNvPr id="7" name="l20_s_coverage.png">
-            <a:extLst>
-              <a:ext uri="{FF2B5EF4-FFF2-40B4-BE49-F238E27FC236}">
-                <a16:creationId xmlns:a16="http://schemas.microsoft.com/office/drawing/2014/main" id="{56E80C62-37D9-646C-E45C-217B469A1210}"/>
-              </a:ext>
-            </a:extLst>
-          </p:cNvPr>
-          <p:cNvPicPr>
-            <a:picLocks/>
-          </p:cNvPicPr>
-          <p:nvPr/>
-        </p:nvPicPr>
-        <p:blipFill>
-          <a:blip r:embed="rId2">
-            <a:extLst>
-              <a:ext uri="{28A0092B-C50C-407E-A947-70E740481C1C}">
-                <a14:useLocalDpi xmlns:a14="http://schemas.microsoft.com/office/drawing/2010/main" val="0"/>
-              </a:ext>
-            </a:extLst>
-          </a:blip>
-          <a:stretch>
-            <a:fillRect/>
-          </a:stretch>
-        </p:blipFill>
-        <p:spPr>
-          <a:xfrm>
-            <a:off x="1270000" y="2706132"/>
-            <a:ext cx="9652000" cy="2730500"/>
-          </a:xfrm>
-          <a:prstGeom prst="rect">
-            <a:avLst/>
-          </a:prstGeom>
-        </p:spPr>
-      </p:pic>
-    </p:spTree>
-    <p:extLst>
-      <p:ext uri="{BB962C8B-B14F-4D97-AF65-F5344CB8AC3E}">
-        <p14:creationId xmlns:p14="http://schemas.microsoft.com/office/powerpoint/2010/main" val="4066792366"/>
-      </p:ext>
-    </p:extLst>
-  </p:cSld>
-  <p:clrMapOvr>
-    <a:masterClrMapping/>
-  </p:clrMapOvr>
-  <p:timing>
-    <p:tnLst>
-      <p:par>
-        <p:cTn id="1" dur="indefinite" restart="never" nodeType="tmRoot">
-          <p:childTnLst>
-            <p:seq concurrent="1" nextAc="seek">
-              <p:cTn id="2" dur="indefinite" nodeType="mainSeq">
-                <p:childTnLst>
-                  <p:par>
-                    <p:cTn id="3" fill="hold">
-                      <p:stCondLst>
-                        <p:cond delay="indefinite"/>
-                      </p:stCondLst>
-                      <p:childTnLst>
-                        <p:par>
-                          <p:cTn id="4" fill="hold">
-                            <p:stCondLst>
-                              <p:cond delay="0"/>
-                            </p:stCondLst>
-                            <p:childTnLst>
-                              <p:par>
-                                <p:cTn id="5" presetID="1" presetClass="entr" presetSubtype="0" fill="hold" grpId="0" nodeType="clickEffect">
-                                  <p:stCondLst>
-                                    <p:cond delay="0"/>
-                                  </p:stCondLst>
-                                  <p:childTnLst>
-                                    <p:set>
-                                      <p:cBhvr>
-                                        <p:cTn id="6" dur="1" fill="hold">
-                                          <p:stCondLst>
-                                            <p:cond delay="0"/>
-                                          </p:stCondLst>
-                                        </p:cTn>
-                                        <p:tgtEl>
-                                          <p:spTgt spid="11"/>
-                                        </p:tgtEl>
-                                        <p:attrNameLst>
-                                          <p:attrName>style.visibility</p:attrName>
-                                        </p:attrNameLst>
-                                      </p:cBhvr>
-                                      <p:to>
-                                        <p:strVal val="visible"/>
-                                      </p:to>
-                                    </p:set>
-                                  </p:childTnLst>
-                                </p:cTn>
-                              </p:par>
-                            </p:childTnLst>
-                          </p:cTn>
-                        </p:par>
-                      </p:childTnLst>
-                    </p:cTn>
-                  </p:par>
-                </p:childTnLst>
-              </p:cTn>
-              <p:prevCondLst>
-                <p:cond evt="onPrev" delay="0">
-                  <p:tgtEl>
-                    <p:sldTgt/>
-                  </p:tgtEl>
-                </p:cond>
-              </p:prevCondLst>
-              <p:nextCondLst>
-                <p:cond evt="onNext" delay="0">
-                  <p:tgtEl>
-                    <p:sldTgt/>
-                  </p:tgtEl>
-                </p:cond>
-              </p:nextCondLst>
-            </p:seq>
-          </p:childTnLst>
-        </p:cTn>
-      </p:par>
-    </p:tnLst>
-    <p:bldLst>
-      <p:bldP spid="11" grpId="0" animBg="1"/>
-    </p:bldLst>
-  </p:timing>
-</p:sld>
-</file>
-
-<file path=ppt/slides/slide12.xml><?xml version="1.0" encoding="utf-8"?>
-<p:sld xmlns:a="http://schemas.openxmlformats.org/drawingml/2006/main" xmlns:r="http://schemas.openxmlformats.org/officeDocument/2006/relationships" xmlns:p="http://schemas.openxmlformats.org/presentationml/2006/main">
-  <p:cSld>
-    <p:spTree>
-      <p:nvGrpSpPr>
-        <p:cNvPr id="1" name=""/>
-        <p:cNvGrpSpPr/>
-        <p:nvPr/>
-      </p:nvGrpSpPr>
-      <p:grpSpPr>
-        <a:xfrm>
-          <a:off x="0" y="0"/>
-          <a:ext cx="0" cy="0"/>
-          <a:chOff x="0" y="0"/>
-          <a:chExt cx="0" cy="0"/>
-        </a:xfrm>
-      </p:grpSpPr>
-      <p:sp>
-        <p:nvSpPr>
-          <p:cNvPr id="2" name="Title 1">
-            <a:extLst>
-              <a:ext uri="{FF2B5EF4-FFF2-40B4-BE49-F238E27FC236}">
-                <a16:creationId xmlns:a16="http://schemas.microsoft.com/office/drawing/2014/main" id="{D617AB41-6AD1-9EF2-7F95-46A904399681}"/>
-              </a:ext>
-            </a:extLst>
-          </p:cNvPr>
-          <p:cNvSpPr>
-            <a:spLocks noGrp="1"/>
-          </p:cNvSpPr>
-          <p:nvPr>
-            <p:ph type="title"/>
-          </p:nvPr>
-        </p:nvSpPr>
-        <p:spPr/>
-        <p:txBody>
-          <a:bodyPr>
-            <a:noAutofit/>
-          </a:bodyPr>
-          <a:lstStyle/>
-          <a:p>
-            <a:r>
-              <a:rPr lang="en-US">
-                <a:solidFill>
-                  <a:srgbClr val="1F3864"/>
-                </a:solidFill>
-              </a:rPr>
-              <a:t>The t distribution</a:t>
-            </a:r>
-          </a:p>
-        </p:txBody>
-      </p:sp>
-      <p:sp>
-        <p:nvSpPr>
-          <p:cNvPr id="4" name="Slide Number Placeholder 3">
-            <a:extLst>
-              <a:ext uri="{FF2B5EF4-FFF2-40B4-BE49-F238E27FC236}">
-                <a16:creationId xmlns:a16="http://schemas.microsoft.com/office/drawing/2014/main" id="{97D44AE5-98B5-B840-6B8A-D345C7C2E2F0}"/>
-              </a:ext>
-            </a:extLst>
-          </p:cNvPr>
-          <p:cNvSpPr>
-            <a:spLocks noGrp="1"/>
-          </p:cNvSpPr>
-          <p:nvPr>
-            <p:ph type="sldNum" sz="quarter" idx="12"/>
-          </p:nvPr>
-        </p:nvSpPr>
-        <p:spPr/>
-        <p:txBody>
-          <a:bodyPr/>
-          <a:lstStyle/>
-          <a:p>
-            <a:fld id="{A80A81DD-F10A-4B1C-963A-0ABBB4865886}" type="slidenum">
-              <a:rPr lang="en-US" sz="1600" smtClean="0"/>
-              <a:t>12</a:t>
-            </a:fld>
-            <a:endParaRPr lang="en-US" sz="1600"/>
-          </a:p>
-        </p:txBody>
-      </p:sp>
-      <p:sp>
-        <p:nvSpPr>
-          <p:cNvPr id="5" name="TextBox 4">
-            <a:extLst>
-              <a:ext uri="{FF2B5EF4-FFF2-40B4-BE49-F238E27FC236}">
-                <a16:creationId xmlns:a16="http://schemas.microsoft.com/office/drawing/2014/main" id="{A34AAE17-27CE-D7A3-C663-11BB48ACBF5B}"/>
-              </a:ext>
-            </a:extLst>
-          </p:cNvPr>
-          <p:cNvSpPr txBox="1"/>
-          <p:nvPr/>
-        </p:nvSpPr>
-        <p:spPr>
-          <a:xfrm>
-            <a:off x="762000" y="1879600"/>
-            <a:ext cx="10668000" cy="345440"/>
-          </a:xfrm>
-          <a:prstGeom prst="rect">
-            <a:avLst/>
-          </a:prstGeom>
-          <a:noFill/>
-        </p:spPr>
-        <p:txBody>
-          <a:bodyPr vert="horz" wrap="square" rtlCol="0">
-            <a:spAutoFit/>
-          </a:bodyPr>
-          <a:lstStyle/>
-          <a:p>
-            <a:pPr marL="304800" indent="-304800"/>
-            <a:r>
-              <a:rPr lang="en-US" sz="1600">
-                <a:solidFill>
-                  <a:srgbClr val="000000"/>
-                </a:solidFill>
-              </a:rPr>
-              <a:t>t distribution</a:t>
-            </a:r>
-          </a:p>
-        </p:txBody>
-      </p:sp>
-      <p:sp>
-        <p:nvSpPr>
-          <p:cNvPr id="6" name="TextBox 5">
-            <a:extLst>
-              <a:ext uri="{FF2B5EF4-FFF2-40B4-BE49-F238E27FC236}">
-                <a16:creationId xmlns:a16="http://schemas.microsoft.com/office/drawing/2014/main" id="{E410A0F8-5E1E-9A1D-B64C-50827EE6C9B2}"/>
-              </a:ext>
-            </a:extLst>
-          </p:cNvPr>
-          <p:cNvSpPr txBox="1"/>
-          <p:nvPr/>
-        </p:nvSpPr>
-        <p:spPr>
-          <a:xfrm>
-            <a:off x="1117600" y="2225040"/>
-            <a:ext cx="10312400" cy="338554"/>
-          </a:xfrm>
-          <a:prstGeom prst="rect">
-            <a:avLst/>
-          </a:prstGeom>
-          <a:noFill/>
-        </p:spPr>
-        <p:txBody>
-          <a:bodyPr vert="horz" wrap="square" rtlCol="0">
-            <a:spAutoFit/>
-          </a:bodyPr>
-          <a:lstStyle/>
-          <a:p>
-            <a:r>
-              <a:rPr lang="en-US" sz="1600" b="1">
-                <a:solidFill>
-                  <a:srgbClr val="C00000"/>
-                </a:solidFill>
-              </a:rPr>
-              <a:t>a bell curve like N(0, 1) but with heavier tails;  use it when s replaces σ</a:t>
-            </a:r>
-          </a:p>
-        </p:txBody>
-      </p:sp>
-      <p:sp>
-        <p:nvSpPr>
-          <p:cNvPr id="7" name="TextBox 6">
-            <a:extLst>
-              <a:ext uri="{FF2B5EF4-FFF2-40B4-BE49-F238E27FC236}">
-                <a16:creationId xmlns:a16="http://schemas.microsoft.com/office/drawing/2014/main" id="{47D3CD95-D52E-5227-B663-7C0A72677B6E}"/>
-              </a:ext>
-            </a:extLst>
-          </p:cNvPr>
-          <p:cNvSpPr txBox="1"/>
-          <p:nvPr/>
-        </p:nvSpPr>
-        <p:spPr>
-          <a:xfrm>
-            <a:off x="762000" y="2741394"/>
-            <a:ext cx="10668000" cy="345440"/>
-          </a:xfrm>
-          <a:prstGeom prst="rect">
-            <a:avLst/>
-          </a:prstGeom>
-          <a:noFill/>
-        </p:spPr>
-        <p:txBody>
-          <a:bodyPr vert="horz" wrap="square" rtlCol="0">
-            <a:spAutoFit/>
-          </a:bodyPr>
-          <a:lstStyle/>
-          <a:p>
-            <a:pPr marL="304800" indent="-304800"/>
-            <a:r>
-              <a:rPr lang="en-US" sz="1600">
-                <a:solidFill>
-                  <a:srgbClr val="000000"/>
-                </a:solidFill>
-              </a:rPr>
-              <a:t>degrees of freedom</a:t>
-            </a:r>
-          </a:p>
-        </p:txBody>
-      </p:sp>
-      <p:sp>
-        <p:nvSpPr>
-          <p:cNvPr id="8" name="TextBox 7">
-            <a:extLst>
-              <a:ext uri="{FF2B5EF4-FFF2-40B4-BE49-F238E27FC236}">
-                <a16:creationId xmlns:a16="http://schemas.microsoft.com/office/drawing/2014/main" id="{1CE3E601-601D-C6B1-8265-C079CB8C9269}"/>
-              </a:ext>
-            </a:extLst>
-          </p:cNvPr>
-          <p:cNvSpPr txBox="1"/>
-          <p:nvPr/>
-        </p:nvSpPr>
-        <p:spPr>
-          <a:xfrm>
-            <a:off x="1117600" y="3086834"/>
-            <a:ext cx="10312400" cy="338554"/>
-          </a:xfrm>
-          <a:prstGeom prst="rect">
-            <a:avLst/>
-          </a:prstGeom>
-          <a:noFill/>
-        </p:spPr>
-        <p:txBody>
-          <a:bodyPr vert="horz" wrap="square" rtlCol="0">
-            <a:spAutoFit/>
-          </a:bodyPr>
-          <a:lstStyle/>
-          <a:p>
-            <a:r>
-              <a:rPr lang="en-US" sz="1600" b="1">
-                <a:solidFill>
-                  <a:srgbClr val="C00000"/>
-                </a:solidFill>
-              </a:rPr>
-              <a:t>df = n − 1;  the more df, the closer t is to N(0, 1)</a:t>
-            </a:r>
-          </a:p>
-        </p:txBody>
-      </p:sp>
-      <p:sp>
-        <p:nvSpPr>
-          <p:cNvPr id="9" name="TextBox 8">
-            <a:extLst>
-              <a:ext uri="{FF2B5EF4-FFF2-40B4-BE49-F238E27FC236}">
-                <a16:creationId xmlns:a16="http://schemas.microsoft.com/office/drawing/2014/main" id="{FB002BF4-8037-2F73-E27A-7A453477E389}"/>
-              </a:ext>
-            </a:extLst>
-          </p:cNvPr>
-          <p:cNvSpPr txBox="1"/>
-          <p:nvPr/>
-        </p:nvSpPr>
-        <p:spPr>
-          <a:xfrm>
-            <a:off x="762000" y="3603188"/>
-            <a:ext cx="10668000" cy="345440"/>
-          </a:xfrm>
-          <a:prstGeom prst="rect">
-            <a:avLst/>
-          </a:prstGeom>
-          <a:noFill/>
-        </p:spPr>
-        <p:txBody>
-          <a:bodyPr vert="horz" wrap="square" rtlCol="0">
-            <a:spAutoFit/>
-          </a:bodyPr>
-          <a:lstStyle/>
-          <a:p>
-            <a:pPr marL="304800" indent="-304800"/>
-            <a:r>
-              <a:rPr lang="en-US" sz="1600">
-                <a:solidFill>
-                  <a:srgbClr val="000000"/>
-                </a:solidFill>
-              </a:rPr>
-              <a:t>t critical value t</a:t>
-            </a:r>
-            <a:r>
-              <a:rPr lang="en-US" sz="1600" baseline="-25000">
-                <a:solidFill>
-                  <a:srgbClr val="000000"/>
-                </a:solidFill>
-              </a:rPr>
-              <a:t>n−1, 1−</a:t>
-            </a:r>
-            <a:r>
-              <a:rPr lang="el-GR" sz="1600" baseline="-25000">
-                <a:solidFill>
-                  <a:srgbClr val="000000"/>
-                </a:solidFill>
-              </a:rPr>
-              <a:t>α/2</a:t>
-            </a:r>
-            <a:endParaRPr lang="en-US" sz="1600" baseline="-25000">
-              <a:solidFill>
-                <a:srgbClr val="000000"/>
-              </a:solidFill>
-            </a:endParaRPr>
-          </a:p>
-        </p:txBody>
-      </p:sp>
-      <p:sp>
-        <p:nvSpPr>
-          <p:cNvPr id="10" name="TextBox 9">
-            <a:extLst>
-              <a:ext uri="{FF2B5EF4-FFF2-40B4-BE49-F238E27FC236}">
-                <a16:creationId xmlns:a16="http://schemas.microsoft.com/office/drawing/2014/main" id="{10F3B3E3-D27C-E008-C93E-ED70BD2A4754}"/>
-              </a:ext>
-            </a:extLst>
-          </p:cNvPr>
-          <p:cNvSpPr txBox="1"/>
-          <p:nvPr/>
-        </p:nvSpPr>
-        <p:spPr>
-          <a:xfrm>
-            <a:off x="1117600" y="3948628"/>
-            <a:ext cx="10312400" cy="338554"/>
-          </a:xfrm>
-          <a:prstGeom prst="rect">
-            <a:avLst/>
-          </a:prstGeom>
-          <a:noFill/>
-        </p:spPr>
-        <p:txBody>
-          <a:bodyPr vert="horz" wrap="square" rtlCol="0">
-            <a:spAutoFit/>
-          </a:bodyPr>
-          <a:lstStyle/>
-          <a:p>
-            <a:r>
-              <a:rPr lang="en-US" sz="1600" b="1">
-                <a:solidFill>
-                  <a:srgbClr val="C00000"/>
-                </a:solidFill>
-              </a:rPr>
-              <a:t>from the t-table row for df = n − 1;  larger than z, so the interval is wider</a:t>
-            </a:r>
-            <a:endParaRPr lang="en-US" sz="1600" b="1" dirty="0">
-              <a:solidFill>
-                <a:srgbClr val="C00000"/>
-              </a:solidFill>
-            </a:endParaRPr>
-          </a:p>
-        </p:txBody>
-      </p:sp>
-      <p:sp>
-        <p:nvSpPr>
-          <p:cNvPr id="3" name="Title rule">
-            <a:extLst>
-              <a:ext uri="{FF2B5EF4-FFF2-40B4-BE49-F238E27FC236}">
-                <a16:creationId xmlns:a16="http://schemas.microsoft.com/office/drawing/2014/main" id="{B469CAAB-2B69-6863-7C28-0C5959E5734B}"/>
-              </a:ext>
-            </a:extLst>
-          </p:cNvPr>
-          <p:cNvSpPr/>
-          <p:nvPr/>
-        </p:nvSpPr>
-        <p:spPr>
-          <a:xfrm>
-            <a:off x="838200" y="1600200"/>
-            <a:ext cx="10515600" cy="38100"/>
-          </a:xfrm>
-          <a:prstGeom prst="rect">
-            <a:avLst/>
-          </a:prstGeom>
-          <a:solidFill>
-            <a:srgbClr val="4472C4"/>
-          </a:solidFill>
-          <a:ln w="12700" cap="flat" cmpd="sng" algn="ctr">
-            <a:noFill/>
-            <a:prstDash val="solid"/>
-            <a:miter lim="800000"/>
-          </a:ln>
-          <a:effectLst/>
-          <a:extLst>
-            <a:ext uri="{91240B29-F687-4F45-9708-019B960494DF}">
-              <a14:hiddenLine xmlns:a14="http://schemas.microsoft.com/office/drawing/2010/main" w="12700" cap="flat" cmpd="sng" algn="ctr">
-                <a:solidFill>
-                  <a:schemeClr val="accent1">
-                    <a:shade val="15000"/>
-                  </a:schemeClr>
-                </a:solidFill>
-                <a:prstDash val="solid"/>
-                <a:miter lim="800000"/>
-              </a14:hiddenLine>
-            </a:ext>
-          </a:extLst>
-        </p:spPr>
-        <p:style>
-          <a:lnRef idx="2">
-            <a:schemeClr val="accent1">
-              <a:shade val="15000"/>
-            </a:schemeClr>
-          </a:lnRef>
-          <a:fillRef idx="1">
-            <a:schemeClr val="accent1"/>
-          </a:fillRef>
-          <a:effectRef idx="0">
-            <a:schemeClr val="accent1"/>
-          </a:effectRef>
-          <a:fontRef idx="minor">
-            <a:schemeClr val="lt1"/>
-          </a:fontRef>
-        </p:style>
-        <p:txBody>
-          <a:bodyPr rtlCol="0" anchor="ctr"/>
-          <a:lstStyle/>
-          <a:p>
-            <a:pPr algn="ctr"/>
-            <a:endParaRPr lang="en-US"/>
-          </a:p>
-        </p:txBody>
-      </p:sp>
-    </p:spTree>
-    <p:extLst>
-      <p:ext uri="{BB962C8B-B14F-4D97-AF65-F5344CB8AC3E}">
-        <p14:creationId xmlns:p14="http://schemas.microsoft.com/office/powerpoint/2010/main" val="708342499"/>
-      </p:ext>
-    </p:extLst>
-  </p:cSld>
-  <p:clrMapOvr>
-    <a:masterClrMapping/>
-  </p:clrMapOvr>
-  <p:timing>
-    <p:tnLst>
-      <p:par>
-        <p:cTn id="1" dur="indefinite" restart="never" nodeType="tmRoot">
-          <p:childTnLst>
-            <p:seq concurrent="1" nextAc="seek">
-              <p:cTn id="2" dur="indefinite" nodeType="mainSeq">
-                <p:childTnLst>
-                  <p:par>
-                    <p:cTn id="3" fill="hold">
-                      <p:stCondLst>
-                        <p:cond delay="indefinite"/>
-                      </p:stCondLst>
-                      <p:childTnLst>
-                        <p:par>
-                          <p:cTn id="4" fill="hold">
-                            <p:stCondLst>
-                              <p:cond delay="0"/>
-                            </p:stCondLst>
-                            <p:childTnLst>
-                              <p:par>
-                                <p:cTn id="5" presetID="34" presetClass="entr" presetSubtype="0" fill="hold" grpId="0" nodeType="clickEffect">
-                                  <p:stCondLst>
-                                    <p:cond delay="0"/>
-                                  </p:stCondLst>
-                                  <p:childTnLst>
-                                    <p:set>
-                                      <p:cBhvr>
-                                        <p:cTn id="6" dur="1" fill="hold">
-                                          <p:stCondLst>
-                                            <p:cond delay="0"/>
-                                          </p:stCondLst>
-                                        </p:cTn>
-                                        <p:tgtEl>
-                                          <p:spTgt spid="6"/>
-                                        </p:tgtEl>
-                                        <p:attrNameLst>
-                                          <p:attrName>style.visibility</p:attrName>
-                                        </p:attrNameLst>
-                                      </p:cBhvr>
-                                      <p:to>
-                                        <p:strVal val="visible"/>
-                                      </p:to>
-                                    </p:set>
-                                    <p:anim from="(-#ppt_w/2)" to="(#ppt_x)" calcmode="lin" valueType="num">
-                                      <p:cBhvr>
-                                        <p:cTn id="7" dur="600" fill="hold">
-                                          <p:stCondLst>
-                                            <p:cond delay="0"/>
-                                          </p:stCondLst>
-                                        </p:cTn>
-                                        <p:tgtEl>
-                                          <p:spTgt spid="6"/>
-                                        </p:tgtEl>
-                                        <p:attrNameLst>
-                                          <p:attrName>ppt_x</p:attrName>
-                                        </p:attrNameLst>
-                                      </p:cBhvr>
-                                    </p:anim>
-                                    <p:anim from="0" to="-1.0" calcmode="lin" valueType="num">
-                                      <p:cBhvr>
-                                        <p:cTn id="8" dur="200" decel="50000" autoRev="1" fill="hold">
-                                          <p:stCondLst>
-                                            <p:cond delay="600"/>
-                                          </p:stCondLst>
-                                        </p:cTn>
-                                        <p:tgtEl>
-                                          <p:spTgt spid="6"/>
-                                        </p:tgtEl>
-                                        <p:attrNameLst>
-                                          <p:attrName>xshear</p:attrName>
-                                        </p:attrNameLst>
-                                      </p:cBhvr>
-                                    </p:anim>
-                                    <p:animScale>
-                                      <p:cBhvr>
-                                        <p:cTn id="9" dur="200" decel="100000" autoRev="1" fill="hold">
-                                          <p:stCondLst>
-                                            <p:cond delay="600"/>
-                                          </p:stCondLst>
-                                        </p:cTn>
-                                        <p:tgtEl>
-                                          <p:spTgt spid="6"/>
-                                        </p:tgtEl>
-                                      </p:cBhvr>
-                                      <p:from x="100000" y="100000"/>
-                                      <p:to x="80000" y="100000"/>
-                                    </p:animScale>
-                                    <p:anim by="(#ppt_h/3+#ppt_w*0.1)" calcmode="lin" valueType="num">
-                                      <p:cBhvr additive="sum">
-                                        <p:cTn id="10" dur="200" decel="100000" autoRev="1" fill="hold">
-                                          <p:stCondLst>
-                                            <p:cond delay="600"/>
-                                          </p:stCondLst>
-                                        </p:cTn>
-                                        <p:tgtEl>
-                                          <p:spTgt spid="6"/>
-                                        </p:tgtEl>
-                                        <p:attrNameLst>
-                                          <p:attrName>ppt_x</p:attrName>
-                                        </p:attrNameLst>
-                                      </p:cBhvr>
-                                    </p:anim>
-                                  </p:childTnLst>
-                                </p:cTn>
-                              </p:par>
-                            </p:childTnLst>
-                          </p:cTn>
-                        </p:par>
-                      </p:childTnLst>
-                    </p:cTn>
-                  </p:par>
-                  <p:par>
-                    <p:cTn id="11" fill="hold">
-                      <p:stCondLst>
-                        <p:cond delay="indefinite"/>
-                      </p:stCondLst>
-                      <p:childTnLst>
-                        <p:par>
-                          <p:cTn id="12" fill="hold">
-                            <p:stCondLst>
-                              <p:cond delay="0"/>
-                            </p:stCondLst>
-                            <p:childTnLst>
-                              <p:par>
-                                <p:cTn id="13" presetID="34" presetClass="entr" presetSubtype="0" fill="hold" grpId="0" nodeType="clickEffect">
-                                  <p:stCondLst>
-                                    <p:cond delay="0"/>
-                                  </p:stCondLst>
-                                  <p:childTnLst>
-                                    <p:set>
-                                      <p:cBhvr>
-                                        <p:cTn id="14" dur="1" fill="hold">
-                                          <p:stCondLst>
-                                            <p:cond delay="0"/>
-                                          </p:stCondLst>
-                                        </p:cTn>
-                                        <p:tgtEl>
-                                          <p:spTgt spid="8"/>
-                                        </p:tgtEl>
-                                        <p:attrNameLst>
-                                          <p:attrName>style.visibility</p:attrName>
-                                        </p:attrNameLst>
-                                      </p:cBhvr>
-                                      <p:to>
-                                        <p:strVal val="visible"/>
-                                      </p:to>
-                                    </p:set>
-                                    <p:anim from="(-#ppt_w/2)" to="(#ppt_x)" calcmode="lin" valueType="num">
-                                      <p:cBhvr>
-                                        <p:cTn id="15" dur="600" fill="hold">
-                                          <p:stCondLst>
-                                            <p:cond delay="0"/>
-                                          </p:stCondLst>
-                                        </p:cTn>
-                                        <p:tgtEl>
-                                          <p:spTgt spid="8"/>
-                                        </p:tgtEl>
-                                        <p:attrNameLst>
-                                          <p:attrName>ppt_x</p:attrName>
-                                        </p:attrNameLst>
-                                      </p:cBhvr>
-                                    </p:anim>
-                                    <p:anim from="0" to="-1.0" calcmode="lin" valueType="num">
-                                      <p:cBhvr>
-                                        <p:cTn id="16" dur="200" decel="50000" autoRev="1" fill="hold">
-                                          <p:stCondLst>
-                                            <p:cond delay="600"/>
-                                          </p:stCondLst>
-                                        </p:cTn>
-                                        <p:tgtEl>
-                                          <p:spTgt spid="8"/>
-                                        </p:tgtEl>
-                                        <p:attrNameLst>
-                                          <p:attrName>xshear</p:attrName>
-                                        </p:attrNameLst>
-                                      </p:cBhvr>
-                                    </p:anim>
-                                    <p:animScale>
-                                      <p:cBhvr>
-                                        <p:cTn id="17" dur="200" decel="100000" autoRev="1" fill="hold">
-                                          <p:stCondLst>
-                                            <p:cond delay="600"/>
-                                          </p:stCondLst>
-                                        </p:cTn>
-                                        <p:tgtEl>
-                                          <p:spTgt spid="8"/>
-                                        </p:tgtEl>
-                                      </p:cBhvr>
-                                      <p:from x="100000" y="100000"/>
-                                      <p:to x="80000" y="100000"/>
-                                    </p:animScale>
-                                    <p:anim by="(#ppt_h/3+#ppt_w*0.1)" calcmode="lin" valueType="num">
-                                      <p:cBhvr additive="sum">
-                                        <p:cTn id="18" dur="200" decel="100000" autoRev="1" fill="hold">
-                                          <p:stCondLst>
-                                            <p:cond delay="600"/>
-                                          </p:stCondLst>
-                                        </p:cTn>
-                                        <p:tgtEl>
-                                          <p:spTgt spid="8"/>
-                                        </p:tgtEl>
-                                        <p:attrNameLst>
-                                          <p:attrName>ppt_x</p:attrName>
-                                        </p:attrNameLst>
-                                      </p:cBhvr>
-                                    </p:anim>
-                                  </p:childTnLst>
-                                </p:cTn>
-                              </p:par>
-                            </p:childTnLst>
-                          </p:cTn>
-                        </p:par>
-                      </p:childTnLst>
-                    </p:cTn>
-                  </p:par>
-                  <p:par>
-                    <p:cTn id="19" fill="hold">
-                      <p:stCondLst>
-                        <p:cond delay="indefinite"/>
-                      </p:stCondLst>
-                      <p:childTnLst>
-                        <p:par>
-                          <p:cTn id="20" fill="hold">
-                            <p:stCondLst>
-                              <p:cond delay="0"/>
-                            </p:stCondLst>
-                            <p:childTnLst>
-                              <p:par>
-                                <p:cTn id="21" presetID="34" presetClass="entr" presetSubtype="0" fill="hold" grpId="0" nodeType="clickEffect">
-                                  <p:stCondLst>
-                                    <p:cond delay="0"/>
-                                  </p:stCondLst>
-                                  <p:childTnLst>
-                                    <p:set>
-                                      <p:cBhvr>
-                                        <p:cTn id="22" dur="1" fill="hold">
-                                          <p:stCondLst>
-                                            <p:cond delay="0"/>
-                                          </p:stCondLst>
-                                        </p:cTn>
-                                        <p:tgtEl>
-                                          <p:spTgt spid="10"/>
-                                        </p:tgtEl>
-                                        <p:attrNameLst>
-                                          <p:attrName>style.visibility</p:attrName>
-                                        </p:attrNameLst>
-                                      </p:cBhvr>
-                                      <p:to>
-                                        <p:strVal val="visible"/>
-                                      </p:to>
-                                    </p:set>
-                                    <p:anim from="(-#ppt_w/2)" to="(#ppt_x)" calcmode="lin" valueType="num">
-                                      <p:cBhvr>
-                                        <p:cTn id="23" dur="600" fill="hold">
-                                          <p:stCondLst>
-                                            <p:cond delay="0"/>
-                                          </p:stCondLst>
-                                        </p:cTn>
-                                        <p:tgtEl>
-                                          <p:spTgt spid="10"/>
-                                        </p:tgtEl>
-                                        <p:attrNameLst>
-                                          <p:attrName>ppt_x</p:attrName>
-                                        </p:attrNameLst>
-                                      </p:cBhvr>
-                                    </p:anim>
-                                    <p:anim from="0" to="-1.0" calcmode="lin" valueType="num">
-                                      <p:cBhvr>
-                                        <p:cTn id="24" dur="200" decel="50000" autoRev="1" fill="hold">
-                                          <p:stCondLst>
-                                            <p:cond delay="600"/>
-                                          </p:stCondLst>
-                                        </p:cTn>
-                                        <p:tgtEl>
-                                          <p:spTgt spid="10"/>
-                                        </p:tgtEl>
-                                        <p:attrNameLst>
-                                          <p:attrName>xshear</p:attrName>
-                                        </p:attrNameLst>
-                                      </p:cBhvr>
-                                    </p:anim>
-                                    <p:animScale>
-                                      <p:cBhvr>
-                                        <p:cTn id="25" dur="200" decel="100000" autoRev="1" fill="hold">
-                                          <p:stCondLst>
-                                            <p:cond delay="600"/>
-                                          </p:stCondLst>
-                                        </p:cTn>
-                                        <p:tgtEl>
-                                          <p:spTgt spid="10"/>
-                                        </p:tgtEl>
-                                      </p:cBhvr>
-                                      <p:from x="100000" y="100000"/>
-                                      <p:to x="80000" y="100000"/>
-                                    </p:animScale>
-                                    <p:anim by="(#ppt_h/3+#ppt_w*0.1)" calcmode="lin" valueType="num">
-                                      <p:cBhvr additive="sum">
-                                        <p:cTn id="26" dur="200" decel="100000" autoRev="1" fill="hold">
-                                          <p:stCondLst>
-                                            <p:cond delay="600"/>
-                                          </p:stCondLst>
-                                        </p:cTn>
-                                        <p:tgtEl>
-                                          <p:spTgt spid="10"/>
-                                        </p:tgtEl>
-                                        <p:attrNameLst>
-                                          <p:attrName>ppt_x</p:attrName>
-                                        </p:attrNameLst>
-                                      </p:cBhvr>
-                                    </p:anim>
-                                  </p:childTnLst>
-                                </p:cTn>
-                              </p:par>
-                            </p:childTnLst>
-                          </p:cTn>
-                        </p:par>
-                      </p:childTnLst>
-                    </p:cTn>
-                  </p:par>
-                </p:childTnLst>
-              </p:cTn>
-              <p:prevCondLst>
-                <p:cond evt="onPrev" delay="0">
-                  <p:tgtEl>
-                    <p:sldTgt/>
-                  </p:tgtEl>
-                </p:cond>
-              </p:prevCondLst>
-              <p:nextCondLst>
-                <p:cond evt="onNext" delay="0">
-                  <p:tgtEl>
-                    <p:sldTgt/>
-                  </p:tgtEl>
-                </p:cond>
-              </p:nextCondLst>
-            </p:seq>
-          </p:childTnLst>
-        </p:cTn>
-      </p:par>
-    </p:tnLst>
-    <p:bldLst>
-      <p:bldP spid="6" grpId="0"/>
-      <p:bldP spid="8" grpId="0"/>
-      <p:bldP spid="10" grpId="0"/>
-    </p:bldLst>
-  </p:timing>
-</p:sld>
-</file>
-
-<file path=ppt/slides/slide13.xml><?xml version="1.0" encoding="utf-8"?>
-<p:sld xmlns:a="http://schemas.openxmlformats.org/drawingml/2006/main" xmlns:r="http://schemas.openxmlformats.org/officeDocument/2006/relationships" xmlns:p="http://schemas.openxmlformats.org/presentationml/2006/main">
-  <p:cSld>
-    <p:spTree>
-      <p:nvGrpSpPr>
-        <p:cNvPr id="1" name=""/>
-        <p:cNvGrpSpPr/>
-        <p:nvPr/>
-      </p:nvGrpSpPr>
-      <p:grpSpPr>
-        <a:xfrm>
-          <a:off x="0" y="0"/>
-          <a:ext cx="0" cy="0"/>
-          <a:chOff x="0" y="0"/>
-          <a:chExt cx="0" cy="0"/>
-        </a:xfrm>
-      </p:grpSpPr>
-      <p:sp>
-        <p:nvSpPr>
-          <p:cNvPr id="2" name="Title 1">
-            <a:extLst>
-              <a:ext uri="{FF2B5EF4-FFF2-40B4-BE49-F238E27FC236}">
-                <a16:creationId xmlns:a16="http://schemas.microsoft.com/office/drawing/2014/main" id="{C08D30B1-1864-30EF-7EAB-9BEE656C0012}"/>
-              </a:ext>
-            </a:extLst>
-          </p:cNvPr>
-          <p:cNvSpPr>
-            <a:spLocks noGrp="1"/>
-          </p:cNvSpPr>
-          <p:nvPr>
-            <p:ph type="title"/>
-          </p:nvPr>
-        </p:nvSpPr>
-        <p:spPr/>
-        <p:txBody>
-          <a:bodyPr>
-            <a:noAutofit/>
-          </a:bodyPr>
-          <a:lstStyle/>
-          <a:p>
-            <a:r>
-              <a:rPr lang="en-US">
-                <a:solidFill>
-                  <a:srgbClr val="1F3864"/>
-                </a:solidFill>
-              </a:rPr>
-              <a:t>t versus the standard normal</a:t>
-            </a:r>
-          </a:p>
-        </p:txBody>
-      </p:sp>
-      <p:sp>
-        <p:nvSpPr>
-          <p:cNvPr id="4" name="Slide Number Placeholder 3">
-            <a:extLst>
-              <a:ext uri="{FF2B5EF4-FFF2-40B4-BE49-F238E27FC236}">
-                <a16:creationId xmlns:a16="http://schemas.microsoft.com/office/drawing/2014/main" id="{3F875068-D051-44AE-498E-1BEBEDE3A7C8}"/>
-              </a:ext>
-            </a:extLst>
-          </p:cNvPr>
-          <p:cNvSpPr>
-            <a:spLocks noGrp="1"/>
-          </p:cNvSpPr>
-          <p:nvPr>
-            <p:ph type="sldNum" sz="quarter" idx="12"/>
-          </p:nvPr>
-        </p:nvSpPr>
-        <p:spPr/>
-        <p:txBody>
-          <a:bodyPr/>
-          <a:lstStyle/>
-          <a:p>
-            <a:fld id="{A80A81DD-F10A-4B1C-963A-0ABBB4865886}" type="slidenum">
-              <a:rPr lang="en-US" sz="1600" smtClean="0"/>
-              <a:t>13</a:t>
-            </a:fld>
-            <a:endParaRPr lang="en-US" sz="1600"/>
-          </a:p>
-        </p:txBody>
-      </p:sp>
-      <p:sp>
-        <p:nvSpPr>
-          <p:cNvPr id="3" name="Title rule">
-            <a:extLst>
-              <a:ext uri="{FF2B5EF4-FFF2-40B4-BE49-F238E27FC236}">
-                <a16:creationId xmlns:a16="http://schemas.microsoft.com/office/drawing/2014/main" id="{30656AA8-9645-F028-C769-A313710853CC}"/>
-              </a:ext>
-            </a:extLst>
-          </p:cNvPr>
-          <p:cNvSpPr/>
-          <p:nvPr/>
-        </p:nvSpPr>
-        <p:spPr>
-          <a:xfrm>
-            <a:off x="838200" y="1600200"/>
-            <a:ext cx="10515600" cy="38100"/>
-          </a:xfrm>
-          <a:prstGeom prst="rect">
-            <a:avLst/>
-          </a:prstGeom>
-          <a:solidFill>
-            <a:srgbClr val="4472C4"/>
-          </a:solidFill>
-          <a:ln w="12700" cap="flat" cmpd="sng" algn="ctr">
-            <a:noFill/>
-            <a:prstDash val="solid"/>
-            <a:miter lim="800000"/>
-          </a:ln>
-          <a:effectLst/>
-          <a:extLst>
-            <a:ext uri="{91240B29-F687-4F45-9708-019B960494DF}">
-              <a14:hiddenLine xmlns:a14="http://schemas.microsoft.com/office/drawing/2010/main" w="12700" cap="flat" cmpd="sng" algn="ctr">
-                <a:solidFill>
-                  <a:schemeClr val="accent1">
-                    <a:shade val="15000"/>
-                  </a:schemeClr>
-                </a:solidFill>
-                <a:prstDash val="solid"/>
-                <a:miter lim="800000"/>
-              </a14:hiddenLine>
-            </a:ext>
-          </a:extLst>
-        </p:spPr>
-        <p:style>
-          <a:lnRef idx="2">
-            <a:schemeClr val="accent1">
-              <a:shade val="15000"/>
-            </a:schemeClr>
-          </a:lnRef>
-          <a:fillRef idx="1">
-            <a:schemeClr val="accent1"/>
-          </a:fillRef>
-          <a:effectRef idx="0">
-            <a:schemeClr val="accent1"/>
-          </a:effectRef>
-          <a:fontRef idx="minor">
-            <a:schemeClr val="lt1"/>
-          </a:fontRef>
-        </p:style>
-        <p:txBody>
-          <a:bodyPr rtlCol="0" anchor="ctr"/>
-          <a:lstStyle/>
-          <a:p>
-            <a:pPr algn="ctr"/>
-            <a:endParaRPr lang="en-US"/>
-          </a:p>
-        </p:txBody>
-      </p:sp>
-      <p:sp>
-        <p:nvSpPr>
-          <p:cNvPr id="8" name="Context">
-            <a:extLst>
-              <a:ext uri="{FF2B5EF4-FFF2-40B4-BE49-F238E27FC236}">
-                <a16:creationId xmlns:a16="http://schemas.microsoft.com/office/drawing/2014/main" id="{71E3EA8C-31B4-DAD4-BC4A-65D72E59AD46}"/>
-              </a:ext>
-            </a:extLst>
-          </p:cNvPr>
-          <p:cNvSpPr txBox="1"/>
-          <p:nvPr/>
-        </p:nvSpPr>
-        <p:spPr>
-          <a:xfrm>
-            <a:off x="762000" y="1879600"/>
-            <a:ext cx="10668000" cy="381000"/>
-          </a:xfrm>
-          <a:prstGeom prst="rect">
-            <a:avLst/>
-          </a:prstGeom>
-          <a:noFill/>
-        </p:spPr>
-        <p:txBody>
-          <a:bodyPr vert="horz" wrap="square" rtlCol="0">
-            <a:spAutoFit/>
-          </a:bodyPr>
-          <a:lstStyle/>
-          <a:p>
-            <a:pPr>
-              <a:spcAft>
-                <a:spcPts val="200"/>
-              </a:spcAft>
-            </a:pPr>
-            <a:r>
-              <a:rPr lang="en-US">
-                <a:solidFill>
-                  <a:srgbClr val="000000"/>
-                </a:solidFill>
-                <a:latin typeface="Calibri" panose="020F0502020204030204" pitchFamily="34" charset="0"/>
-              </a:rPr>
-              <a:t>Density curves of t with 2, 5 and 30 degrees of freedom, and the standard normal N(0, 1).</a:t>
-            </a:r>
-          </a:p>
-        </p:txBody>
-      </p:sp>
-      <p:sp>
-        <p:nvSpPr>
-          <p:cNvPr id="10" name="Question">
-            <a:extLst>
-              <a:ext uri="{FF2B5EF4-FFF2-40B4-BE49-F238E27FC236}">
-                <a16:creationId xmlns:a16="http://schemas.microsoft.com/office/drawing/2014/main" id="{B31E395F-B84E-D1E9-D22A-222467FC4105}"/>
-              </a:ext>
-            </a:extLst>
-          </p:cNvPr>
-          <p:cNvSpPr txBox="1"/>
-          <p:nvPr/>
-        </p:nvSpPr>
-        <p:spPr>
-          <a:xfrm>
-            <a:off x="762000" y="2286000"/>
-            <a:ext cx="10668000" cy="369332"/>
-          </a:xfrm>
-          <a:prstGeom prst="rect">
-            <a:avLst/>
-          </a:prstGeom>
-          <a:noFill/>
-        </p:spPr>
-        <p:txBody>
-          <a:bodyPr vert="horz" wrap="square" rtlCol="0">
-            <a:spAutoFit/>
-          </a:bodyPr>
-          <a:lstStyle/>
-          <a:p>
-            <a:pPr>
-              <a:spcAft>
-                <a:spcPts val="200"/>
-              </a:spcAft>
-            </a:pPr>
-            <a:r>
-              <a:rPr lang="en-US" b="1">
-                <a:solidFill>
-                  <a:srgbClr val="C00000"/>
-                </a:solidFill>
-                <a:latin typeface="Calibri" panose="020F0502020204030204" pitchFamily="34" charset="0"/>
-              </a:rPr>
-              <a:t>Which curve has the heaviest tails?  What happens as df grows?</a:t>
-            </a:r>
-          </a:p>
-        </p:txBody>
-      </p:sp>
-      <p:sp>
-        <p:nvSpPr>
-          <p:cNvPr id="11" name="Result">
-            <a:extLst>
-              <a:ext uri="{FF2B5EF4-FFF2-40B4-BE49-F238E27FC236}">
-                <a16:creationId xmlns:a16="http://schemas.microsoft.com/office/drawing/2014/main" id="{5A70F68E-0D93-07B8-82B2-4D8F2F681D0D}"/>
-              </a:ext>
-            </a:extLst>
-          </p:cNvPr>
-          <p:cNvSpPr/>
-          <p:nvPr/>
-        </p:nvSpPr>
-        <p:spPr>
-          <a:xfrm>
-            <a:off x="762000" y="5487432"/>
-            <a:ext cx="10668000" cy="470595"/>
-          </a:xfrm>
-          <a:prstGeom prst="roundRect">
-            <a:avLst>
-              <a:gd name="adj" fmla="val 4000"/>
-            </a:avLst>
-          </a:prstGeom>
-          <a:solidFill>
-            <a:srgbClr val="F2F6FC"/>
-          </a:solidFill>
-          <a:ln w="15875">
-            <a:solidFill>
-              <a:srgbClr val="4472C4"/>
-            </a:solidFill>
-          </a:ln>
-        </p:spPr>
-        <p:style>
-          <a:lnRef idx="2">
-            <a:schemeClr val="accent1">
-              <a:shade val="15000"/>
-            </a:schemeClr>
-          </a:lnRef>
-          <a:fillRef idx="1">
-            <a:schemeClr val="accent1"/>
-          </a:fillRef>
-          <a:effectRef idx="0">
-            <a:schemeClr val="accent1"/>
-          </a:effectRef>
-          <a:fontRef idx="minor">
-            <a:schemeClr val="lt1"/>
-          </a:fontRef>
-        </p:style>
-        <p:txBody>
-          <a:bodyPr wrap="square" lIns="152400" tIns="76200" rIns="152400" bIns="76200" rtlCol="0" anchor="ctr">
-            <a:spAutoFit/>
-          </a:bodyPr>
-          <a:lstStyle/>
-          <a:p>
-            <a:r>
-              <a:rPr lang="en-US" sz="2000" b="1">
-                <a:solidFill>
-                  <a:srgbClr val="C00000"/>
-                </a:solidFill>
-                <a:latin typeface="Calibri" panose="020F0502020204030204" pitchFamily="34" charset="0"/>
-              </a:rPr>
-              <a:t>df = 2.   As df grows, t approaches N(0, 1);  by df = 30 they nearly match</a:t>
-            </a:r>
-          </a:p>
-        </p:txBody>
-      </p:sp>
-      <p:pic>
-        <p:nvPicPr>
-          <p:cNvPr id="7" name="l20_t_vs_z.png">
-            <a:extLst>
-              <a:ext uri="{FF2B5EF4-FFF2-40B4-BE49-F238E27FC236}">
-                <a16:creationId xmlns:a16="http://schemas.microsoft.com/office/drawing/2014/main" id="{7B66403A-08B4-5A35-6900-CD060D949E0E}"/>
-              </a:ext>
-            </a:extLst>
-          </p:cNvPr>
-          <p:cNvPicPr>
-            <a:picLocks/>
-          </p:cNvPicPr>
-          <p:nvPr/>
-        </p:nvPicPr>
-        <p:blipFill>
-          <a:blip r:embed="rId2">
-            <a:extLst>
-              <a:ext uri="{28A0092B-C50C-407E-A947-70E740481C1C}">
-                <a14:useLocalDpi xmlns:a14="http://schemas.microsoft.com/office/drawing/2010/main" val="0"/>
-              </a:ext>
-            </a:extLst>
-          </a:blip>
-          <a:stretch>
-            <a:fillRect/>
-          </a:stretch>
-        </p:blipFill>
-        <p:spPr>
-          <a:xfrm>
-            <a:off x="2032000" y="2706132"/>
-            <a:ext cx="8128000" cy="2730500"/>
-          </a:xfrm>
-          <a:prstGeom prst="rect">
-            <a:avLst/>
-          </a:prstGeom>
-        </p:spPr>
-      </p:pic>
-    </p:spTree>
-    <p:extLst>
-      <p:ext uri="{BB962C8B-B14F-4D97-AF65-F5344CB8AC3E}">
-        <p14:creationId xmlns:p14="http://schemas.microsoft.com/office/powerpoint/2010/main" val="869617434"/>
-      </p:ext>
-    </p:extLst>
-  </p:cSld>
-  <p:clrMapOvr>
-    <a:masterClrMapping/>
-  </p:clrMapOvr>
-  <p:timing>
-    <p:tnLst>
-      <p:par>
-        <p:cTn id="1" dur="indefinite" restart="never" nodeType="tmRoot">
-          <p:childTnLst>
-            <p:seq concurrent="1" nextAc="seek">
-              <p:cTn id="2" dur="indefinite" nodeType="mainSeq">
-                <p:childTnLst>
-                  <p:par>
-                    <p:cTn id="3" fill="hold">
-                      <p:stCondLst>
-                        <p:cond delay="indefinite"/>
-                      </p:stCondLst>
-                      <p:childTnLst>
-                        <p:par>
-                          <p:cTn id="4" fill="hold">
-                            <p:stCondLst>
-                              <p:cond delay="0"/>
-                            </p:stCondLst>
-                            <p:childTnLst>
-                              <p:par>
-                                <p:cTn id="5" presetID="1" presetClass="entr" presetSubtype="0" fill="hold" grpId="0" nodeType="clickEffect">
-                                  <p:stCondLst>
-                                    <p:cond delay="0"/>
-                                  </p:stCondLst>
-                                  <p:childTnLst>
-                                    <p:set>
-                                      <p:cBhvr>
-                                        <p:cTn id="6" dur="1" fill="hold">
-                                          <p:stCondLst>
-                                            <p:cond delay="0"/>
-                                          </p:stCondLst>
-                                        </p:cTn>
-                                        <p:tgtEl>
-                                          <p:spTgt spid="11"/>
-                                        </p:tgtEl>
-                                        <p:attrNameLst>
-                                          <p:attrName>style.visibility</p:attrName>
-                                        </p:attrNameLst>
-                                      </p:cBhvr>
-                                      <p:to>
-                                        <p:strVal val="visible"/>
-                                      </p:to>
-                                    </p:set>
-                                  </p:childTnLst>
-                                </p:cTn>
-                              </p:par>
-                            </p:childTnLst>
-                          </p:cTn>
-                        </p:par>
-                      </p:childTnLst>
-                    </p:cTn>
-                  </p:par>
-                </p:childTnLst>
-              </p:cTn>
-              <p:prevCondLst>
-                <p:cond evt="onPrev" delay="0">
-                  <p:tgtEl>
-                    <p:sldTgt/>
-                  </p:tgtEl>
-                </p:cond>
-              </p:prevCondLst>
-              <p:nextCondLst>
-                <p:cond evt="onNext" delay="0">
-                  <p:tgtEl>
-                    <p:sldTgt/>
-                  </p:tgtEl>
-                </p:cond>
-              </p:nextCondLst>
-            </p:seq>
-          </p:childTnLst>
-        </p:cTn>
-      </p:par>
-    </p:tnLst>
-    <p:bldLst>
-      <p:bldP spid="11" grpId="0" animBg="1"/>
-    </p:bldLst>
-  </p:timing>
-</p:sld>
-</file>
-
-<file path=ppt/slides/slide14.xml><?xml version="1.0" encoding="utf-8"?>
-<p:sld xmlns:a="http://schemas.openxmlformats.org/drawingml/2006/main" xmlns:r="http://schemas.openxmlformats.org/officeDocument/2006/relationships" xmlns:p="http://schemas.openxmlformats.org/presentationml/2006/main">
-  <p:cSld>
-    <p:spTree>
-      <p:nvGrpSpPr>
-        <p:cNvPr id="1" name=""/>
-        <p:cNvGrpSpPr/>
-        <p:nvPr/>
-      </p:nvGrpSpPr>
-      <p:grpSpPr>
-        <a:xfrm>
-          <a:off x="0" y="0"/>
-          <a:ext cx="0" cy="0"/>
-          <a:chOff x="0" y="0"/>
-          <a:chExt cx="0" cy="0"/>
-        </a:xfrm>
-      </p:grpSpPr>
-      <p:sp>
-        <p:nvSpPr>
-          <p:cNvPr id="2" name="Title 1">
-            <a:extLst>
-              <a:ext uri="{FF2B5EF4-FFF2-40B4-BE49-F238E27FC236}">
-                <a16:creationId xmlns:a16="http://schemas.microsoft.com/office/drawing/2014/main" id="{C08D30B1-1864-30EF-7EAB-9BEE656C0012}"/>
-              </a:ext>
-            </a:extLst>
-          </p:cNvPr>
-          <p:cNvSpPr>
-            <a:spLocks noGrp="1"/>
-          </p:cNvSpPr>
-          <p:nvPr>
-            <p:ph type="title"/>
-          </p:nvPr>
-        </p:nvSpPr>
-        <p:spPr/>
-        <p:txBody>
-          <a:bodyPr>
-            <a:noAutofit/>
-          </a:bodyPr>
-          <a:lstStyle/>
-          <a:p>
-            <a:r>
-              <a:rPr lang="en-US">
-                <a:solidFill>
-                  <a:srgbClr val="1F3864"/>
-                </a:solidFill>
-              </a:rPr>
-              <a:t>Example: reading the t-table</a:t>
-            </a:r>
-          </a:p>
-        </p:txBody>
-      </p:sp>
-      <p:sp>
-        <p:nvSpPr>
-          <p:cNvPr id="4" name="Slide Number Placeholder 3">
-            <a:extLst>
-              <a:ext uri="{FF2B5EF4-FFF2-40B4-BE49-F238E27FC236}">
-                <a16:creationId xmlns:a16="http://schemas.microsoft.com/office/drawing/2014/main" id="{3F875068-D051-44AE-498E-1BEBEDE3A7C8}"/>
-              </a:ext>
-            </a:extLst>
-          </p:cNvPr>
-          <p:cNvSpPr>
-            <a:spLocks noGrp="1"/>
-          </p:cNvSpPr>
-          <p:nvPr>
-            <p:ph type="sldNum" sz="quarter" idx="12"/>
-          </p:nvPr>
-        </p:nvSpPr>
-        <p:spPr/>
-        <p:txBody>
-          <a:bodyPr/>
-          <a:lstStyle/>
-          <a:p>
-            <a:fld id="{A80A81DD-F10A-4B1C-963A-0ABBB4865886}" type="slidenum">
-              <a:rPr lang="en-US" sz="1600" smtClean="0"/>
-              <a:t>14</a:t>
-            </a:fld>
-            <a:endParaRPr lang="en-US" sz="1600"/>
-          </a:p>
-        </p:txBody>
-      </p:sp>
-      <p:sp>
-        <p:nvSpPr>
-          <p:cNvPr id="3" name="Title rule">
-            <a:extLst>
-              <a:ext uri="{FF2B5EF4-FFF2-40B4-BE49-F238E27FC236}">
-                <a16:creationId xmlns:a16="http://schemas.microsoft.com/office/drawing/2014/main" id="{30656AA8-9645-F028-C769-A313710853CC}"/>
-              </a:ext>
-            </a:extLst>
-          </p:cNvPr>
-          <p:cNvSpPr/>
-          <p:nvPr/>
-        </p:nvSpPr>
-        <p:spPr>
-          <a:xfrm>
-            <a:off x="838200" y="1600200"/>
-            <a:ext cx="10515600" cy="38100"/>
-          </a:xfrm>
-          <a:prstGeom prst="rect">
-            <a:avLst/>
-          </a:prstGeom>
-          <a:solidFill>
-            <a:srgbClr val="4472C4"/>
-          </a:solidFill>
-          <a:ln w="12700" cap="flat" cmpd="sng" algn="ctr">
-            <a:noFill/>
-            <a:prstDash val="solid"/>
-            <a:miter lim="800000"/>
-          </a:ln>
-          <a:effectLst/>
-          <a:extLst>
-            <a:ext uri="{91240B29-F687-4F45-9708-019B960494DF}">
-              <a14:hiddenLine xmlns:a14="http://schemas.microsoft.com/office/drawing/2010/main" w="12700" cap="flat" cmpd="sng" algn="ctr">
-                <a:solidFill>
-                  <a:schemeClr val="accent1">
-                    <a:shade val="15000"/>
-                  </a:schemeClr>
-                </a:solidFill>
-                <a:prstDash val="solid"/>
-                <a:miter lim="800000"/>
-              </a14:hiddenLine>
-            </a:ext>
-          </a:extLst>
-        </p:spPr>
-        <p:style>
-          <a:lnRef idx="2">
-            <a:schemeClr val="accent1">
-              <a:shade val="15000"/>
-            </a:schemeClr>
-          </a:lnRef>
-          <a:fillRef idx="1">
-            <a:schemeClr val="accent1"/>
-          </a:fillRef>
-          <a:effectRef idx="0">
-            <a:schemeClr val="accent1"/>
-          </a:effectRef>
-          <a:fontRef idx="minor">
-            <a:schemeClr val="lt1"/>
-          </a:fontRef>
-        </p:style>
-        <p:txBody>
-          <a:bodyPr rtlCol="0" anchor="ctr"/>
-          <a:lstStyle/>
-          <a:p>
-            <a:pPr algn="ctr"/>
-            <a:endParaRPr lang="en-US"/>
-          </a:p>
-        </p:txBody>
-      </p:sp>
-      <p:sp>
-        <p:nvSpPr>
-          <p:cNvPr id="8" name="Context">
-            <a:extLst>
-              <a:ext uri="{FF2B5EF4-FFF2-40B4-BE49-F238E27FC236}">
-                <a16:creationId xmlns:a16="http://schemas.microsoft.com/office/drawing/2014/main" id="{71E3EA8C-31B4-DAD4-BC4A-65D72E59AD46}"/>
-              </a:ext>
-            </a:extLst>
-          </p:cNvPr>
-          <p:cNvSpPr txBox="1"/>
-          <p:nvPr/>
-        </p:nvSpPr>
-        <p:spPr>
-          <a:xfrm>
-            <a:off x="762000" y="1879600"/>
-            <a:ext cx="10668000" cy="381000"/>
-          </a:xfrm>
-          <a:prstGeom prst="rect">
-            <a:avLst/>
-          </a:prstGeom>
-          <a:noFill/>
-        </p:spPr>
-        <p:txBody>
-          <a:bodyPr vert="horz" wrap="square" rtlCol="0">
-            <a:spAutoFit/>
-          </a:bodyPr>
-          <a:lstStyle/>
-          <a:p>
-            <a:pPr>
-              <a:spcAft>
-                <a:spcPts val="200"/>
-              </a:spcAft>
-            </a:pPr>
-            <a:r>
-              <a:rPr lang="en-US">
-                <a:solidFill>
-                  <a:srgbClr val="000000"/>
-                </a:solidFill>
-                <a:latin typeface="Calibri" panose="020F0502020204030204" pitchFamily="34" charset="0"/>
-              </a:rPr>
-              <a:t>In the course t-table, the row is df = n − 1 and the column is the confidence level.</a:t>
-            </a:r>
-          </a:p>
-        </p:txBody>
-      </p:sp>
-      <p:sp>
-        <p:nvSpPr>
-          <p:cNvPr id="9" name="Numbers">
-            <a:extLst>
-              <a:ext uri="{FF2B5EF4-FFF2-40B4-BE49-F238E27FC236}">
-                <a16:creationId xmlns:a16="http://schemas.microsoft.com/office/drawing/2014/main" id="{C419F151-05B2-3E4B-BAE8-BB1F06D9D1FD}"/>
-              </a:ext>
-            </a:extLst>
-          </p:cNvPr>
-          <p:cNvSpPr txBox="1"/>
-          <p:nvPr/>
-        </p:nvSpPr>
-        <p:spPr>
-          <a:xfrm>
-            <a:off x="762000" y="2286000"/>
-            <a:ext cx="10668000" cy="400110"/>
-          </a:xfrm>
-          <a:prstGeom prst="rect">
-            <a:avLst/>
-          </a:prstGeom>
-          <a:noFill/>
-        </p:spPr>
-        <p:txBody>
-          <a:bodyPr vert="horz" wrap="square" rtlCol="0">
-            <a:spAutoFit/>
-          </a:bodyPr>
-          <a:lstStyle/>
-          <a:p>
-            <a:pPr>
-              <a:spcAft>
-                <a:spcPts val="200"/>
-              </a:spcAft>
-            </a:pPr>
-            <a:r>
-              <a:rPr lang="pt-BR" sz="2000" b="1">
-                <a:solidFill>
-                  <a:srgbClr val="000000"/>
-                </a:solidFill>
-                <a:latin typeface="Calibri" panose="020F0502020204030204" pitchFamily="34" charset="0"/>
-              </a:rPr>
-              <a:t>95%, n = 10;     90%, n = 25;     99%, n = 10</a:t>
-            </a:r>
-            <a:endParaRPr lang="en-US" sz="2000" b="1">
-              <a:solidFill>
-                <a:srgbClr val="000000"/>
-              </a:solidFill>
-              <a:latin typeface="Calibri" panose="020F0502020204030204" pitchFamily="34" charset="0"/>
-            </a:endParaRPr>
-          </a:p>
-        </p:txBody>
-      </p:sp>
-      <p:sp>
-        <p:nvSpPr>
-          <p:cNvPr id="10" name="Question">
-            <a:extLst>
-              <a:ext uri="{FF2B5EF4-FFF2-40B4-BE49-F238E27FC236}">
-                <a16:creationId xmlns:a16="http://schemas.microsoft.com/office/drawing/2014/main" id="{B31E395F-B84E-D1E9-D22A-222467FC4105}"/>
-              </a:ext>
-            </a:extLst>
-          </p:cNvPr>
-          <p:cNvSpPr txBox="1"/>
-          <p:nvPr/>
-        </p:nvSpPr>
-        <p:spPr>
-          <a:xfrm>
-            <a:off x="762000" y="2711510"/>
-            <a:ext cx="10668000" cy="671979"/>
-          </a:xfrm>
-          <a:prstGeom prst="rect">
-            <a:avLst/>
-          </a:prstGeom>
-          <a:noFill/>
-        </p:spPr>
-        <p:txBody>
-          <a:bodyPr vert="horz" wrap="square" rtlCol="0">
-            <a:spAutoFit/>
-          </a:bodyPr>
-          <a:lstStyle/>
-          <a:p>
-            <a:pPr>
-              <a:spcAft>
-                <a:spcPts val="200"/>
-              </a:spcAft>
-            </a:pPr>
-            <a:r>
-              <a:rPr lang="en-US" b="1">
-                <a:solidFill>
-                  <a:srgbClr val="C00000"/>
-                </a:solidFill>
-                <a:latin typeface="Calibri" panose="020F0502020204030204" pitchFamily="34" charset="0"/>
-              </a:rPr>
-              <a:t>(a)  What is the t critical value for each?</a:t>
-            </a:r>
-          </a:p>
-          <a:p>
-            <a:pPr>
-              <a:spcAft>
-                <a:spcPts val="200"/>
-              </a:spcAft>
-            </a:pPr>
-            <a:r>
-              <a:rPr lang="en-US" b="1">
-                <a:solidFill>
-                  <a:srgbClr val="C00000"/>
-                </a:solidFill>
-                <a:latin typeface="Calibri" panose="020F0502020204030204" pitchFamily="34" charset="0"/>
-              </a:rPr>
-              <a:t>(b)  How does each compare with z for the same confidence level?</a:t>
-            </a:r>
-          </a:p>
-        </p:txBody>
-      </p:sp>
-      <p:sp>
-        <p:nvSpPr>
-          <p:cNvPr id="11" name="Result">
-            <a:extLst>
-              <a:ext uri="{FF2B5EF4-FFF2-40B4-BE49-F238E27FC236}">
-                <a16:creationId xmlns:a16="http://schemas.microsoft.com/office/drawing/2014/main" id="{5A70F68E-0D93-07B8-82B2-4D8F2F681D0D}"/>
-              </a:ext>
-            </a:extLst>
-          </p:cNvPr>
-          <p:cNvSpPr/>
-          <p:nvPr/>
-        </p:nvSpPr>
-        <p:spPr>
-          <a:xfrm>
-            <a:off x="762000" y="3535889"/>
-            <a:ext cx="10668000" cy="784324"/>
-          </a:xfrm>
-          <a:prstGeom prst="roundRect">
-            <a:avLst>
-              <a:gd name="adj" fmla="val 4000"/>
-            </a:avLst>
-          </a:prstGeom>
-          <a:solidFill>
-            <a:srgbClr val="F2F6FC"/>
-          </a:solidFill>
-          <a:ln w="15875">
-            <a:solidFill>
-              <a:srgbClr val="4472C4"/>
-            </a:solidFill>
-          </a:ln>
-        </p:spPr>
-        <p:style>
-          <a:lnRef idx="2">
-            <a:schemeClr val="accent1">
-              <a:shade val="15000"/>
-            </a:schemeClr>
-          </a:lnRef>
-          <a:fillRef idx="1">
-            <a:schemeClr val="accent1"/>
-          </a:fillRef>
-          <a:effectRef idx="0">
-            <a:schemeClr val="accent1"/>
-          </a:effectRef>
-          <a:fontRef idx="minor">
-            <a:schemeClr val="lt1"/>
-          </a:fontRef>
-        </p:style>
-        <p:txBody>
-          <a:bodyPr wrap="square" lIns="152400" tIns="76200" rIns="152400" bIns="76200" rtlCol="0" anchor="ctr">
-            <a:spAutoFit/>
-          </a:bodyPr>
-          <a:lstStyle/>
-          <a:p>
-            <a:r>
-              <a:rPr lang="en-US" sz="2000" b="1">
-                <a:solidFill>
-                  <a:srgbClr val="C00000"/>
-                </a:solidFill>
-                <a:latin typeface="Calibri" panose="020F0502020204030204" pitchFamily="34" charset="0"/>
-              </a:rPr>
-              <a:t>(a)  df = 9:  2.262          df = 24:  1.711          df = 9:  3.250</a:t>
-            </a:r>
-          </a:p>
-          <a:p>
-            <a:r>
-              <a:rPr lang="en-US" sz="2000" b="1">
-                <a:solidFill>
-                  <a:srgbClr val="C00000"/>
-                </a:solidFill>
-                <a:latin typeface="Calibri" panose="020F0502020204030204" pitchFamily="34" charset="0"/>
-              </a:rPr>
-              <a:t>(b)  z = 1.960,  1.645,  2.576:   t is always larger</a:t>
-            </a:r>
-          </a:p>
-        </p:txBody>
-      </p:sp>
-    </p:spTree>
-    <p:extLst>
-      <p:ext uri="{BB962C8B-B14F-4D97-AF65-F5344CB8AC3E}">
-        <p14:creationId xmlns:p14="http://schemas.microsoft.com/office/powerpoint/2010/main" val="2363623500"/>
-      </p:ext>
-    </p:extLst>
-  </p:cSld>
-  <p:clrMapOvr>
-    <a:masterClrMapping/>
-  </p:clrMapOvr>
-  <p:timing>
-    <p:tnLst>
-      <p:par>
-        <p:cTn id="1" dur="indefinite" restart="never" nodeType="tmRoot">
-          <p:childTnLst>
-            <p:seq concurrent="1" nextAc="seek">
-              <p:cTn id="2" dur="indefinite" nodeType="mainSeq">
-                <p:childTnLst>
-                  <p:par>
-                    <p:cTn id="3" fill="hold">
-                      <p:stCondLst>
-                        <p:cond delay="indefinite"/>
-                      </p:stCondLst>
-                      <p:childTnLst>
-                        <p:par>
-                          <p:cTn id="4" fill="hold">
-                            <p:stCondLst>
-                              <p:cond delay="0"/>
-                            </p:stCondLst>
-                            <p:childTnLst>
-                              <p:par>
-                                <p:cTn id="5" presetID="1" presetClass="entr" presetSubtype="0" fill="hold" grpId="0" nodeType="clickEffect">
-                                  <p:stCondLst>
-                                    <p:cond delay="0"/>
-                                  </p:stCondLst>
-                                  <p:childTnLst>
-                                    <p:set>
-                                      <p:cBhvr>
-                                        <p:cTn id="6" dur="1" fill="hold">
-                                          <p:stCondLst>
-                                            <p:cond delay="0"/>
-                                          </p:stCondLst>
-                                        </p:cTn>
-                                        <p:tgtEl>
-                                          <p:spTgt spid="11"/>
-                                        </p:tgtEl>
-                                        <p:attrNameLst>
-                                          <p:attrName>style.visibility</p:attrName>
-                                        </p:attrNameLst>
-                                      </p:cBhvr>
-                                      <p:to>
-                                        <p:strVal val="visible"/>
-                                      </p:to>
-                                    </p:set>
-                                  </p:childTnLst>
-                                </p:cTn>
-                              </p:par>
-                            </p:childTnLst>
-                          </p:cTn>
-                        </p:par>
-                      </p:childTnLst>
-                    </p:cTn>
-                  </p:par>
-                </p:childTnLst>
-              </p:cTn>
-              <p:prevCondLst>
-                <p:cond evt="onPrev" delay="0">
-                  <p:tgtEl>
-                    <p:sldTgt/>
-                  </p:tgtEl>
-                </p:cond>
-              </p:prevCondLst>
-              <p:nextCondLst>
-                <p:cond evt="onNext" delay="0">
-                  <p:tgtEl>
-                    <p:sldTgt/>
-                  </p:tgtEl>
-                </p:cond>
-              </p:nextCondLst>
-            </p:seq>
-          </p:childTnLst>
-        </p:cTn>
-      </p:par>
-    </p:tnLst>
-    <p:bldLst>
-      <p:bldP spid="11" grpId="0" animBg="1"/>
-    </p:bldLst>
-  </p:timing>
-</p:sld>
-</file>
-
-<file path=ppt/slides/slide15.xml><?xml version="1.0" encoding="utf-8"?>
-<p:sld xmlns:a="http://schemas.openxmlformats.org/drawingml/2006/main" xmlns:r="http://schemas.openxmlformats.org/officeDocument/2006/relationships" xmlns:p="http://schemas.openxmlformats.org/presentationml/2006/main">
-  <p:cSld>
-    <p:spTree>
-      <p:nvGrpSpPr>
-        <p:cNvPr id="1" name=""/>
-        <p:cNvGrpSpPr/>
-        <p:nvPr/>
-      </p:nvGrpSpPr>
-      <p:grpSpPr>
-        <a:xfrm>
-          <a:off x="0" y="0"/>
-          <a:ext cx="0" cy="0"/>
-          <a:chOff x="0" y="0"/>
-          <a:chExt cx="0" cy="0"/>
-        </a:xfrm>
-      </p:grpSpPr>
-      <p:sp>
-        <p:nvSpPr>
-          <p:cNvPr id="2" name="Title 1">
-            <a:extLst>
-              <a:ext uri="{FF2B5EF4-FFF2-40B4-BE49-F238E27FC236}">
-                <a16:creationId xmlns:a16="http://schemas.microsoft.com/office/drawing/2014/main" id="{D617AB41-6AD1-9EF2-7F95-46A904399681}"/>
-              </a:ext>
-            </a:extLst>
-          </p:cNvPr>
-          <p:cNvSpPr>
-            <a:spLocks noGrp="1"/>
-          </p:cNvSpPr>
-          <p:nvPr>
-            <p:ph type="title"/>
-          </p:nvPr>
-        </p:nvSpPr>
-        <p:spPr/>
-        <p:txBody>
-          <a:bodyPr>
-            <a:noAutofit/>
-          </a:bodyPr>
-          <a:lstStyle/>
-          <a:p>
-            <a:r>
-              <a:rPr lang="en-US">
-                <a:solidFill>
-                  <a:srgbClr val="1F3864"/>
-                </a:solidFill>
-              </a:rPr>
-              <a:t>Which interval?</a:t>
-            </a:r>
-          </a:p>
-        </p:txBody>
-      </p:sp>
-      <p:sp>
-        <p:nvSpPr>
-          <p:cNvPr id="4" name="Slide Number Placeholder 3">
-            <a:extLst>
-              <a:ext uri="{FF2B5EF4-FFF2-40B4-BE49-F238E27FC236}">
-                <a16:creationId xmlns:a16="http://schemas.microsoft.com/office/drawing/2014/main" id="{97D44AE5-98B5-B840-6B8A-D345C7C2E2F0}"/>
-              </a:ext>
-            </a:extLst>
-          </p:cNvPr>
-          <p:cNvSpPr>
-            <a:spLocks noGrp="1"/>
-          </p:cNvSpPr>
-          <p:nvPr>
-            <p:ph type="sldNum" sz="quarter" idx="12"/>
-          </p:nvPr>
-        </p:nvSpPr>
-        <p:spPr/>
-        <p:txBody>
-          <a:bodyPr/>
-          <a:lstStyle/>
-          <a:p>
-            <a:fld id="{A80A81DD-F10A-4B1C-963A-0ABBB4865886}" type="slidenum">
-              <a:rPr lang="en-US" sz="1600" smtClean="0"/>
-              <a:t>15</a:t>
-            </a:fld>
-            <a:endParaRPr lang="en-US" sz="1600"/>
-          </a:p>
-        </p:txBody>
-      </p:sp>
-      <p:sp>
-        <p:nvSpPr>
-          <p:cNvPr id="5" name="TextBox 4">
-            <a:extLst>
-              <a:ext uri="{FF2B5EF4-FFF2-40B4-BE49-F238E27FC236}">
-                <a16:creationId xmlns:a16="http://schemas.microsoft.com/office/drawing/2014/main" id="{A34AAE17-27CE-D7A3-C663-11BB48ACBF5B}"/>
-              </a:ext>
-            </a:extLst>
-          </p:cNvPr>
-          <p:cNvSpPr txBox="1"/>
-          <p:nvPr/>
-        </p:nvSpPr>
-        <p:spPr>
-          <a:xfrm>
-            <a:off x="762000" y="1879600"/>
-            <a:ext cx="10668000" cy="345440"/>
-          </a:xfrm>
-          <a:prstGeom prst="rect">
-            <a:avLst/>
-          </a:prstGeom>
-          <a:noFill/>
-        </p:spPr>
-        <p:txBody>
-          <a:bodyPr vert="horz" wrap="square" rtlCol="0">
-            <a:spAutoFit/>
-          </a:bodyPr>
-          <a:lstStyle/>
-          <a:p>
-            <a:pPr marL="304800" indent="-304800"/>
-            <a:r>
-              <a:rPr lang="en-US" sz="1600">
-                <a:solidFill>
-                  <a:srgbClr val="000000"/>
-                </a:solidFill>
-              </a:rPr>
-              <a:t>a proportion p</a:t>
-            </a:r>
-          </a:p>
-        </p:txBody>
-      </p:sp>
-      <p:sp>
-        <p:nvSpPr>
-          <p:cNvPr id="6" name="TextBox 5">
-            <a:extLst>
-              <a:ext uri="{FF2B5EF4-FFF2-40B4-BE49-F238E27FC236}">
-                <a16:creationId xmlns:a16="http://schemas.microsoft.com/office/drawing/2014/main" id="{E410A0F8-5E1E-9A1D-B64C-50827EE6C9B2}"/>
-              </a:ext>
-            </a:extLst>
-          </p:cNvPr>
-          <p:cNvSpPr txBox="1"/>
-          <p:nvPr/>
-        </p:nvSpPr>
-        <p:spPr>
-          <a:xfrm>
-            <a:off x="1117600" y="2225040"/>
-            <a:ext cx="10312400" cy="338554"/>
-          </a:xfrm>
-          <a:prstGeom prst="rect">
-            <a:avLst/>
-          </a:prstGeom>
-          <a:noFill/>
-        </p:spPr>
-        <p:txBody>
-          <a:bodyPr vert="horz" wrap="square" rtlCol="0">
-            <a:spAutoFit/>
-          </a:bodyPr>
-          <a:lstStyle/>
-          <a:p>
-            <a:r>
-              <a:rPr lang="en-US" sz="1600" b="1">
-                <a:solidFill>
-                  <a:srgbClr val="C00000"/>
-                </a:solidFill>
-              </a:rPr>
-              <a:t>p̂ ± z √(p̂(1 − p̂) / n),   when np̂ &gt; 5 and n(1 − p̂) &gt; 5</a:t>
-            </a:r>
-          </a:p>
-        </p:txBody>
-      </p:sp>
-      <p:sp>
-        <p:nvSpPr>
-          <p:cNvPr id="7" name="TextBox 6">
-            <a:extLst>
-              <a:ext uri="{FF2B5EF4-FFF2-40B4-BE49-F238E27FC236}">
-                <a16:creationId xmlns:a16="http://schemas.microsoft.com/office/drawing/2014/main" id="{47D3CD95-D52E-5227-B663-7C0A72677B6E}"/>
-              </a:ext>
-            </a:extLst>
-          </p:cNvPr>
-          <p:cNvSpPr txBox="1"/>
-          <p:nvPr/>
-        </p:nvSpPr>
-        <p:spPr>
-          <a:xfrm>
-            <a:off x="762000" y="2741394"/>
-            <a:ext cx="10668000" cy="345440"/>
-          </a:xfrm>
-          <a:prstGeom prst="rect">
-            <a:avLst/>
-          </a:prstGeom>
-          <a:noFill/>
-        </p:spPr>
-        <p:txBody>
-          <a:bodyPr vert="horz" wrap="square" rtlCol="0">
-            <a:spAutoFit/>
-          </a:bodyPr>
-          <a:lstStyle/>
-          <a:p>
-            <a:pPr marL="304800" indent="-304800"/>
-            <a:r>
-              <a:rPr lang="en-US" sz="1600">
-                <a:solidFill>
-                  <a:srgbClr val="000000"/>
-                </a:solidFill>
-              </a:rPr>
-              <a:t>a mean μ, σ known</a:t>
-            </a:r>
-          </a:p>
-        </p:txBody>
-      </p:sp>
-      <p:sp>
-        <p:nvSpPr>
-          <p:cNvPr id="8" name="TextBox 7">
-            <a:extLst>
-              <a:ext uri="{FF2B5EF4-FFF2-40B4-BE49-F238E27FC236}">
-                <a16:creationId xmlns:a16="http://schemas.microsoft.com/office/drawing/2014/main" id="{1CE3E601-601D-C6B1-8265-C079CB8C9269}"/>
-              </a:ext>
-            </a:extLst>
-          </p:cNvPr>
-          <p:cNvSpPr txBox="1"/>
-          <p:nvPr/>
-        </p:nvSpPr>
-        <p:spPr>
-          <a:xfrm>
-            <a:off x="1117600" y="3086834"/>
-            <a:ext cx="10312400" cy="338554"/>
-          </a:xfrm>
-          <a:prstGeom prst="rect">
-            <a:avLst/>
-          </a:prstGeom>
-          <a:noFill/>
-        </p:spPr>
-        <p:txBody>
-          <a:bodyPr vert="horz" wrap="square" rtlCol="0">
-            <a:spAutoFit/>
-          </a:bodyPr>
-          <a:lstStyle/>
-          <a:p>
-            <a:r>
-              <a:rPr lang="en-US" sz="1600" b="1">
-                <a:solidFill>
-                  <a:srgbClr val="C00000"/>
-                </a:solidFill>
-              </a:rPr>
-              <a:t>x̄ ± z </a:t>
-            </a:r>
-            <a:r>
-              <a:rPr lang="el-GR" sz="1600" b="1">
-                <a:solidFill>
-                  <a:srgbClr val="C00000"/>
-                </a:solidFill>
-              </a:rPr>
-              <a:t>σ / √</a:t>
-            </a:r>
-            <a:r>
-              <a:rPr lang="en-US" sz="1600" b="1">
-                <a:solidFill>
-                  <a:srgbClr val="C00000"/>
-                </a:solidFill>
-              </a:rPr>
-              <a:t>n</a:t>
-            </a:r>
-          </a:p>
-        </p:txBody>
-      </p:sp>
-      <p:sp>
-        <p:nvSpPr>
-          <p:cNvPr id="9" name="TextBox 8">
-            <a:extLst>
-              <a:ext uri="{FF2B5EF4-FFF2-40B4-BE49-F238E27FC236}">
-                <a16:creationId xmlns:a16="http://schemas.microsoft.com/office/drawing/2014/main" id="{FB002BF4-8037-2F73-E27A-7A453477E389}"/>
-              </a:ext>
-            </a:extLst>
-          </p:cNvPr>
-          <p:cNvSpPr txBox="1"/>
-          <p:nvPr/>
-        </p:nvSpPr>
-        <p:spPr>
-          <a:xfrm>
-            <a:off x="762000" y="3603188"/>
-            <a:ext cx="10668000" cy="345440"/>
-          </a:xfrm>
-          <a:prstGeom prst="rect">
-            <a:avLst/>
-          </a:prstGeom>
-          <a:noFill/>
-        </p:spPr>
-        <p:txBody>
-          <a:bodyPr vert="horz" wrap="square" rtlCol="0">
-            <a:spAutoFit/>
-          </a:bodyPr>
-          <a:lstStyle/>
-          <a:p>
-            <a:pPr marL="304800" indent="-304800"/>
-            <a:r>
-              <a:rPr lang="en-US" sz="1600">
-                <a:solidFill>
-                  <a:srgbClr val="000000"/>
-                </a:solidFill>
-              </a:rPr>
-              <a:t>a mean μ, σ unknown</a:t>
-            </a:r>
-          </a:p>
-        </p:txBody>
-      </p:sp>
-      <p:sp>
-        <p:nvSpPr>
-          <p:cNvPr id="10" name="TextBox 9">
-            <a:extLst>
-              <a:ext uri="{FF2B5EF4-FFF2-40B4-BE49-F238E27FC236}">
-                <a16:creationId xmlns:a16="http://schemas.microsoft.com/office/drawing/2014/main" id="{10F3B3E3-D27C-E008-C93E-ED70BD2A4754}"/>
-              </a:ext>
-            </a:extLst>
-          </p:cNvPr>
-          <p:cNvSpPr txBox="1"/>
-          <p:nvPr/>
-        </p:nvSpPr>
-        <p:spPr>
-          <a:xfrm>
-            <a:off x="1117600" y="3948628"/>
-            <a:ext cx="10312400" cy="338554"/>
-          </a:xfrm>
-          <a:prstGeom prst="rect">
-            <a:avLst/>
-          </a:prstGeom>
-          <a:noFill/>
-        </p:spPr>
-        <p:txBody>
-          <a:bodyPr vert="horz" wrap="square" rtlCol="0">
-            <a:spAutoFit/>
-          </a:bodyPr>
-          <a:lstStyle/>
-          <a:p>
-            <a:r>
-              <a:rPr lang="en-US" sz="1600" b="1">
-                <a:solidFill>
-                  <a:srgbClr val="C00000"/>
-                </a:solidFill>
-              </a:rPr>
-              <a:t>x̄ ± t s / √n,   with df = n − 1</a:t>
-            </a:r>
-          </a:p>
-        </p:txBody>
-      </p:sp>
-      <p:sp>
-        <p:nvSpPr>
-          <p:cNvPr id="3" name="Title rule">
-            <a:extLst>
-              <a:ext uri="{FF2B5EF4-FFF2-40B4-BE49-F238E27FC236}">
-                <a16:creationId xmlns:a16="http://schemas.microsoft.com/office/drawing/2014/main" id="{B469CAAB-2B69-6863-7C28-0C5959E5734B}"/>
-              </a:ext>
-            </a:extLst>
-          </p:cNvPr>
-          <p:cNvSpPr/>
-          <p:nvPr/>
-        </p:nvSpPr>
-        <p:spPr>
-          <a:xfrm>
-            <a:off x="838200" y="1600200"/>
-            <a:ext cx="10515600" cy="38100"/>
-          </a:xfrm>
-          <a:prstGeom prst="rect">
-            <a:avLst/>
-          </a:prstGeom>
-          <a:solidFill>
-            <a:srgbClr val="4472C4"/>
-          </a:solidFill>
-          <a:ln w="12700" cap="flat" cmpd="sng" algn="ctr">
-            <a:noFill/>
-            <a:prstDash val="solid"/>
-            <a:miter lim="800000"/>
-          </a:ln>
-          <a:effectLst/>
-          <a:extLst>
-            <a:ext uri="{91240B29-F687-4F45-9708-019B960494DF}">
-              <a14:hiddenLine xmlns:a14="http://schemas.microsoft.com/office/drawing/2010/main" w="12700" cap="flat" cmpd="sng" algn="ctr">
-                <a:solidFill>
-                  <a:schemeClr val="accent1">
-                    <a:shade val="15000"/>
-                  </a:schemeClr>
-                </a:solidFill>
-                <a:prstDash val="solid"/>
-                <a:miter lim="800000"/>
-              </a14:hiddenLine>
-            </a:ext>
-          </a:extLst>
-        </p:spPr>
-        <p:style>
-          <a:lnRef idx="2">
-            <a:schemeClr val="accent1">
-              <a:shade val="15000"/>
-            </a:schemeClr>
-          </a:lnRef>
-          <a:fillRef idx="1">
-            <a:schemeClr val="accent1"/>
-          </a:fillRef>
-          <a:effectRef idx="0">
-            <a:schemeClr val="accent1"/>
-          </a:effectRef>
-          <a:fontRef idx="minor">
-            <a:schemeClr val="lt1"/>
-          </a:fontRef>
-        </p:style>
-        <p:txBody>
-          <a:bodyPr rtlCol="0" anchor="ctr"/>
-          <a:lstStyle/>
-          <a:p>
-            <a:pPr algn="ctr"/>
-            <a:endParaRPr lang="en-US"/>
-          </a:p>
-        </p:txBody>
-      </p:sp>
-      <p:sp>
-        <p:nvSpPr>
-          <p:cNvPr id="11" name="TextBox 10">
-            <a:extLst>
-              <a:ext uri="{FF2B5EF4-FFF2-40B4-BE49-F238E27FC236}">
-                <a16:creationId xmlns:a16="http://schemas.microsoft.com/office/drawing/2014/main" id="{7E252B31-0A80-8297-9AB5-9AED735ACDE2}"/>
-              </a:ext>
-            </a:extLst>
-          </p:cNvPr>
-          <p:cNvSpPr txBox="1"/>
-          <p:nvPr/>
-        </p:nvSpPr>
-        <p:spPr>
-          <a:xfrm>
-            <a:off x="762000" y="4464982"/>
-            <a:ext cx="10668000" cy="345440"/>
-          </a:xfrm>
-          <a:prstGeom prst="rect">
-            <a:avLst/>
-          </a:prstGeom>
-          <a:noFill/>
-        </p:spPr>
-        <p:txBody>
-          <a:bodyPr vert="horz" wrap="square" rtlCol="0">
-            <a:spAutoFit/>
-          </a:bodyPr>
-          <a:lstStyle/>
-          <a:p>
-            <a:pPr marL="304800" indent="-304800"/>
-            <a:r>
-              <a:rPr lang="en-US" sz="1600">
-                <a:solidFill>
-                  <a:srgbClr val="000000"/>
-                </a:solidFill>
-              </a:rPr>
-              <a:t>when the t interval works</a:t>
-            </a:r>
-          </a:p>
-        </p:txBody>
-      </p:sp>
-      <p:sp>
-        <p:nvSpPr>
-          <p:cNvPr id="12" name="TextBox 11">
-            <a:extLst>
-              <a:ext uri="{FF2B5EF4-FFF2-40B4-BE49-F238E27FC236}">
-                <a16:creationId xmlns:a16="http://schemas.microsoft.com/office/drawing/2014/main" id="{A1980B2D-2D53-A814-88AF-46C2FDF3E298}"/>
-              </a:ext>
-            </a:extLst>
-          </p:cNvPr>
-          <p:cNvSpPr txBox="1"/>
-          <p:nvPr/>
-        </p:nvSpPr>
-        <p:spPr>
-          <a:xfrm>
-            <a:off x="1117600" y="4810422"/>
-            <a:ext cx="10312400" cy="338554"/>
-          </a:xfrm>
-          <a:prstGeom prst="rect">
-            <a:avLst/>
-          </a:prstGeom>
-          <a:noFill/>
-        </p:spPr>
-        <p:txBody>
-          <a:bodyPr vert="horz" wrap="square" rtlCol="0">
-            <a:spAutoFit/>
-          </a:bodyPr>
-          <a:lstStyle/>
-          <a:p>
-            <a:r>
-              <a:rPr lang="en-US" sz="1600" b="1">
-                <a:solidFill>
-                  <a:srgbClr val="C00000"/>
-                </a:solidFill>
-              </a:rPr>
-              <a:t>the population is roughly normal, or n ≥ 30</a:t>
-            </a:r>
-          </a:p>
-        </p:txBody>
-      </p:sp>
-    </p:spTree>
-    <p:extLst>
-      <p:ext uri="{BB962C8B-B14F-4D97-AF65-F5344CB8AC3E}">
-        <p14:creationId xmlns:p14="http://schemas.microsoft.com/office/powerpoint/2010/main" val="3339251638"/>
-      </p:ext>
-    </p:extLst>
-  </p:cSld>
-  <p:clrMapOvr>
-    <a:masterClrMapping/>
-  </p:clrMapOvr>
-  <p:timing>
-    <p:tnLst>
-      <p:par>
-        <p:cTn id="1" dur="indefinite" restart="never" nodeType="tmRoot">
-          <p:childTnLst>
-            <p:seq concurrent="1" nextAc="seek">
-              <p:cTn id="2" dur="indefinite" nodeType="mainSeq">
-                <p:childTnLst>
-                  <p:par>
-                    <p:cTn id="3" fill="hold">
-                      <p:stCondLst>
-                        <p:cond delay="indefinite"/>
-                      </p:stCondLst>
-                      <p:childTnLst>
-                        <p:par>
-                          <p:cTn id="4" fill="hold">
-                            <p:stCondLst>
-                              <p:cond delay="0"/>
-                            </p:stCondLst>
-                            <p:childTnLst>
-                              <p:par>
-                                <p:cTn id="5" presetID="34" presetClass="entr" presetSubtype="0" fill="hold" grpId="0" nodeType="clickEffect">
-                                  <p:stCondLst>
-                                    <p:cond delay="0"/>
-                                  </p:stCondLst>
-                                  <p:childTnLst>
-                                    <p:set>
-                                      <p:cBhvr>
-                                        <p:cTn id="6" dur="1" fill="hold">
-                                          <p:stCondLst>
-                                            <p:cond delay="0"/>
-                                          </p:stCondLst>
-                                        </p:cTn>
-                                        <p:tgtEl>
-                                          <p:spTgt spid="6"/>
-                                        </p:tgtEl>
-                                        <p:attrNameLst>
-                                          <p:attrName>style.visibility</p:attrName>
-                                        </p:attrNameLst>
-                                      </p:cBhvr>
-                                      <p:to>
-                                        <p:strVal val="visible"/>
-                                      </p:to>
-                                    </p:set>
-                                    <p:anim from="(-#ppt_w/2)" to="(#ppt_x)" calcmode="lin" valueType="num">
-                                      <p:cBhvr>
-                                        <p:cTn id="7" dur="600" fill="hold">
-                                          <p:stCondLst>
-                                            <p:cond delay="0"/>
-                                          </p:stCondLst>
-                                        </p:cTn>
-                                        <p:tgtEl>
-                                          <p:spTgt spid="6"/>
-                                        </p:tgtEl>
-                                        <p:attrNameLst>
-                                          <p:attrName>ppt_x</p:attrName>
-                                        </p:attrNameLst>
-                                      </p:cBhvr>
-                                    </p:anim>
-                                    <p:anim from="0" to="-1.0" calcmode="lin" valueType="num">
-                                      <p:cBhvr>
-                                        <p:cTn id="8" dur="200" decel="50000" autoRev="1" fill="hold">
-                                          <p:stCondLst>
-                                            <p:cond delay="600"/>
-                                          </p:stCondLst>
-                                        </p:cTn>
-                                        <p:tgtEl>
-                                          <p:spTgt spid="6"/>
-                                        </p:tgtEl>
-                                        <p:attrNameLst>
-                                          <p:attrName>xshear</p:attrName>
-                                        </p:attrNameLst>
-                                      </p:cBhvr>
-                                    </p:anim>
-                                    <p:animScale>
-                                      <p:cBhvr>
-                                        <p:cTn id="9" dur="200" decel="100000" autoRev="1" fill="hold">
-                                          <p:stCondLst>
-                                            <p:cond delay="600"/>
-                                          </p:stCondLst>
-                                        </p:cTn>
-                                        <p:tgtEl>
-                                          <p:spTgt spid="6"/>
-                                        </p:tgtEl>
-                                      </p:cBhvr>
-                                      <p:from x="100000" y="100000"/>
-                                      <p:to x="80000" y="100000"/>
-                                    </p:animScale>
-                                    <p:anim by="(#ppt_h/3+#ppt_w*0.1)" calcmode="lin" valueType="num">
-                                      <p:cBhvr additive="sum">
-                                        <p:cTn id="10" dur="200" decel="100000" autoRev="1" fill="hold">
-                                          <p:stCondLst>
-                                            <p:cond delay="600"/>
-                                          </p:stCondLst>
-                                        </p:cTn>
-                                        <p:tgtEl>
-                                          <p:spTgt spid="6"/>
-                                        </p:tgtEl>
-                                        <p:attrNameLst>
-                                          <p:attrName>ppt_x</p:attrName>
-                                        </p:attrNameLst>
-                                      </p:cBhvr>
-                                    </p:anim>
-                                  </p:childTnLst>
-                                </p:cTn>
-                              </p:par>
-                            </p:childTnLst>
-                          </p:cTn>
-                        </p:par>
-                      </p:childTnLst>
-                    </p:cTn>
-                  </p:par>
-                  <p:par>
-                    <p:cTn id="11" fill="hold">
-                      <p:stCondLst>
-                        <p:cond delay="indefinite"/>
-                      </p:stCondLst>
-                      <p:childTnLst>
-                        <p:par>
-                          <p:cTn id="12" fill="hold">
-                            <p:stCondLst>
-                              <p:cond delay="0"/>
-                            </p:stCondLst>
-                            <p:childTnLst>
-                              <p:par>
-                                <p:cTn id="13" presetID="34" presetClass="entr" presetSubtype="0" fill="hold" grpId="0" nodeType="clickEffect">
-                                  <p:stCondLst>
-                                    <p:cond delay="0"/>
-                                  </p:stCondLst>
-                                  <p:childTnLst>
-                                    <p:set>
-                                      <p:cBhvr>
-                                        <p:cTn id="14" dur="1" fill="hold">
-                                          <p:stCondLst>
-                                            <p:cond delay="0"/>
-                                          </p:stCondLst>
-                                        </p:cTn>
-                                        <p:tgtEl>
-                                          <p:spTgt spid="8"/>
-                                        </p:tgtEl>
-                                        <p:attrNameLst>
-                                          <p:attrName>style.visibility</p:attrName>
-                                        </p:attrNameLst>
-                                      </p:cBhvr>
-                                      <p:to>
-                                        <p:strVal val="visible"/>
-                                      </p:to>
-                                    </p:set>
-                                    <p:anim from="(-#ppt_w/2)" to="(#ppt_x)" calcmode="lin" valueType="num">
-                                      <p:cBhvr>
-                                        <p:cTn id="15" dur="600" fill="hold">
-                                          <p:stCondLst>
-                                            <p:cond delay="0"/>
-                                          </p:stCondLst>
-                                        </p:cTn>
-                                        <p:tgtEl>
-                                          <p:spTgt spid="8"/>
-                                        </p:tgtEl>
-                                        <p:attrNameLst>
-                                          <p:attrName>ppt_x</p:attrName>
-                                        </p:attrNameLst>
-                                      </p:cBhvr>
-                                    </p:anim>
-                                    <p:anim from="0" to="-1.0" calcmode="lin" valueType="num">
-                                      <p:cBhvr>
-                                        <p:cTn id="16" dur="200" decel="50000" autoRev="1" fill="hold">
-                                          <p:stCondLst>
-                                            <p:cond delay="600"/>
-                                          </p:stCondLst>
-                                        </p:cTn>
-                                        <p:tgtEl>
-                                          <p:spTgt spid="8"/>
-                                        </p:tgtEl>
-                                        <p:attrNameLst>
-                                          <p:attrName>xshear</p:attrName>
-                                        </p:attrNameLst>
-                                      </p:cBhvr>
-                                    </p:anim>
-                                    <p:animScale>
-                                      <p:cBhvr>
-                                        <p:cTn id="17" dur="200" decel="100000" autoRev="1" fill="hold">
-                                          <p:stCondLst>
-                                            <p:cond delay="600"/>
-                                          </p:stCondLst>
-                                        </p:cTn>
-                                        <p:tgtEl>
-                                          <p:spTgt spid="8"/>
-                                        </p:tgtEl>
-                                      </p:cBhvr>
-                                      <p:from x="100000" y="100000"/>
-                                      <p:to x="80000" y="100000"/>
-                                    </p:animScale>
-                                    <p:anim by="(#ppt_h/3+#ppt_w*0.1)" calcmode="lin" valueType="num">
-                                      <p:cBhvr additive="sum">
-                                        <p:cTn id="18" dur="200" decel="100000" autoRev="1" fill="hold">
-                                          <p:stCondLst>
-                                            <p:cond delay="600"/>
-                                          </p:stCondLst>
-                                        </p:cTn>
-                                        <p:tgtEl>
-                                          <p:spTgt spid="8"/>
-                                        </p:tgtEl>
-                                        <p:attrNameLst>
-                                          <p:attrName>ppt_x</p:attrName>
-                                        </p:attrNameLst>
-                                      </p:cBhvr>
-                                    </p:anim>
-                                  </p:childTnLst>
-                                </p:cTn>
-                              </p:par>
-                            </p:childTnLst>
-                          </p:cTn>
-                        </p:par>
-                      </p:childTnLst>
-                    </p:cTn>
-                  </p:par>
-                  <p:par>
-                    <p:cTn id="19" fill="hold">
-                      <p:stCondLst>
-                        <p:cond delay="indefinite"/>
-                      </p:stCondLst>
-                      <p:childTnLst>
-                        <p:par>
-                          <p:cTn id="20" fill="hold">
-                            <p:stCondLst>
-                              <p:cond delay="0"/>
-                            </p:stCondLst>
-                            <p:childTnLst>
-                              <p:par>
-                                <p:cTn id="21" presetID="34" presetClass="entr" presetSubtype="0" fill="hold" grpId="0" nodeType="clickEffect">
-                                  <p:stCondLst>
-                                    <p:cond delay="0"/>
-                                  </p:stCondLst>
-                                  <p:childTnLst>
-                                    <p:set>
-                                      <p:cBhvr>
-                                        <p:cTn id="22" dur="1" fill="hold">
-                                          <p:stCondLst>
-                                            <p:cond delay="0"/>
-                                          </p:stCondLst>
-                                        </p:cTn>
-                                        <p:tgtEl>
-                                          <p:spTgt spid="10"/>
-                                        </p:tgtEl>
-                                        <p:attrNameLst>
-                                          <p:attrName>style.visibility</p:attrName>
-                                        </p:attrNameLst>
-                                      </p:cBhvr>
-                                      <p:to>
-                                        <p:strVal val="visible"/>
-                                      </p:to>
-                                    </p:set>
-                                    <p:anim from="(-#ppt_w/2)" to="(#ppt_x)" calcmode="lin" valueType="num">
-                                      <p:cBhvr>
-                                        <p:cTn id="23" dur="600" fill="hold">
-                                          <p:stCondLst>
-                                            <p:cond delay="0"/>
-                                          </p:stCondLst>
-                                        </p:cTn>
-                                        <p:tgtEl>
-                                          <p:spTgt spid="10"/>
-                                        </p:tgtEl>
-                                        <p:attrNameLst>
-                                          <p:attrName>ppt_x</p:attrName>
-                                        </p:attrNameLst>
-                                      </p:cBhvr>
-                                    </p:anim>
-                                    <p:anim from="0" to="-1.0" calcmode="lin" valueType="num">
-                                      <p:cBhvr>
-                                        <p:cTn id="24" dur="200" decel="50000" autoRev="1" fill="hold">
-                                          <p:stCondLst>
-                                            <p:cond delay="600"/>
-                                          </p:stCondLst>
-                                        </p:cTn>
-                                        <p:tgtEl>
-                                          <p:spTgt spid="10"/>
-                                        </p:tgtEl>
-                                        <p:attrNameLst>
-                                          <p:attrName>xshear</p:attrName>
-                                        </p:attrNameLst>
-                                      </p:cBhvr>
-                                    </p:anim>
-                                    <p:animScale>
-                                      <p:cBhvr>
-                                        <p:cTn id="25" dur="200" decel="100000" autoRev="1" fill="hold">
-                                          <p:stCondLst>
-                                            <p:cond delay="600"/>
-                                          </p:stCondLst>
-                                        </p:cTn>
-                                        <p:tgtEl>
-                                          <p:spTgt spid="10"/>
-                                        </p:tgtEl>
-                                      </p:cBhvr>
-                                      <p:from x="100000" y="100000"/>
-                                      <p:to x="80000" y="100000"/>
-                                    </p:animScale>
-                                    <p:anim by="(#ppt_h/3+#ppt_w*0.1)" calcmode="lin" valueType="num">
-                                      <p:cBhvr additive="sum">
-                                        <p:cTn id="26" dur="200" decel="100000" autoRev="1" fill="hold">
-                                          <p:stCondLst>
-                                            <p:cond delay="600"/>
-                                          </p:stCondLst>
-                                        </p:cTn>
-                                        <p:tgtEl>
-                                          <p:spTgt spid="10"/>
-                                        </p:tgtEl>
-                                        <p:attrNameLst>
-                                          <p:attrName>ppt_x</p:attrName>
-                                        </p:attrNameLst>
-                                      </p:cBhvr>
-                                    </p:anim>
-                                  </p:childTnLst>
-                                </p:cTn>
-                              </p:par>
-                            </p:childTnLst>
-                          </p:cTn>
-                        </p:par>
-                      </p:childTnLst>
-                    </p:cTn>
-                  </p:par>
-                  <p:par>
-                    <p:cTn id="27" fill="hold">
-                      <p:stCondLst>
-                        <p:cond delay="indefinite"/>
-                      </p:stCondLst>
-                      <p:childTnLst>
-                        <p:par>
-                          <p:cTn id="28" fill="hold">
-                            <p:stCondLst>
-                              <p:cond delay="0"/>
-                            </p:stCondLst>
-                            <p:childTnLst>
-                              <p:par>
-                                <p:cTn id="29" presetID="34" presetClass="entr" presetSubtype="0" fill="hold" grpId="1" nodeType="clickEffect">
-                                  <p:stCondLst>
-                                    <p:cond delay="0"/>
-                                  </p:stCondLst>
-                                  <p:childTnLst>
-                                    <p:set>
-                                      <p:cBhvr>
-                                        <p:cTn id="30" dur="1" fill="hold">
-                                          <p:stCondLst>
-                                            <p:cond delay="0"/>
-                                          </p:stCondLst>
-                                        </p:cTn>
-                                        <p:tgtEl>
-                                          <p:spTgt spid="12"/>
-                                        </p:tgtEl>
-                                        <p:attrNameLst>
-                                          <p:attrName>style.visibility</p:attrName>
-                                        </p:attrNameLst>
-                                      </p:cBhvr>
-                                      <p:to>
-                                        <p:strVal val="visible"/>
-                                      </p:to>
-                                    </p:set>
-                                    <p:anim from="(-#ppt_w/2)" to="(#ppt_x)" calcmode="lin" valueType="num">
-                                      <p:cBhvr>
-                                        <p:cTn id="31" dur="600" fill="hold">
-                                          <p:stCondLst>
-                                            <p:cond delay="0"/>
-                                          </p:stCondLst>
-                                        </p:cTn>
-                                        <p:tgtEl>
-                                          <p:spTgt spid="12"/>
-                                        </p:tgtEl>
-                                        <p:attrNameLst>
-                                          <p:attrName>ppt_x</p:attrName>
-                                        </p:attrNameLst>
-                                      </p:cBhvr>
-                                    </p:anim>
-                                    <p:anim from="0" to="-1.0" calcmode="lin" valueType="num">
-                                      <p:cBhvr>
-                                        <p:cTn id="32" dur="200" decel="50000" autoRev="1" fill="hold">
-                                          <p:stCondLst>
-                                            <p:cond delay="600"/>
-                                          </p:stCondLst>
-                                        </p:cTn>
-                                        <p:tgtEl>
-                                          <p:spTgt spid="12"/>
-                                        </p:tgtEl>
-                                        <p:attrNameLst>
-                                          <p:attrName>xshear</p:attrName>
-                                        </p:attrNameLst>
-                                      </p:cBhvr>
-                                    </p:anim>
-                                    <p:animScale>
-                                      <p:cBhvr>
-                                        <p:cTn id="33" dur="200" decel="100000" autoRev="1" fill="hold">
-                                          <p:stCondLst>
-                                            <p:cond delay="600"/>
-                                          </p:stCondLst>
-                                        </p:cTn>
-                                        <p:tgtEl>
-                                          <p:spTgt spid="12"/>
-                                        </p:tgtEl>
-                                      </p:cBhvr>
-                                      <p:from x="100000" y="100000"/>
-                                      <p:to x="80000" y="100000"/>
-                                    </p:animScale>
-                                    <p:anim by="(#ppt_h/3+#ppt_w*0.1)" calcmode="lin" valueType="num">
-                                      <p:cBhvr additive="sum">
-                                        <p:cTn id="34" dur="200" decel="100000" autoRev="1" fill="hold">
-                                          <p:stCondLst>
-                                            <p:cond delay="600"/>
-                                          </p:stCondLst>
-                                        </p:cTn>
-                                        <p:tgtEl>
-                                          <p:spTgt spid="12"/>
-                                        </p:tgtEl>
-                                        <p:attrNameLst>
-                                          <p:attrName>ppt_x</p:attrName>
-                                        </p:attrNameLst>
-                                      </p:cBhvr>
-                                    </p:anim>
-                                  </p:childTnLst>
-                                </p:cTn>
-                              </p:par>
-                            </p:childTnLst>
-                          </p:cTn>
-                        </p:par>
-                      </p:childTnLst>
-                    </p:cTn>
-                  </p:par>
-                </p:childTnLst>
-              </p:cTn>
-              <p:prevCondLst>
-                <p:cond evt="onPrev" delay="0">
-                  <p:tgtEl>
-                    <p:sldTgt/>
-                  </p:tgtEl>
-                </p:cond>
-              </p:prevCondLst>
-              <p:nextCondLst>
-                <p:cond evt="onNext" delay="0">
-                  <p:tgtEl>
-                    <p:sldTgt/>
-                  </p:tgtEl>
-                </p:cond>
-              </p:nextCondLst>
-            </p:seq>
-          </p:childTnLst>
-        </p:cTn>
-      </p:par>
-    </p:tnLst>
-    <p:bldLst>
-      <p:bldP spid="6" grpId="0"/>
-      <p:bldP spid="8" grpId="0"/>
-      <p:bldP spid="10" grpId="0"/>
-      <p:bldP spid="12" grpId="1"/>
-    </p:bldLst>
-  </p:timing>
-</p:sld>
-</file>
-
-<file path=ppt/slides/slide16.xml><?xml version="1.0" encoding="utf-8"?>
-<p:sld xmlns:a="http://schemas.openxmlformats.org/drawingml/2006/main" xmlns:r="http://schemas.openxmlformats.org/officeDocument/2006/relationships" xmlns:p="http://schemas.openxmlformats.org/presentationml/2006/main">
-  <p:cSld>
-    <p:spTree>
-      <p:nvGrpSpPr>
-        <p:cNvPr id="1" name=""/>
-        <p:cNvGrpSpPr/>
-        <p:nvPr/>
-      </p:nvGrpSpPr>
-      <p:grpSpPr>
-        <a:xfrm>
-          <a:off x="0" y="0"/>
-          <a:ext cx="0" cy="0"/>
-          <a:chOff x="0" y="0"/>
-          <a:chExt cx="0" cy="0"/>
-        </a:xfrm>
-      </p:grpSpPr>
-      <p:sp>
-        <p:nvSpPr>
-          <p:cNvPr id="2" name="Title 1">
-            <a:extLst>
-              <a:ext uri="{FF2B5EF4-FFF2-40B4-BE49-F238E27FC236}">
-                <a16:creationId xmlns:a16="http://schemas.microsoft.com/office/drawing/2014/main" id="{C08D30B1-1864-30EF-7EAB-9BEE656C0012}"/>
-              </a:ext>
-            </a:extLst>
-          </p:cNvPr>
-          <p:cNvSpPr>
-            <a:spLocks noGrp="1"/>
-          </p:cNvSpPr>
-          <p:nvPr>
-            <p:ph type="title"/>
-          </p:nvPr>
-        </p:nvSpPr>
-        <p:spPr/>
-        <p:txBody>
-          <a:bodyPr>
-            <a:noAutofit/>
-          </a:bodyPr>
-          <a:lstStyle/>
-          <a:p>
-            <a:r>
-              <a:rPr lang="en-US">
-                <a:solidFill>
-                  <a:srgbClr val="1F3864"/>
-                </a:solidFill>
-              </a:rPr>
-              <a:t>Data: seal whiskers</a:t>
-            </a:r>
-          </a:p>
-        </p:txBody>
-      </p:sp>
-      <p:sp>
-        <p:nvSpPr>
-          <p:cNvPr id="4" name="Slide Number Placeholder 3">
-            <a:extLst>
-              <a:ext uri="{FF2B5EF4-FFF2-40B4-BE49-F238E27FC236}">
-                <a16:creationId xmlns:a16="http://schemas.microsoft.com/office/drawing/2014/main" id="{3F875068-D051-44AE-498E-1BEBEDE3A7C8}"/>
-              </a:ext>
-            </a:extLst>
-          </p:cNvPr>
-          <p:cNvSpPr>
-            <a:spLocks noGrp="1"/>
-          </p:cNvSpPr>
-          <p:nvPr>
-            <p:ph type="sldNum" sz="quarter" idx="12"/>
-          </p:nvPr>
-        </p:nvSpPr>
-        <p:spPr/>
-        <p:txBody>
-          <a:bodyPr/>
-          <a:lstStyle/>
-          <a:p>
-            <a:fld id="{A80A81DD-F10A-4B1C-963A-0ABBB4865886}" type="slidenum">
-              <a:rPr lang="en-US" sz="1600" smtClean="0"/>
-              <a:t>16</a:t>
-            </a:fld>
-            <a:endParaRPr lang="en-US" sz="1600"/>
-          </a:p>
-        </p:txBody>
-      </p:sp>
-      <p:sp>
-        <p:nvSpPr>
-          <p:cNvPr id="3" name="Title rule">
-            <a:extLst>
-              <a:ext uri="{FF2B5EF4-FFF2-40B4-BE49-F238E27FC236}">
-                <a16:creationId xmlns:a16="http://schemas.microsoft.com/office/drawing/2014/main" id="{30656AA8-9645-F028-C769-A313710853CC}"/>
-              </a:ext>
-            </a:extLst>
-          </p:cNvPr>
-          <p:cNvSpPr/>
-          <p:nvPr/>
-        </p:nvSpPr>
-        <p:spPr>
-          <a:xfrm>
-            <a:off x="838200" y="1600200"/>
-            <a:ext cx="10515600" cy="38100"/>
-          </a:xfrm>
-          <a:prstGeom prst="rect">
-            <a:avLst/>
-          </a:prstGeom>
-          <a:solidFill>
-            <a:srgbClr val="4472C4"/>
-          </a:solidFill>
-          <a:ln w="12700" cap="flat" cmpd="sng" algn="ctr">
-            <a:noFill/>
-            <a:prstDash val="solid"/>
-            <a:miter lim="800000"/>
-          </a:ln>
-          <a:effectLst/>
-          <a:extLst>
-            <a:ext uri="{91240B29-F687-4F45-9708-019B960494DF}">
-              <a14:hiddenLine xmlns:a14="http://schemas.microsoft.com/office/drawing/2010/main" w="12700" cap="flat" cmpd="sng" algn="ctr">
-                <a:solidFill>
-                  <a:schemeClr val="accent1">
-                    <a:shade val="15000"/>
-                  </a:schemeClr>
-                </a:solidFill>
-                <a:prstDash val="solid"/>
-                <a:miter lim="800000"/>
-              </a14:hiddenLine>
-            </a:ext>
-          </a:extLst>
-        </p:spPr>
-        <p:style>
-          <a:lnRef idx="2">
-            <a:schemeClr val="accent1">
-              <a:shade val="15000"/>
-            </a:schemeClr>
-          </a:lnRef>
-          <a:fillRef idx="1">
-            <a:schemeClr val="accent1"/>
-          </a:fillRef>
-          <a:effectRef idx="0">
-            <a:schemeClr val="accent1"/>
-          </a:effectRef>
-          <a:fontRef idx="minor">
-            <a:schemeClr val="lt1"/>
-          </a:fontRef>
-        </p:style>
-        <p:txBody>
-          <a:bodyPr rtlCol="0" anchor="ctr"/>
-          <a:lstStyle/>
-          <a:p>
-            <a:pPr algn="ctr"/>
-            <a:endParaRPr lang="en-US"/>
-          </a:p>
-        </p:txBody>
-      </p:sp>
-      <p:sp>
-        <p:nvSpPr>
-          <p:cNvPr id="8" name="Context">
-            <a:extLst>
-              <a:ext uri="{FF2B5EF4-FFF2-40B4-BE49-F238E27FC236}">
-                <a16:creationId xmlns:a16="http://schemas.microsoft.com/office/drawing/2014/main" id="{71E3EA8C-31B4-DAD4-BC4A-65D72E59AD46}"/>
-              </a:ext>
-            </a:extLst>
-          </p:cNvPr>
-          <p:cNvSpPr txBox="1"/>
-          <p:nvPr/>
-        </p:nvSpPr>
-        <p:spPr>
-          <a:xfrm>
-            <a:off x="762000" y="1879600"/>
-            <a:ext cx="10668000" cy="646331"/>
-          </a:xfrm>
-          <a:prstGeom prst="rect">
-            <a:avLst/>
-          </a:prstGeom>
-          <a:noFill/>
-        </p:spPr>
-        <p:txBody>
-          <a:bodyPr vert="horz" wrap="square" rtlCol="0">
-            <a:spAutoFit/>
-          </a:bodyPr>
-          <a:lstStyle/>
-          <a:p>
-            <a:pPr>
-              <a:spcAft>
-                <a:spcPts val="200"/>
-              </a:spcAft>
-            </a:pPr>
-            <a:r>
-              <a:rPr lang="en-US">
-                <a:solidFill>
-                  <a:srgbClr val="000000"/>
-                </a:solidFill>
-                <a:latin typeface="Calibri" panose="020F0502020204030204" pitchFamily="34" charset="0"/>
-              </a:rPr>
-              <a:t>Ginter et al. (2012) measured the longest undamaged whisker of 92 seals and sea lions from 11 species, to study how whisker shape evolved.</a:t>
-            </a:r>
-          </a:p>
-        </p:txBody>
-      </p:sp>
-      <p:sp>
-        <p:nvSpPr>
-          <p:cNvPr id="9" name="Numbers">
-            <a:extLst>
-              <a:ext uri="{FF2B5EF4-FFF2-40B4-BE49-F238E27FC236}">
-                <a16:creationId xmlns:a16="http://schemas.microsoft.com/office/drawing/2014/main" id="{C419F151-05B2-3E4B-BAE8-BB1F06D9D1FD}"/>
-              </a:ext>
-            </a:extLst>
-          </p:cNvPr>
-          <p:cNvSpPr txBox="1"/>
-          <p:nvPr/>
-        </p:nvSpPr>
-        <p:spPr>
-          <a:xfrm>
-            <a:off x="762000" y="2551331"/>
-            <a:ext cx="10668000" cy="400110"/>
-          </a:xfrm>
-          <a:prstGeom prst="rect">
-            <a:avLst/>
-          </a:prstGeom>
-          <a:noFill/>
-        </p:spPr>
-        <p:txBody>
-          <a:bodyPr vert="horz" wrap="square" rtlCol="0">
-            <a:spAutoFit/>
-          </a:bodyPr>
-          <a:lstStyle/>
-          <a:p>
-            <a:pPr>
-              <a:spcAft>
-                <a:spcPts val="200"/>
-              </a:spcAft>
-            </a:pPr>
-            <a:r>
-              <a:rPr lang="en-US" sz="2000" b="1">
-                <a:solidFill>
-                  <a:srgbClr val="000000"/>
-                </a:solidFill>
-                <a:latin typeface="Calibri" panose="020F0502020204030204" pitchFamily="34" charset="0"/>
-              </a:rPr>
-              <a:t>X = the total length of a seal’s longest whisker, in mm</a:t>
-            </a:r>
-          </a:p>
-        </p:txBody>
-      </p:sp>
-      <p:sp>
-        <p:nvSpPr>
-          <p:cNvPr id="10" name="Question">
-            <a:extLst>
-              <a:ext uri="{FF2B5EF4-FFF2-40B4-BE49-F238E27FC236}">
-                <a16:creationId xmlns:a16="http://schemas.microsoft.com/office/drawing/2014/main" id="{B31E395F-B84E-D1E9-D22A-222467FC4105}"/>
-              </a:ext>
-            </a:extLst>
-          </p:cNvPr>
-          <p:cNvSpPr txBox="1"/>
-          <p:nvPr/>
-        </p:nvSpPr>
-        <p:spPr>
-          <a:xfrm>
-            <a:off x="762000" y="5288241"/>
-            <a:ext cx="10668000" cy="369332"/>
-          </a:xfrm>
-          <a:prstGeom prst="rect">
-            <a:avLst/>
-          </a:prstGeom>
-          <a:noFill/>
-        </p:spPr>
-        <p:txBody>
-          <a:bodyPr vert="horz" wrap="square" rtlCol="0">
-            <a:spAutoFit/>
-          </a:bodyPr>
-          <a:lstStyle/>
-          <a:p>
-            <a:pPr>
-              <a:spcAft>
-                <a:spcPts val="200"/>
-              </a:spcAft>
-            </a:pPr>
-            <a:r>
-              <a:rPr lang="en-US">
-                <a:solidFill>
-                  <a:srgbClr val="000000"/>
-                </a:solidFill>
-                <a:latin typeface="Calibri" panose="020F0502020204030204" pitchFamily="34" charset="0"/>
-              </a:rPr>
-              <a:t>One whisker per seal;  only each species’ n, mean and SD were published</a:t>
-            </a:r>
-          </a:p>
-        </p:txBody>
-      </p:sp>
-      <p:graphicFrame>
-        <p:nvGraphicFramePr>
-          <p:cNvPr id="5" name="Data table">
-            <a:extLst>
-              <a:ext uri="{FF2B5EF4-FFF2-40B4-BE49-F238E27FC236}">
-                <a16:creationId xmlns:a16="http://schemas.microsoft.com/office/drawing/2014/main" id="{107D57CA-D659-5E39-E6B7-B1821FDE1989}"/>
-              </a:ext>
-            </a:extLst>
-          </p:cNvPr>
-          <p:cNvGraphicFramePr>
-            <a:graphicFrameLocks noGrp="1"/>
-          </p:cNvGraphicFramePr>
-          <p:nvPr>
-            <p:extLst>
-              <p:ext uri="{D42A27DB-BD31-4B8C-83A1-F6EECF244321}">
-                <p14:modId xmlns:p14="http://schemas.microsoft.com/office/powerpoint/2010/main" val="2378637757"/>
-              </p:ext>
-            </p:extLst>
-          </p:nvPr>
-        </p:nvGraphicFramePr>
-        <p:xfrm>
-          <a:off x="762000" y="3053041"/>
-          <a:ext cx="3810000" cy="2133600"/>
-        </p:xfrm>
-        <a:graphic>
-          <a:graphicData uri="http://schemas.openxmlformats.org/drawingml/2006/table">
-            <a:tbl>
-              <a:tblPr firstRow="1" bandRow="1">
-                <a:tableStyleId>{3B4B98B0-60AC-42C2-AFA5-B58CD77FA1E5}</a:tableStyleId>
-              </a:tblPr>
-              <a:tblGrid>
-                <a:gridCol w="1905000">
-                  <a:extLst>
-                    <a:ext uri="{9D8B030D-6E8A-4147-A177-3AD203B41FA5}">
-                      <a16:colId xmlns:a16="http://schemas.microsoft.com/office/drawing/2014/main" val="330255408"/>
-                    </a:ext>
-                  </a:extLst>
-                </a:gridCol>
-                <a:gridCol w="1651000">
-                  <a:extLst>
-                    <a:ext uri="{9D8B030D-6E8A-4147-A177-3AD203B41FA5}">
-                      <a16:colId xmlns:a16="http://schemas.microsoft.com/office/drawing/2014/main" val="3431246229"/>
-                    </a:ext>
-                  </a:extLst>
-                </a:gridCol>
-                <a:gridCol w="2921000">
-                  <a:extLst>
-                    <a:ext uri="{9D8B030D-6E8A-4147-A177-3AD203B41FA5}">
-                      <a16:colId xmlns:a16="http://schemas.microsoft.com/office/drawing/2014/main" val="1739093344"/>
-                    </a:ext>
-                  </a:extLst>
-                </a:gridCol>
-                <a:gridCol w="1524000">
-                  <a:extLst>
-                    <a:ext uri="{9D8B030D-6E8A-4147-A177-3AD203B41FA5}">
-                      <a16:colId xmlns:a16="http://schemas.microsoft.com/office/drawing/2014/main" val="2235299281"/>
-                    </a:ext>
-                  </a:extLst>
-                </a:gridCol>
-              </a:tblGrid>
-              <a:tr h="304800">
-                <a:tc>
-                  <a:txBody>
-                    <a:bodyPr/>
-                    <a:lstStyle/>
-                    <a:p>
-                      <a:r>
-                        <a:rPr lang="en-US" sz="1600" b="1">
-                          <a:latin typeface="Calibri" panose="020F0502020204030204" pitchFamily="34" charset="0"/>
-                        </a:rPr>
-                        <a:t>SPECIES</a:t>
-                      </a:r>
-                    </a:p>
-                  </a:txBody>
-                  <a:tcPr marT="25400" marB="25400"/>
-                </a:tc>
-                <a:tc>
-                  <a:txBody>
-                    <a:bodyPr/>
-                    <a:lstStyle/>
-                    <a:p>
-                      <a:r>
-                        <a:rPr lang="en-US" sz="1600" b="1">
-                          <a:latin typeface="Calibri" panose="020F0502020204030204" pitchFamily="34" charset="0"/>
-                        </a:rPr>
-                        <a:t>SEALS (n)</a:t>
-                      </a:r>
-                    </a:p>
-                  </a:txBody>
-                  <a:tcPr marT="25400" marB="25400"/>
-                </a:tc>
-                <a:tc>
-                  <a:txBody>
-                    <a:bodyPr/>
-                    <a:lstStyle/>
-                    <a:p>
-                      <a:r>
-                        <a:rPr lang="en-US" sz="1600" b="1">
-                          <a:latin typeface="Calibri" panose="020F0502020204030204" pitchFamily="34" charset="0"/>
-                        </a:rPr>
-                        <a:t>MEAN LENGTH (mm)</a:t>
-                      </a:r>
-                    </a:p>
-                  </a:txBody>
-                  <a:tcPr marT="25400" marB="25400"/>
-                </a:tc>
-                <a:tc>
-                  <a:txBody>
-                    <a:bodyPr/>
-                    <a:lstStyle/>
-                    <a:p>
-                      <a:r>
-                        <a:rPr lang="en-US" sz="1600" b="1">
-                          <a:latin typeface="Calibri" panose="020F0502020204030204" pitchFamily="34" charset="0"/>
-                        </a:rPr>
-                        <a:t>SD (mm)</a:t>
-                      </a:r>
-                    </a:p>
-                  </a:txBody>
-                  <a:tcPr marT="25400" marB="25400"/>
-                </a:tc>
-                <a:extLst>
-                  <a:ext uri="{0D108BD9-81ED-4DB2-BD59-A6C34878D82A}">
-                    <a16:rowId xmlns:a16="http://schemas.microsoft.com/office/drawing/2014/main" val="3735979105"/>
-                  </a:ext>
-                </a:extLst>
-              </a:tr>
-              <a:tr h="304800">
-                <a:tc>
-                  <a:txBody>
-                    <a:bodyPr/>
-                    <a:lstStyle/>
-                    <a:p>
-                      <a:r>
-                        <a:rPr lang="en-US" sz="1600" b="0">
-                          <a:latin typeface="Calibri" panose="020F0502020204030204" pitchFamily="34" charset="0"/>
-                        </a:rPr>
-                        <a:t>Harp seal</a:t>
-                      </a:r>
-                    </a:p>
-                  </a:txBody>
-                  <a:tcPr marT="25400" marB="25400"/>
-                </a:tc>
-                <a:tc>
-                  <a:txBody>
-                    <a:bodyPr/>
-                    <a:lstStyle/>
-                    <a:p>
-                      <a:r>
-                        <a:rPr lang="en-US" sz="1600" b="0">
-                          <a:latin typeface="Calibri" panose="020F0502020204030204" pitchFamily="34" charset="0"/>
-                        </a:rPr>
-                        <a:t>16</a:t>
-                      </a:r>
-                    </a:p>
-                  </a:txBody>
-                  <a:tcPr marT="25400" marB="25400"/>
-                </a:tc>
-                <a:tc>
-                  <a:txBody>
-                    <a:bodyPr/>
-                    <a:lstStyle/>
-                    <a:p>
-                      <a:r>
-                        <a:rPr lang="en-US" sz="1600" b="0">
-                          <a:latin typeface="Calibri" panose="020F0502020204030204" pitchFamily="34" charset="0"/>
-                        </a:rPr>
-                        <a:t>80.6</a:t>
-                      </a:r>
-                    </a:p>
-                  </a:txBody>
-                  <a:tcPr marT="25400" marB="25400"/>
-                </a:tc>
-                <a:tc>
-                  <a:txBody>
-                    <a:bodyPr/>
-                    <a:lstStyle/>
-                    <a:p>
-                      <a:r>
-                        <a:rPr lang="en-US" sz="1600" b="0">
-                          <a:latin typeface="Calibri" panose="020F0502020204030204" pitchFamily="34" charset="0"/>
-                        </a:rPr>
-                        <a:t>10.8</a:t>
-                      </a:r>
-                    </a:p>
-                  </a:txBody>
-                  <a:tcPr marT="25400" marB="25400"/>
-                </a:tc>
-                <a:extLst>
-                  <a:ext uri="{0D108BD9-81ED-4DB2-BD59-A6C34878D82A}">
-                    <a16:rowId xmlns:a16="http://schemas.microsoft.com/office/drawing/2014/main" val="188483433"/>
-                  </a:ext>
-                </a:extLst>
-              </a:tr>
-              <a:tr h="304800">
-                <a:tc>
-                  <a:txBody>
-                    <a:bodyPr/>
-                    <a:lstStyle/>
-                    <a:p>
-                      <a:r>
-                        <a:rPr lang="en-US" sz="1600" b="0">
-                          <a:latin typeface="Calibri" panose="020F0502020204030204" pitchFamily="34" charset="0"/>
-                        </a:rPr>
-                        <a:t>Harbor seal</a:t>
-                      </a:r>
-                    </a:p>
-                  </a:txBody>
-                  <a:tcPr marT="25400" marB="25400"/>
-                </a:tc>
-                <a:tc>
-                  <a:txBody>
-                    <a:bodyPr/>
-                    <a:lstStyle/>
-                    <a:p>
-                      <a:r>
-                        <a:rPr lang="en-US" sz="1600" b="0">
-                          <a:latin typeface="Calibri" panose="020F0502020204030204" pitchFamily="34" charset="0"/>
-                        </a:rPr>
-                        <a:t>15</a:t>
-                      </a:r>
-                    </a:p>
-                  </a:txBody>
-                  <a:tcPr marT="25400" marB="25400"/>
-                </a:tc>
-                <a:tc>
-                  <a:txBody>
-                    <a:bodyPr/>
-                    <a:lstStyle/>
-                    <a:p>
-                      <a:r>
-                        <a:rPr lang="en-US" sz="1600" b="0">
-                          <a:latin typeface="Calibri" panose="020F0502020204030204" pitchFamily="34" charset="0"/>
-                        </a:rPr>
-                        <a:t>86.5</a:t>
-                      </a:r>
-                    </a:p>
-                  </a:txBody>
-                  <a:tcPr marT="25400" marB="25400"/>
-                </a:tc>
-                <a:tc>
-                  <a:txBody>
-                    <a:bodyPr/>
-                    <a:lstStyle/>
-                    <a:p>
-                      <a:r>
-                        <a:rPr lang="en-US" sz="1600" b="0">
-                          <a:latin typeface="Calibri" panose="020F0502020204030204" pitchFamily="34" charset="0"/>
-                        </a:rPr>
-                        <a:t>10.5</a:t>
-                      </a:r>
-                    </a:p>
-                  </a:txBody>
-                  <a:tcPr marT="25400" marB="25400"/>
-                </a:tc>
-                <a:extLst>
-                  <a:ext uri="{0D108BD9-81ED-4DB2-BD59-A6C34878D82A}">
-                    <a16:rowId xmlns:a16="http://schemas.microsoft.com/office/drawing/2014/main" val="1214692265"/>
-                  </a:ext>
-                </a:extLst>
-              </a:tr>
-              <a:tr h="304800">
-                <a:tc>
-                  <a:txBody>
-                    <a:bodyPr/>
-                    <a:lstStyle/>
-                    <a:p>
-                      <a:r>
-                        <a:rPr lang="en-US" sz="1600" b="0">
-                          <a:latin typeface="Calibri" panose="020F0502020204030204" pitchFamily="34" charset="0"/>
-                        </a:rPr>
-                        <a:t>Ringed seal</a:t>
-                      </a:r>
-                    </a:p>
-                  </a:txBody>
-                  <a:tcPr marT="25400" marB="25400"/>
-                </a:tc>
-                <a:tc>
-                  <a:txBody>
-                    <a:bodyPr/>
-                    <a:lstStyle/>
-                    <a:p>
-                      <a:r>
-                        <a:rPr lang="en-US" sz="1600" b="0">
-                          <a:latin typeface="Calibri" panose="020F0502020204030204" pitchFamily="34" charset="0"/>
-                        </a:rPr>
-                        <a:t>16</a:t>
-                      </a:r>
-                    </a:p>
-                  </a:txBody>
-                  <a:tcPr marT="25400" marB="25400"/>
-                </a:tc>
-                <a:tc>
-                  <a:txBody>
-                    <a:bodyPr/>
-                    <a:lstStyle/>
-                    <a:p>
-                      <a:r>
-                        <a:rPr lang="en-US" sz="1600" b="0">
-                          <a:latin typeface="Calibri" panose="020F0502020204030204" pitchFamily="34" charset="0"/>
-                        </a:rPr>
-                        <a:t>79.6</a:t>
-                      </a:r>
-                    </a:p>
-                  </a:txBody>
-                  <a:tcPr marT="25400" marB="25400"/>
-                </a:tc>
-                <a:tc>
-                  <a:txBody>
-                    <a:bodyPr/>
-                    <a:lstStyle/>
-                    <a:p>
-                      <a:r>
-                        <a:rPr lang="en-US" sz="1600" b="0">
-                          <a:latin typeface="Calibri" panose="020F0502020204030204" pitchFamily="34" charset="0"/>
-                        </a:rPr>
-                        <a:t>10.9</a:t>
-                      </a:r>
-                    </a:p>
-                  </a:txBody>
-                  <a:tcPr marT="25400" marB="25400"/>
-                </a:tc>
-                <a:extLst>
-                  <a:ext uri="{0D108BD9-81ED-4DB2-BD59-A6C34878D82A}">
-                    <a16:rowId xmlns:a16="http://schemas.microsoft.com/office/drawing/2014/main" val="2893545131"/>
-                  </a:ext>
-                </a:extLst>
-              </a:tr>
-              <a:tr h="304800">
-                <a:tc>
-                  <a:txBody>
-                    <a:bodyPr/>
-                    <a:lstStyle/>
-                    <a:p>
-                      <a:r>
-                        <a:rPr lang="en-US" sz="1600" b="0">
-                          <a:latin typeface="Calibri" panose="020F0502020204030204" pitchFamily="34" charset="0"/>
-                        </a:rPr>
-                        <a:t>Spotted seal</a:t>
-                      </a:r>
-                    </a:p>
-                  </a:txBody>
-                  <a:tcPr marT="25400" marB="25400"/>
-                </a:tc>
-                <a:tc>
-                  <a:txBody>
-                    <a:bodyPr/>
-                    <a:lstStyle/>
-                    <a:p>
-                      <a:r>
-                        <a:rPr lang="en-US" sz="1600" b="0">
-                          <a:latin typeface="Calibri" panose="020F0502020204030204" pitchFamily="34" charset="0"/>
-                        </a:rPr>
-                        <a:t>9</a:t>
-                      </a:r>
-                    </a:p>
-                  </a:txBody>
-                  <a:tcPr marT="25400" marB="25400"/>
-                </a:tc>
-                <a:tc>
-                  <a:txBody>
-                    <a:bodyPr/>
-                    <a:lstStyle/>
-                    <a:p>
-                      <a:r>
-                        <a:rPr lang="en-US" sz="1600" b="0">
-                          <a:latin typeface="Calibri" panose="020F0502020204030204" pitchFamily="34" charset="0"/>
-                        </a:rPr>
-                        <a:t>91.2</a:t>
-                      </a:r>
-                    </a:p>
-                  </a:txBody>
-                  <a:tcPr marT="25400" marB="25400"/>
-                </a:tc>
-                <a:tc>
-                  <a:txBody>
-                    <a:bodyPr/>
-                    <a:lstStyle/>
-                    <a:p>
-                      <a:r>
-                        <a:rPr lang="en-US" sz="1600" b="0">
-                          <a:latin typeface="Calibri" panose="020F0502020204030204" pitchFamily="34" charset="0"/>
-                        </a:rPr>
-                        <a:t>7.9</a:t>
-                      </a:r>
-                    </a:p>
-                  </a:txBody>
-                  <a:tcPr marT="25400" marB="25400"/>
-                </a:tc>
-                <a:extLst>
-                  <a:ext uri="{0D108BD9-81ED-4DB2-BD59-A6C34878D82A}">
-                    <a16:rowId xmlns:a16="http://schemas.microsoft.com/office/drawing/2014/main" val="3525875763"/>
-                  </a:ext>
-                </a:extLst>
-              </a:tr>
-              <a:tr h="304800">
-                <a:tc>
-                  <a:txBody>
-                    <a:bodyPr/>
-                    <a:lstStyle/>
-                    <a:p>
-                      <a:r>
-                        <a:rPr lang="en-US" sz="1600" b="0">
-                          <a:latin typeface="Calibri" panose="020F0502020204030204" pitchFamily="34" charset="0"/>
-                        </a:rPr>
-                        <a:t>Gray seal</a:t>
-                      </a:r>
-                    </a:p>
-                  </a:txBody>
-                  <a:tcPr marT="25400" marB="25400"/>
-                </a:tc>
-                <a:tc>
-                  <a:txBody>
-                    <a:bodyPr/>
-                    <a:lstStyle/>
-                    <a:p>
-                      <a:r>
-                        <a:rPr lang="en-US" sz="1600" b="0">
-                          <a:latin typeface="Calibri" panose="020F0502020204030204" pitchFamily="34" charset="0"/>
-                        </a:rPr>
-                        <a:t>8</a:t>
-                      </a:r>
-                    </a:p>
-                  </a:txBody>
-                  <a:tcPr marT="25400" marB="25400"/>
-                </a:tc>
-                <a:tc>
-                  <a:txBody>
-                    <a:bodyPr/>
-                    <a:lstStyle/>
-                    <a:p>
-                      <a:r>
-                        <a:rPr lang="en-US" sz="1600" b="0">
-                          <a:latin typeface="Calibri" panose="020F0502020204030204" pitchFamily="34" charset="0"/>
-                        </a:rPr>
-                        <a:t>73.8</a:t>
-                      </a:r>
-                    </a:p>
-                  </a:txBody>
-                  <a:tcPr marT="25400" marB="25400"/>
-                </a:tc>
-                <a:tc>
-                  <a:txBody>
-                    <a:bodyPr/>
-                    <a:lstStyle/>
-                    <a:p>
-                      <a:r>
-                        <a:rPr lang="en-US" sz="1600" b="0">
-                          <a:latin typeface="Calibri" panose="020F0502020204030204" pitchFamily="34" charset="0"/>
-                        </a:rPr>
-                        <a:t>12.5</a:t>
-                      </a:r>
-                    </a:p>
-                  </a:txBody>
-                  <a:tcPr marT="25400" marB="25400"/>
-                </a:tc>
-                <a:extLst>
-                  <a:ext uri="{0D108BD9-81ED-4DB2-BD59-A6C34878D82A}">
-                    <a16:rowId xmlns:a16="http://schemas.microsoft.com/office/drawing/2014/main" val="3449720881"/>
-                  </a:ext>
-                </a:extLst>
-              </a:tr>
-              <a:tr h="304800">
-                <a:tc>
-                  <a:txBody>
-                    <a:bodyPr/>
-                    <a:lstStyle/>
-                    <a:p>
-                      <a:r>
-                        <a:rPr lang="en-US" sz="1600" b="0">
-                          <a:latin typeface="Calibri" panose="020F0502020204030204" pitchFamily="34" charset="0"/>
-                        </a:rPr>
-                        <a:t>…</a:t>
-                      </a:r>
-                    </a:p>
-                  </a:txBody>
-                  <a:tcPr marT="25400" marB="25400"/>
-                </a:tc>
-                <a:tc>
-                  <a:txBody>
-                    <a:bodyPr/>
-                    <a:lstStyle/>
-                    <a:p>
-                      <a:r>
-                        <a:rPr lang="en-US" sz="1600" b="0">
-                          <a:latin typeface="Calibri" panose="020F0502020204030204" pitchFamily="34" charset="0"/>
-                        </a:rPr>
-                        <a:t>…</a:t>
-                      </a:r>
-                    </a:p>
-                  </a:txBody>
-                  <a:tcPr marT="25400" marB="25400"/>
-                </a:tc>
-                <a:tc>
-                  <a:txBody>
-                    <a:bodyPr/>
-                    <a:lstStyle/>
-                    <a:p>
-                      <a:r>
-                        <a:rPr lang="en-US" sz="1600" b="0">
-                          <a:latin typeface="Calibri" panose="020F0502020204030204" pitchFamily="34" charset="0"/>
-                        </a:rPr>
-                        <a:t>…</a:t>
-                      </a:r>
-                    </a:p>
-                  </a:txBody>
-                  <a:tcPr marT="25400" marB="25400"/>
-                </a:tc>
-                <a:tc>
-                  <a:txBody>
-                    <a:bodyPr/>
-                    <a:lstStyle/>
-                    <a:p>
-                      <a:r>
-                        <a:rPr lang="en-US" sz="1600" b="0">
-                          <a:latin typeface="Calibri" panose="020F0502020204030204" pitchFamily="34" charset="0"/>
-                        </a:rPr>
-                        <a:t>…</a:t>
-                      </a:r>
-                    </a:p>
-                  </a:txBody>
-                  <a:tcPr marT="25400" marB="25400"/>
-                </a:tc>
-                <a:extLst>
-                  <a:ext uri="{0D108BD9-81ED-4DB2-BD59-A6C34878D82A}">
-                    <a16:rowId xmlns:a16="http://schemas.microsoft.com/office/drawing/2014/main" val="1381287125"/>
-                  </a:ext>
-                </a:extLst>
-              </a:tr>
-            </a:tbl>
-          </a:graphicData>
-        </a:graphic>
-      </p:graphicFrame>
-    </p:spTree>
-    <p:extLst>
-      <p:ext uri="{BB962C8B-B14F-4D97-AF65-F5344CB8AC3E}">
-        <p14:creationId xmlns:p14="http://schemas.microsoft.com/office/powerpoint/2010/main" val="2484264126"/>
-      </p:ext>
-    </p:extLst>
-  </p:cSld>
-  <p:clrMapOvr>
-    <a:masterClrMapping/>
-  </p:clrMapOvr>
-</p:sld>
-</file>
-
-<file path=ppt/slides/slide17.xml><?xml version="1.0" encoding="utf-8"?>
-<p:sld xmlns:a="http://schemas.openxmlformats.org/drawingml/2006/main" xmlns:r="http://schemas.openxmlformats.org/officeDocument/2006/relationships" xmlns:p="http://schemas.openxmlformats.org/presentationml/2006/main">
-  <p:cSld>
-    <p:spTree>
-      <p:nvGrpSpPr>
-        <p:cNvPr id="1" name=""/>
-        <p:cNvGrpSpPr/>
-        <p:nvPr/>
-      </p:nvGrpSpPr>
-      <p:grpSpPr>
-        <a:xfrm>
-          <a:off x="0" y="0"/>
-          <a:ext cx="0" cy="0"/>
-          <a:chOff x="0" y="0"/>
-          <a:chExt cx="0" cy="0"/>
-        </a:xfrm>
-      </p:grpSpPr>
-      <p:sp>
-        <p:nvSpPr>
-          <p:cNvPr id="2" name="Title 1">
-            <a:extLst>
-              <a:ext uri="{FF2B5EF4-FFF2-40B4-BE49-F238E27FC236}">
-                <a16:creationId xmlns:a16="http://schemas.microsoft.com/office/drawing/2014/main" id="{C08D30B1-1864-30EF-7EAB-9BEE656C0012}"/>
-              </a:ext>
-            </a:extLst>
-          </p:cNvPr>
-          <p:cNvSpPr>
-            <a:spLocks noGrp="1"/>
-          </p:cNvSpPr>
-          <p:nvPr>
-            <p:ph type="title"/>
-          </p:nvPr>
-        </p:nvSpPr>
-        <p:spPr/>
-        <p:txBody>
-          <a:bodyPr>
-            <a:noAutofit/>
-          </a:bodyPr>
-          <a:lstStyle/>
-          <a:p>
-            <a:r>
-              <a:rPr lang="en-US">
-                <a:solidFill>
-                  <a:srgbClr val="1F3864"/>
-                </a:solidFill>
-              </a:rPr>
-              <a:t>Example: spotted seal whiskers</a:t>
-            </a:r>
-          </a:p>
-        </p:txBody>
-      </p:sp>
-      <p:sp>
-        <p:nvSpPr>
-          <p:cNvPr id="4" name="Slide Number Placeholder 3">
-            <a:extLst>
-              <a:ext uri="{FF2B5EF4-FFF2-40B4-BE49-F238E27FC236}">
-                <a16:creationId xmlns:a16="http://schemas.microsoft.com/office/drawing/2014/main" id="{3F875068-D051-44AE-498E-1BEBEDE3A7C8}"/>
-              </a:ext>
-            </a:extLst>
-          </p:cNvPr>
-          <p:cNvSpPr>
-            <a:spLocks noGrp="1"/>
-          </p:cNvSpPr>
-          <p:nvPr>
-            <p:ph type="sldNum" sz="quarter" idx="12"/>
-          </p:nvPr>
-        </p:nvSpPr>
-        <p:spPr/>
-        <p:txBody>
-          <a:bodyPr/>
-          <a:lstStyle/>
-          <a:p>
-            <a:fld id="{A80A81DD-F10A-4B1C-963A-0ABBB4865886}" type="slidenum">
-              <a:rPr lang="en-US" sz="1600" smtClean="0"/>
-              <a:t>17</a:t>
-            </a:fld>
-            <a:endParaRPr lang="en-US" sz="1600"/>
-          </a:p>
-        </p:txBody>
-      </p:sp>
-      <p:sp>
-        <p:nvSpPr>
-          <p:cNvPr id="3" name="Title rule">
-            <a:extLst>
-              <a:ext uri="{FF2B5EF4-FFF2-40B4-BE49-F238E27FC236}">
-                <a16:creationId xmlns:a16="http://schemas.microsoft.com/office/drawing/2014/main" id="{30656AA8-9645-F028-C769-A313710853CC}"/>
-              </a:ext>
-            </a:extLst>
-          </p:cNvPr>
-          <p:cNvSpPr/>
-          <p:nvPr/>
-        </p:nvSpPr>
-        <p:spPr>
-          <a:xfrm>
-            <a:off x="838200" y="1600200"/>
-            <a:ext cx="10515600" cy="38100"/>
-          </a:xfrm>
-          <a:prstGeom prst="rect">
-            <a:avLst/>
-          </a:prstGeom>
-          <a:solidFill>
-            <a:srgbClr val="4472C4"/>
-          </a:solidFill>
-          <a:ln w="12700" cap="flat" cmpd="sng" algn="ctr">
-            <a:noFill/>
-            <a:prstDash val="solid"/>
-            <a:miter lim="800000"/>
-          </a:ln>
-          <a:effectLst/>
-          <a:extLst>
-            <a:ext uri="{91240B29-F687-4F45-9708-019B960494DF}">
-              <a14:hiddenLine xmlns:a14="http://schemas.microsoft.com/office/drawing/2010/main" w="12700" cap="flat" cmpd="sng" algn="ctr">
-                <a:solidFill>
-                  <a:schemeClr val="accent1">
-                    <a:shade val="15000"/>
-                  </a:schemeClr>
-                </a:solidFill>
-                <a:prstDash val="solid"/>
-                <a:miter lim="800000"/>
-              </a14:hiddenLine>
-            </a:ext>
-          </a:extLst>
-        </p:spPr>
-        <p:style>
-          <a:lnRef idx="2">
-            <a:schemeClr val="accent1">
-              <a:shade val="15000"/>
-            </a:schemeClr>
-          </a:lnRef>
-          <a:fillRef idx="1">
-            <a:schemeClr val="accent1"/>
-          </a:fillRef>
-          <a:effectRef idx="0">
-            <a:schemeClr val="accent1"/>
-          </a:effectRef>
-          <a:fontRef idx="minor">
-            <a:schemeClr val="lt1"/>
-          </a:fontRef>
-        </p:style>
-        <p:txBody>
-          <a:bodyPr rtlCol="0" anchor="ctr"/>
-          <a:lstStyle/>
-          <a:p>
-            <a:pPr algn="ctr"/>
-            <a:endParaRPr lang="en-US"/>
-          </a:p>
-        </p:txBody>
-      </p:sp>
-      <p:sp>
-        <p:nvSpPr>
-          <p:cNvPr id="8" name="Context">
-            <a:extLst>
-              <a:ext uri="{FF2B5EF4-FFF2-40B4-BE49-F238E27FC236}">
-                <a16:creationId xmlns:a16="http://schemas.microsoft.com/office/drawing/2014/main" id="{71E3EA8C-31B4-DAD4-BC4A-65D72E59AD46}"/>
-              </a:ext>
-            </a:extLst>
-          </p:cNvPr>
-          <p:cNvSpPr txBox="1"/>
-          <p:nvPr/>
-        </p:nvSpPr>
-        <p:spPr>
-          <a:xfrm>
-            <a:off x="762000" y="1879600"/>
-            <a:ext cx="10668000" cy="381000"/>
-          </a:xfrm>
-          <a:prstGeom prst="rect">
-            <a:avLst/>
-          </a:prstGeom>
-          <a:noFill/>
-        </p:spPr>
-        <p:txBody>
-          <a:bodyPr vert="horz" wrap="square" rtlCol="0">
-            <a:spAutoFit/>
-          </a:bodyPr>
-          <a:lstStyle/>
-          <a:p>
-            <a:pPr>
-              <a:spcAft>
-                <a:spcPts val="200"/>
-              </a:spcAft>
-            </a:pPr>
-            <a:r>
-              <a:rPr lang="en-US">
-                <a:solidFill>
-                  <a:srgbClr val="000000"/>
-                </a:solidFill>
-                <a:latin typeface="Calibri" panose="020F0502020204030204" pitchFamily="34" charset="0"/>
-              </a:rPr>
-              <a:t>Estimate μ, the mean whisker length of all spotted seals, from the 9 that were measured.</a:t>
-            </a:r>
-          </a:p>
-        </p:txBody>
-      </p:sp>
-      <p:sp>
-        <p:nvSpPr>
-          <p:cNvPr id="9" name="Numbers">
-            <a:extLst>
-              <a:ext uri="{FF2B5EF4-FFF2-40B4-BE49-F238E27FC236}">
-                <a16:creationId xmlns:a16="http://schemas.microsoft.com/office/drawing/2014/main" id="{C419F151-05B2-3E4B-BAE8-BB1F06D9D1FD}"/>
-              </a:ext>
-            </a:extLst>
-          </p:cNvPr>
-          <p:cNvSpPr txBox="1"/>
-          <p:nvPr/>
-        </p:nvSpPr>
-        <p:spPr>
-          <a:xfrm>
-            <a:off x="762000" y="2286000"/>
-            <a:ext cx="10668000" cy="400110"/>
-          </a:xfrm>
-          <a:prstGeom prst="rect">
-            <a:avLst/>
-          </a:prstGeom>
-          <a:noFill/>
-        </p:spPr>
-        <p:txBody>
-          <a:bodyPr vert="horz" wrap="square" rtlCol="0">
-            <a:spAutoFit/>
-          </a:bodyPr>
-          <a:lstStyle/>
-          <a:p>
-            <a:pPr>
-              <a:spcAft>
-                <a:spcPts val="200"/>
-              </a:spcAft>
-            </a:pPr>
-            <a:r>
-              <a:rPr lang="pt-BR" sz="2000" b="1">
-                <a:solidFill>
-                  <a:srgbClr val="000000"/>
-                </a:solidFill>
-                <a:latin typeface="Calibri" panose="020F0502020204030204" pitchFamily="34" charset="0"/>
-              </a:rPr>
-              <a:t>n = 9;     x̄ = 91.2 mm;     s = 7.9 mm</a:t>
-            </a:r>
-            <a:endParaRPr lang="en-US" sz="2000" b="1">
-              <a:solidFill>
-                <a:srgbClr val="000000"/>
-              </a:solidFill>
-              <a:latin typeface="Calibri" panose="020F0502020204030204" pitchFamily="34" charset="0"/>
-            </a:endParaRPr>
-          </a:p>
-        </p:txBody>
-      </p:sp>
-      <p:sp>
-        <p:nvSpPr>
-          <p:cNvPr id="10" name="Question">
-            <a:extLst>
-              <a:ext uri="{FF2B5EF4-FFF2-40B4-BE49-F238E27FC236}">
-                <a16:creationId xmlns:a16="http://schemas.microsoft.com/office/drawing/2014/main" id="{B31E395F-B84E-D1E9-D22A-222467FC4105}"/>
-              </a:ext>
-            </a:extLst>
-          </p:cNvPr>
-          <p:cNvSpPr txBox="1"/>
-          <p:nvPr/>
-        </p:nvSpPr>
-        <p:spPr>
-          <a:xfrm>
-            <a:off x="762000" y="2711510"/>
-            <a:ext cx="10668000" cy="974626"/>
-          </a:xfrm>
-          <a:prstGeom prst="rect">
-            <a:avLst/>
-          </a:prstGeom>
-          <a:noFill/>
-        </p:spPr>
-        <p:txBody>
-          <a:bodyPr vert="horz" wrap="square" rtlCol="0">
-            <a:spAutoFit/>
-          </a:bodyPr>
-          <a:lstStyle/>
-          <a:p>
-            <a:pPr>
-              <a:spcAft>
-                <a:spcPts val="200"/>
-              </a:spcAft>
-            </a:pPr>
-            <a:r>
-              <a:rPr lang="en-US" b="1">
-                <a:solidFill>
-                  <a:srgbClr val="C00000"/>
-                </a:solidFill>
-                <a:latin typeface="Calibri" panose="020F0502020204030204" pitchFamily="34" charset="0"/>
-              </a:rPr>
-              <a:t>(a)  z or t?  How many degrees of freedom?</a:t>
-            </a:r>
-          </a:p>
-          <a:p>
-            <a:pPr>
-              <a:spcAft>
-                <a:spcPts val="200"/>
-              </a:spcAft>
-            </a:pPr>
-            <a:r>
-              <a:rPr lang="en-US" b="1">
-                <a:solidFill>
-                  <a:srgbClr val="C00000"/>
-                </a:solidFill>
-                <a:latin typeface="Calibri" panose="020F0502020204030204" pitchFamily="34" charset="0"/>
-              </a:rPr>
-              <a:t>(b)  What is the standard error?</a:t>
-            </a:r>
-          </a:p>
-          <a:p>
-            <a:pPr>
-              <a:spcAft>
-                <a:spcPts val="200"/>
-              </a:spcAft>
-            </a:pPr>
-            <a:r>
-              <a:rPr lang="en-US" b="1">
-                <a:solidFill>
-                  <a:srgbClr val="C00000"/>
-                </a:solidFill>
-                <a:latin typeface="Calibri" panose="020F0502020204030204" pitchFamily="34" charset="0"/>
-              </a:rPr>
-              <a:t>(c)  What is the 95% confidence interval for μ?</a:t>
-            </a:r>
-          </a:p>
-        </p:txBody>
-      </p:sp>
-      <p:sp>
-        <p:nvSpPr>
-          <p:cNvPr id="11" name="Result">
-            <a:extLst>
-              <a:ext uri="{FF2B5EF4-FFF2-40B4-BE49-F238E27FC236}">
-                <a16:creationId xmlns:a16="http://schemas.microsoft.com/office/drawing/2014/main" id="{5A70F68E-0D93-07B8-82B2-4D8F2F681D0D}"/>
-              </a:ext>
-            </a:extLst>
-          </p:cNvPr>
-          <p:cNvSpPr/>
-          <p:nvPr/>
-        </p:nvSpPr>
-        <p:spPr>
-          <a:xfrm>
-            <a:off x="762000" y="3838536"/>
-            <a:ext cx="10668000" cy="1098054"/>
-          </a:xfrm>
-          <a:prstGeom prst="roundRect">
-            <a:avLst>
-              <a:gd name="adj" fmla="val 4000"/>
-            </a:avLst>
-          </a:prstGeom>
-          <a:solidFill>
-            <a:srgbClr val="F2F6FC"/>
-          </a:solidFill>
-          <a:ln w="15875">
-            <a:solidFill>
-              <a:srgbClr val="4472C4"/>
-            </a:solidFill>
-          </a:ln>
-        </p:spPr>
-        <p:style>
-          <a:lnRef idx="2">
-            <a:schemeClr val="accent1">
-              <a:shade val="15000"/>
-            </a:schemeClr>
-          </a:lnRef>
-          <a:fillRef idx="1">
-            <a:schemeClr val="accent1"/>
-          </a:fillRef>
-          <a:effectRef idx="0">
-            <a:schemeClr val="accent1"/>
-          </a:effectRef>
-          <a:fontRef idx="minor">
-            <a:schemeClr val="lt1"/>
-          </a:fontRef>
-        </p:style>
-        <p:txBody>
-          <a:bodyPr wrap="square" lIns="152400" tIns="76200" rIns="152400" bIns="76200" rtlCol="0" anchor="ctr">
-            <a:spAutoFit/>
-          </a:bodyPr>
-          <a:lstStyle/>
-          <a:p>
-            <a:r>
-              <a:rPr lang="en-US" sz="2000" b="1">
-                <a:solidFill>
-                  <a:srgbClr val="C00000"/>
-                </a:solidFill>
-                <a:latin typeface="Calibri" panose="020F0502020204030204" pitchFamily="34" charset="0"/>
-              </a:rPr>
-              <a:t>(a)  t, because σ is unknown;   df = 9 − 1 = 8,   t = 2.306</a:t>
-            </a:r>
-          </a:p>
-          <a:p>
-            <a:r>
-              <a:rPr lang="en-US" sz="2000" b="1">
-                <a:solidFill>
-                  <a:srgbClr val="C00000"/>
-                </a:solidFill>
-                <a:latin typeface="Calibri" panose="020F0502020204030204" pitchFamily="34" charset="0"/>
-              </a:rPr>
-              <a:t>(b)  7.9 / √9 ≈ 2.63 mm</a:t>
-            </a:r>
-          </a:p>
-          <a:p>
-            <a:r>
-              <a:rPr lang="en-US" sz="2000" b="1">
-                <a:solidFill>
-                  <a:srgbClr val="C00000"/>
-                </a:solidFill>
-                <a:latin typeface="Calibri" panose="020F0502020204030204" pitchFamily="34" charset="0"/>
-              </a:rPr>
-              <a:t>(c)  91.2 ± 2.306(2.63) = 91.2 ± 6.06:   85.1 to 97.3 mm</a:t>
-            </a:r>
-          </a:p>
-        </p:txBody>
-      </p:sp>
-    </p:spTree>
-    <p:extLst>
-      <p:ext uri="{BB962C8B-B14F-4D97-AF65-F5344CB8AC3E}">
-        <p14:creationId xmlns:p14="http://schemas.microsoft.com/office/powerpoint/2010/main" val="2280179866"/>
-      </p:ext>
-    </p:extLst>
-  </p:cSld>
-  <p:clrMapOvr>
-    <a:masterClrMapping/>
-  </p:clrMapOvr>
-  <p:timing>
-    <p:tnLst>
-      <p:par>
-        <p:cTn id="1" dur="indefinite" restart="never" nodeType="tmRoot">
-          <p:childTnLst>
-            <p:seq concurrent="1" nextAc="seek">
-              <p:cTn id="2" dur="indefinite" nodeType="mainSeq">
-                <p:childTnLst>
-                  <p:par>
-                    <p:cTn id="3" fill="hold">
-                      <p:stCondLst>
-                        <p:cond delay="indefinite"/>
-                      </p:stCondLst>
-                      <p:childTnLst>
-                        <p:par>
-                          <p:cTn id="4" fill="hold">
-                            <p:stCondLst>
-                              <p:cond delay="0"/>
-                            </p:stCondLst>
-                            <p:childTnLst>
-                              <p:par>
-                                <p:cTn id="5" presetID="1" presetClass="entr" presetSubtype="0" fill="hold" grpId="0" nodeType="clickEffect">
-                                  <p:stCondLst>
-                                    <p:cond delay="0"/>
-                                  </p:stCondLst>
-                                  <p:childTnLst>
-                                    <p:set>
-                                      <p:cBhvr>
-                                        <p:cTn id="6" dur="1" fill="hold">
-                                          <p:stCondLst>
-                                            <p:cond delay="0"/>
-                                          </p:stCondLst>
-                                        </p:cTn>
-                                        <p:tgtEl>
-                                          <p:spTgt spid="11"/>
-                                        </p:tgtEl>
-                                        <p:attrNameLst>
-                                          <p:attrName>style.visibility</p:attrName>
-                                        </p:attrNameLst>
-                                      </p:cBhvr>
-                                      <p:to>
-                                        <p:strVal val="visible"/>
-                                      </p:to>
-                                    </p:set>
-                                  </p:childTnLst>
-                                </p:cTn>
-                              </p:par>
-                            </p:childTnLst>
-                          </p:cTn>
-                        </p:par>
-                      </p:childTnLst>
-                    </p:cTn>
-                  </p:par>
-                </p:childTnLst>
-              </p:cTn>
-              <p:prevCondLst>
-                <p:cond evt="onPrev" delay="0">
-                  <p:tgtEl>
-                    <p:sldTgt/>
-                  </p:tgtEl>
-                </p:cond>
-              </p:prevCondLst>
-              <p:nextCondLst>
-                <p:cond evt="onNext" delay="0">
-                  <p:tgtEl>
-                    <p:sldTgt/>
-                  </p:tgtEl>
-                </p:cond>
-              </p:nextCondLst>
-            </p:seq>
-          </p:childTnLst>
-        </p:cTn>
-      </p:par>
-    </p:tnLst>
-    <p:bldLst>
-      <p:bldP spid="11" grpId="0" animBg="1"/>
-    </p:bldLst>
-  </p:timing>
-</p:sld>
-</file>
-
-<file path=ppt/slides/slide18.xml><?xml version="1.0" encoding="utf-8"?>
-<p:sld xmlns:a="http://schemas.openxmlformats.org/drawingml/2006/main" xmlns:r="http://schemas.openxmlformats.org/officeDocument/2006/relationships" xmlns:p="http://schemas.openxmlformats.org/presentationml/2006/main">
-  <p:cSld>
-    <p:spTree>
-      <p:nvGrpSpPr>
-        <p:cNvPr id="1" name=""/>
-        <p:cNvGrpSpPr/>
-        <p:nvPr/>
-      </p:nvGrpSpPr>
-      <p:grpSpPr>
-        <a:xfrm>
-          <a:off x="0" y="0"/>
-          <a:ext cx="0" cy="0"/>
-          <a:chOff x="0" y="0"/>
-          <a:chExt cx="0" cy="0"/>
-        </a:xfrm>
-      </p:grpSpPr>
-      <p:sp>
-        <p:nvSpPr>
-          <p:cNvPr id="2" name="Title 1">
-            <a:extLst>
-              <a:ext uri="{FF2B5EF4-FFF2-40B4-BE49-F238E27FC236}">
-                <a16:creationId xmlns:a16="http://schemas.microsoft.com/office/drawing/2014/main" id="{C08D30B1-1864-30EF-7EAB-9BEE656C0012}"/>
-              </a:ext>
-            </a:extLst>
-          </p:cNvPr>
-          <p:cNvSpPr>
-            <a:spLocks noGrp="1"/>
-          </p:cNvSpPr>
-          <p:nvPr>
-            <p:ph type="title"/>
-          </p:nvPr>
-        </p:nvSpPr>
-        <p:spPr/>
-        <p:txBody>
-          <a:bodyPr>
-            <a:noAutofit/>
-          </a:bodyPr>
-          <a:lstStyle/>
-          <a:p>
-            <a:r>
-              <a:rPr lang="en-US">
-                <a:solidFill>
-                  <a:srgbClr val="1F3864"/>
-                </a:solidFill>
-              </a:rPr>
-              <a:t>Data: watermelon citrulline</a:t>
-            </a:r>
-          </a:p>
-        </p:txBody>
-      </p:sp>
-      <p:sp>
-        <p:nvSpPr>
-          <p:cNvPr id="4" name="Slide Number Placeholder 3">
-            <a:extLst>
-              <a:ext uri="{FF2B5EF4-FFF2-40B4-BE49-F238E27FC236}">
-                <a16:creationId xmlns:a16="http://schemas.microsoft.com/office/drawing/2014/main" id="{3F875068-D051-44AE-498E-1BEBEDE3A7C8}"/>
-              </a:ext>
-            </a:extLst>
-          </p:cNvPr>
-          <p:cNvSpPr>
-            <a:spLocks noGrp="1"/>
-          </p:cNvSpPr>
-          <p:nvPr>
-            <p:ph type="sldNum" sz="quarter" idx="12"/>
-          </p:nvPr>
-        </p:nvSpPr>
-        <p:spPr/>
-        <p:txBody>
-          <a:bodyPr/>
-          <a:lstStyle/>
-          <a:p>
-            <a:fld id="{A80A81DD-F10A-4B1C-963A-0ABBB4865886}" type="slidenum">
-              <a:rPr lang="en-US" sz="1600" smtClean="0"/>
-              <a:t>18</a:t>
-            </a:fld>
-            <a:endParaRPr lang="en-US" sz="1600"/>
-          </a:p>
-        </p:txBody>
-      </p:sp>
-      <p:sp>
-        <p:nvSpPr>
-          <p:cNvPr id="3" name="Title rule">
-            <a:extLst>
-              <a:ext uri="{FF2B5EF4-FFF2-40B4-BE49-F238E27FC236}">
-                <a16:creationId xmlns:a16="http://schemas.microsoft.com/office/drawing/2014/main" id="{30656AA8-9645-F028-C769-A313710853CC}"/>
-              </a:ext>
-            </a:extLst>
-          </p:cNvPr>
-          <p:cNvSpPr/>
-          <p:nvPr/>
-        </p:nvSpPr>
-        <p:spPr>
-          <a:xfrm>
-            <a:off x="838200" y="1600200"/>
-            <a:ext cx="10515600" cy="38100"/>
-          </a:xfrm>
-          <a:prstGeom prst="rect">
-            <a:avLst/>
-          </a:prstGeom>
-          <a:solidFill>
-            <a:srgbClr val="4472C4"/>
-          </a:solidFill>
-          <a:ln w="12700" cap="flat" cmpd="sng" algn="ctr">
-            <a:noFill/>
-            <a:prstDash val="solid"/>
-            <a:miter lim="800000"/>
-          </a:ln>
-          <a:effectLst/>
-          <a:extLst>
-            <a:ext uri="{91240B29-F687-4F45-9708-019B960494DF}">
-              <a14:hiddenLine xmlns:a14="http://schemas.microsoft.com/office/drawing/2010/main" w="12700" cap="flat" cmpd="sng" algn="ctr">
-                <a:solidFill>
-                  <a:schemeClr val="accent1">
-                    <a:shade val="15000"/>
-                  </a:schemeClr>
-                </a:solidFill>
-                <a:prstDash val="solid"/>
-                <a:miter lim="800000"/>
-              </a14:hiddenLine>
-            </a:ext>
-          </a:extLst>
-        </p:spPr>
-        <p:style>
-          <a:lnRef idx="2">
-            <a:schemeClr val="accent1">
-              <a:shade val="15000"/>
-            </a:schemeClr>
-          </a:lnRef>
-          <a:fillRef idx="1">
-            <a:schemeClr val="accent1"/>
-          </a:fillRef>
-          <a:effectRef idx="0">
-            <a:schemeClr val="accent1"/>
-          </a:effectRef>
-          <a:fontRef idx="minor">
-            <a:schemeClr val="lt1"/>
-          </a:fontRef>
-        </p:style>
-        <p:txBody>
-          <a:bodyPr rtlCol="0" anchor="ctr"/>
-          <a:lstStyle/>
-          <a:p>
-            <a:pPr algn="ctr"/>
-            <a:endParaRPr lang="en-US"/>
-          </a:p>
-        </p:txBody>
-      </p:sp>
-      <p:sp>
-        <p:nvSpPr>
-          <p:cNvPr id="8" name="Context">
-            <a:extLst>
-              <a:ext uri="{FF2B5EF4-FFF2-40B4-BE49-F238E27FC236}">
-                <a16:creationId xmlns:a16="http://schemas.microsoft.com/office/drawing/2014/main" id="{71E3EA8C-31B4-DAD4-BC4A-65D72E59AD46}"/>
-              </a:ext>
-            </a:extLst>
-          </p:cNvPr>
-          <p:cNvSpPr txBox="1"/>
-          <p:nvPr/>
-        </p:nvSpPr>
-        <p:spPr>
-          <a:xfrm>
-            <a:off x="762000" y="1879600"/>
-            <a:ext cx="10668000" cy="646331"/>
-          </a:xfrm>
-          <a:prstGeom prst="rect">
-            <a:avLst/>
-          </a:prstGeom>
-          <a:noFill/>
-        </p:spPr>
-        <p:txBody>
-          <a:bodyPr vert="horz" wrap="square" rtlCol="0">
-            <a:spAutoFit/>
-          </a:bodyPr>
-          <a:lstStyle/>
-          <a:p>
-            <a:pPr>
-              <a:spcAft>
-                <a:spcPts val="200"/>
-              </a:spcAft>
-            </a:pPr>
-            <a:r>
-              <a:rPr lang="en-US">
-                <a:solidFill>
-                  <a:srgbClr val="000000"/>
-                </a:solidFill>
-                <a:latin typeface="Calibri" panose="020F0502020204030204" pitchFamily="34" charset="0"/>
-              </a:rPr>
-              <a:t>Korea’s national gene bank keeps seed of 100 watermelon varieties from around the world.  Assefa et al. (2020) measured citrulline, the amino acid named after watermelon (Citrullus).</a:t>
-            </a:r>
-          </a:p>
-        </p:txBody>
-      </p:sp>
-      <p:sp>
-        <p:nvSpPr>
-          <p:cNvPr id="9" name="Numbers">
-            <a:extLst>
-              <a:ext uri="{FF2B5EF4-FFF2-40B4-BE49-F238E27FC236}">
-                <a16:creationId xmlns:a16="http://schemas.microsoft.com/office/drawing/2014/main" id="{C419F151-05B2-3E4B-BAE8-BB1F06D9D1FD}"/>
-              </a:ext>
-            </a:extLst>
-          </p:cNvPr>
-          <p:cNvSpPr txBox="1"/>
-          <p:nvPr/>
-        </p:nvSpPr>
-        <p:spPr>
-          <a:xfrm>
-            <a:off x="762000" y="2551331"/>
-            <a:ext cx="10668000" cy="400110"/>
-          </a:xfrm>
-          <a:prstGeom prst="rect">
-            <a:avLst/>
-          </a:prstGeom>
-          <a:noFill/>
-        </p:spPr>
-        <p:txBody>
-          <a:bodyPr vert="horz" wrap="square" rtlCol="0">
-            <a:spAutoFit/>
-          </a:bodyPr>
-          <a:lstStyle/>
-          <a:p>
-            <a:pPr>
-              <a:spcAft>
-                <a:spcPts val="200"/>
-              </a:spcAft>
-            </a:pPr>
-            <a:r>
-              <a:rPr lang="en-US" sz="2000" b="1">
-                <a:solidFill>
-                  <a:srgbClr val="000000"/>
-                </a:solidFill>
-                <a:latin typeface="Calibri" panose="020F0502020204030204" pitchFamily="34" charset="0"/>
-              </a:rPr>
-              <a:t>X = citrulline in a variety’s fruit flesh, in mg per g of dry weight</a:t>
-            </a:r>
-          </a:p>
-        </p:txBody>
-      </p:sp>
-      <p:sp>
-        <p:nvSpPr>
-          <p:cNvPr id="10" name="Question">
-            <a:extLst>
-              <a:ext uri="{FF2B5EF4-FFF2-40B4-BE49-F238E27FC236}">
-                <a16:creationId xmlns:a16="http://schemas.microsoft.com/office/drawing/2014/main" id="{B31E395F-B84E-D1E9-D22A-222467FC4105}"/>
-              </a:ext>
-            </a:extLst>
-          </p:cNvPr>
-          <p:cNvSpPr txBox="1"/>
-          <p:nvPr/>
-        </p:nvSpPr>
-        <p:spPr>
-          <a:xfrm>
-            <a:off x="762000" y="5288241"/>
-            <a:ext cx="10668000" cy="369332"/>
-          </a:xfrm>
-          <a:prstGeom prst="rect">
-            <a:avLst/>
-          </a:prstGeom>
-          <a:noFill/>
-        </p:spPr>
-        <p:txBody>
-          <a:bodyPr vert="horz" wrap="square" rtlCol="0">
-            <a:spAutoFit/>
-          </a:bodyPr>
-          <a:lstStyle/>
-          <a:p>
-            <a:pPr>
-              <a:spcAft>
-                <a:spcPts val="200"/>
-              </a:spcAft>
-            </a:pPr>
-            <a:r>
-              <a:rPr lang="en-US">
-                <a:solidFill>
-                  <a:srgbClr val="000000"/>
-                </a:solidFill>
-                <a:latin typeface="Calibri" panose="020F0502020204030204" pitchFamily="34" charset="0"/>
-              </a:rPr>
-              <a:t>A random sample of n = 12 of the 100 gene-bank varieties</a:t>
-            </a:r>
-          </a:p>
-        </p:txBody>
-      </p:sp>
-      <p:graphicFrame>
-        <p:nvGraphicFramePr>
-          <p:cNvPr id="5" name="Data table">
-            <a:extLst>
-              <a:ext uri="{FF2B5EF4-FFF2-40B4-BE49-F238E27FC236}">
-                <a16:creationId xmlns:a16="http://schemas.microsoft.com/office/drawing/2014/main" id="{107D57CA-D659-5E39-E6B7-B1821FDE1989}"/>
-              </a:ext>
-            </a:extLst>
-          </p:cNvPr>
-          <p:cNvGraphicFramePr>
-            <a:graphicFrameLocks noGrp="1"/>
-          </p:cNvGraphicFramePr>
-          <p:nvPr>
-            <p:extLst>
-              <p:ext uri="{D42A27DB-BD31-4B8C-83A1-F6EECF244321}">
-                <p14:modId xmlns:p14="http://schemas.microsoft.com/office/powerpoint/2010/main" val="2943487696"/>
-              </p:ext>
-            </p:extLst>
-          </p:nvPr>
-        </p:nvGraphicFramePr>
-        <p:xfrm>
-          <a:off x="762000" y="3053041"/>
-          <a:ext cx="3810000" cy="2133600"/>
-        </p:xfrm>
-        <a:graphic>
-          <a:graphicData uri="http://schemas.openxmlformats.org/drawingml/2006/table">
-            <a:tbl>
-              <a:tblPr firstRow="1" bandRow="1">
-                <a:tableStyleId>{3B4B98B0-60AC-42C2-AFA5-B58CD77FA1E5}</a:tableStyleId>
-              </a:tblPr>
-              <a:tblGrid>
-                <a:gridCol w="1905000">
-                  <a:extLst>
-                    <a:ext uri="{9D8B030D-6E8A-4147-A177-3AD203B41FA5}">
-                      <a16:colId xmlns:a16="http://schemas.microsoft.com/office/drawing/2014/main" val="330255408"/>
-                    </a:ext>
-                  </a:extLst>
-                </a:gridCol>
-                <a:gridCol w="2286000">
-                  <a:extLst>
-                    <a:ext uri="{9D8B030D-6E8A-4147-A177-3AD203B41FA5}">
-                      <a16:colId xmlns:a16="http://schemas.microsoft.com/office/drawing/2014/main" val="3431246229"/>
-                    </a:ext>
-                  </a:extLst>
-                </a:gridCol>
-                <a:gridCol w="2540000">
-                  <a:extLst>
-                    <a:ext uri="{9D8B030D-6E8A-4147-A177-3AD203B41FA5}">
-                      <a16:colId xmlns:a16="http://schemas.microsoft.com/office/drawing/2014/main" val="1971666150"/>
-                    </a:ext>
-                  </a:extLst>
-                </a:gridCol>
-              </a:tblGrid>
-              <a:tr h="304800">
-                <a:tc>
-                  <a:txBody>
-                    <a:bodyPr/>
-                    <a:lstStyle/>
-                    <a:p>
-                      <a:r>
-                        <a:rPr lang="en-US" sz="1600" b="1">
-                          <a:latin typeface="Calibri" panose="020F0502020204030204" pitchFamily="34" charset="0"/>
-                        </a:rPr>
-                        <a:t>VARIETY</a:t>
-                      </a:r>
-                    </a:p>
-                  </a:txBody>
-                  <a:tcPr marT="25400" marB="25400"/>
-                </a:tc>
-                <a:tc>
-                  <a:txBody>
-                    <a:bodyPr/>
-                    <a:lstStyle/>
-                    <a:p>
-                      <a:r>
-                        <a:rPr lang="en-US" sz="1600" b="1">
-                          <a:latin typeface="Calibri" panose="020F0502020204030204" pitchFamily="34" charset="0"/>
-                        </a:rPr>
-                        <a:t>ORIGIN</a:t>
-                      </a:r>
-                    </a:p>
-                  </a:txBody>
-                  <a:tcPr marT="25400" marB="25400"/>
-                </a:tc>
-                <a:tc>
-                  <a:txBody>
-                    <a:bodyPr/>
-                    <a:lstStyle/>
-                    <a:p>
-                      <a:r>
-                        <a:rPr lang="en-US" sz="1600" b="1">
-                          <a:latin typeface="Calibri" panose="020F0502020204030204" pitchFamily="34" charset="0"/>
-                        </a:rPr>
-                        <a:t>CITRULLINE (mg/g)</a:t>
-                      </a:r>
-                    </a:p>
-                  </a:txBody>
-                  <a:tcPr marT="25400" marB="25400"/>
-                </a:tc>
-                <a:extLst>
-                  <a:ext uri="{0D108BD9-81ED-4DB2-BD59-A6C34878D82A}">
-                    <a16:rowId xmlns:a16="http://schemas.microsoft.com/office/drawing/2014/main" val="3735979105"/>
-                  </a:ext>
-                </a:extLst>
-              </a:tr>
-              <a:tr h="304800">
-                <a:tc>
-                  <a:txBody>
-                    <a:bodyPr/>
-                    <a:lstStyle/>
-                    <a:p>
-                      <a:r>
-                        <a:rPr lang="en-US" sz="1600" b="0">
-                          <a:latin typeface="Calibri" panose="020F0502020204030204" pitchFamily="34" charset="0"/>
-                        </a:rPr>
-                        <a:t>IT120008</a:t>
-                      </a:r>
-                    </a:p>
-                  </a:txBody>
-                  <a:tcPr marT="25400" marB="25400"/>
-                </a:tc>
-                <a:tc>
-                  <a:txBody>
-                    <a:bodyPr/>
-                    <a:lstStyle/>
-                    <a:p>
-                      <a:r>
-                        <a:rPr lang="en-US" sz="1600" b="0">
-                          <a:latin typeface="Calibri" panose="020F0502020204030204" pitchFamily="34" charset="0"/>
-                        </a:rPr>
-                        <a:t>Taiwan</a:t>
-                      </a:r>
-                    </a:p>
-                  </a:txBody>
-                  <a:tcPr marT="25400" marB="25400"/>
-                </a:tc>
-                <a:tc>
-                  <a:txBody>
-                    <a:bodyPr/>
-                    <a:lstStyle/>
-                    <a:p>
-                      <a:r>
-                        <a:rPr lang="en-US" sz="1600" b="0">
-                          <a:latin typeface="Calibri" panose="020F0502020204030204" pitchFamily="34" charset="0"/>
-                        </a:rPr>
-                        <a:t>27.16</a:t>
-                      </a:r>
-                    </a:p>
-                  </a:txBody>
-                  <a:tcPr marT="25400" marB="25400"/>
-                </a:tc>
-                <a:extLst>
-                  <a:ext uri="{0D108BD9-81ED-4DB2-BD59-A6C34878D82A}">
-                    <a16:rowId xmlns:a16="http://schemas.microsoft.com/office/drawing/2014/main" val="188483433"/>
-                  </a:ext>
-                </a:extLst>
-              </a:tr>
-              <a:tr h="304800">
-                <a:tc>
-                  <a:txBody>
-                    <a:bodyPr/>
-                    <a:lstStyle/>
-                    <a:p>
-                      <a:r>
-                        <a:rPr lang="en-US" sz="1600" b="0">
-                          <a:latin typeface="Calibri" panose="020F0502020204030204" pitchFamily="34" charset="0"/>
-                        </a:rPr>
-                        <a:t>IT199814</a:t>
-                      </a:r>
-                    </a:p>
-                  </a:txBody>
-                  <a:tcPr marT="25400" marB="25400"/>
-                </a:tc>
-                <a:tc>
-                  <a:txBody>
-                    <a:bodyPr/>
-                    <a:lstStyle/>
-                    <a:p>
-                      <a:r>
-                        <a:rPr lang="en-US" sz="1600" b="0">
-                          <a:latin typeface="Calibri" panose="020F0502020204030204" pitchFamily="34" charset="0"/>
-                        </a:rPr>
-                        <a:t>Kazakhstan</a:t>
-                      </a:r>
-                    </a:p>
-                  </a:txBody>
-                  <a:tcPr marT="25400" marB="25400"/>
-                </a:tc>
-                <a:tc>
-                  <a:txBody>
-                    <a:bodyPr/>
-                    <a:lstStyle/>
-                    <a:p>
-                      <a:r>
-                        <a:rPr lang="en-US" sz="1600" b="0">
-                          <a:latin typeface="Calibri" panose="020F0502020204030204" pitchFamily="34" charset="0"/>
-                        </a:rPr>
-                        <a:t>25.83</a:t>
-                      </a:r>
-                    </a:p>
-                  </a:txBody>
-                  <a:tcPr marT="25400" marB="25400"/>
-                </a:tc>
-                <a:extLst>
-                  <a:ext uri="{0D108BD9-81ED-4DB2-BD59-A6C34878D82A}">
-                    <a16:rowId xmlns:a16="http://schemas.microsoft.com/office/drawing/2014/main" val="1214692265"/>
-                  </a:ext>
-                </a:extLst>
-              </a:tr>
-              <a:tr h="304800">
-                <a:tc>
-                  <a:txBody>
-                    <a:bodyPr/>
-                    <a:lstStyle/>
-                    <a:p>
-                      <a:r>
-                        <a:rPr lang="en-US" sz="1600" b="0">
-                          <a:latin typeface="Calibri" panose="020F0502020204030204" pitchFamily="34" charset="0"/>
-                        </a:rPr>
-                        <a:t>IT203017</a:t>
-                      </a:r>
-                    </a:p>
-                  </a:txBody>
-                  <a:tcPr marT="25400" marB="25400"/>
-                </a:tc>
-                <a:tc>
-                  <a:txBody>
-                    <a:bodyPr/>
-                    <a:lstStyle/>
-                    <a:p>
-                      <a:r>
-                        <a:rPr lang="en-US" sz="1600" b="0">
-                          <a:latin typeface="Calibri" panose="020F0502020204030204" pitchFamily="34" charset="0"/>
-                        </a:rPr>
-                        <a:t>Russia</a:t>
-                      </a:r>
-                    </a:p>
-                  </a:txBody>
-                  <a:tcPr marT="25400" marB="25400"/>
-                </a:tc>
-                <a:tc>
-                  <a:txBody>
-                    <a:bodyPr/>
-                    <a:lstStyle/>
-                    <a:p>
-                      <a:r>
-                        <a:rPr lang="en-US" sz="1600" b="0">
-                          <a:latin typeface="Calibri" panose="020F0502020204030204" pitchFamily="34" charset="0"/>
-                        </a:rPr>
-                        <a:t>26.38</a:t>
-                      </a:r>
-                    </a:p>
-                  </a:txBody>
-                  <a:tcPr marT="25400" marB="25400"/>
-                </a:tc>
-                <a:extLst>
-                  <a:ext uri="{0D108BD9-81ED-4DB2-BD59-A6C34878D82A}">
-                    <a16:rowId xmlns:a16="http://schemas.microsoft.com/office/drawing/2014/main" val="2893545131"/>
-                  </a:ext>
-                </a:extLst>
-              </a:tr>
-              <a:tr h="304800">
-                <a:tc>
-                  <a:txBody>
-                    <a:bodyPr/>
-                    <a:lstStyle/>
-                    <a:p>
-                      <a:r>
-                        <a:rPr lang="en-US" sz="1600" b="0">
-                          <a:latin typeface="Calibri" panose="020F0502020204030204" pitchFamily="34" charset="0"/>
-                        </a:rPr>
-                        <a:t>IT203029</a:t>
-                      </a:r>
-                    </a:p>
-                  </a:txBody>
-                  <a:tcPr marT="25400" marB="25400"/>
-                </a:tc>
-                <a:tc>
-                  <a:txBody>
-                    <a:bodyPr/>
-                    <a:lstStyle/>
-                    <a:p>
-                      <a:r>
-                        <a:rPr lang="en-US" sz="1600" b="0">
-                          <a:latin typeface="Calibri" panose="020F0502020204030204" pitchFamily="34" charset="0"/>
-                        </a:rPr>
-                        <a:t>Kazakhstan</a:t>
-                      </a:r>
-                    </a:p>
-                  </a:txBody>
-                  <a:tcPr marT="25400" marB="25400"/>
-                </a:tc>
-                <a:tc>
-                  <a:txBody>
-                    <a:bodyPr/>
-                    <a:lstStyle/>
-                    <a:p>
-                      <a:r>
-                        <a:rPr lang="en-US" sz="1600" b="0">
-                          <a:latin typeface="Calibri" panose="020F0502020204030204" pitchFamily="34" charset="0"/>
-                        </a:rPr>
-                        <a:t>24.01</a:t>
-                      </a:r>
-                    </a:p>
-                  </a:txBody>
-                  <a:tcPr marT="25400" marB="25400"/>
-                </a:tc>
-                <a:extLst>
-                  <a:ext uri="{0D108BD9-81ED-4DB2-BD59-A6C34878D82A}">
-                    <a16:rowId xmlns:a16="http://schemas.microsoft.com/office/drawing/2014/main" val="3525875763"/>
-                  </a:ext>
-                </a:extLst>
-              </a:tr>
-              <a:tr h="304800">
-                <a:tc>
-                  <a:txBody>
-                    <a:bodyPr/>
-                    <a:lstStyle/>
-                    <a:p>
-                      <a:r>
-                        <a:rPr lang="en-US" sz="1600" b="0">
-                          <a:latin typeface="Calibri" panose="020F0502020204030204" pitchFamily="34" charset="0"/>
-                        </a:rPr>
-                        <a:t>IT203627</a:t>
-                      </a:r>
-                    </a:p>
-                  </a:txBody>
-                  <a:tcPr marT="25400" marB="25400"/>
-                </a:tc>
-                <a:tc>
-                  <a:txBody>
-                    <a:bodyPr/>
-                    <a:lstStyle/>
-                    <a:p>
-                      <a:r>
-                        <a:rPr lang="en-US" sz="1600" b="0">
-                          <a:latin typeface="Calibri" panose="020F0502020204030204" pitchFamily="34" charset="0"/>
-                        </a:rPr>
-                        <a:t>unknown</a:t>
-                      </a:r>
-                    </a:p>
-                  </a:txBody>
-                  <a:tcPr marT="25400" marB="25400"/>
-                </a:tc>
-                <a:tc>
-                  <a:txBody>
-                    <a:bodyPr/>
-                    <a:lstStyle/>
-                    <a:p>
-                      <a:r>
-                        <a:rPr lang="en-US" sz="1600" b="0">
-                          <a:latin typeface="Calibri" panose="020F0502020204030204" pitchFamily="34" charset="0"/>
-                        </a:rPr>
-                        <a:t>32.79</a:t>
-                      </a:r>
-                    </a:p>
-                  </a:txBody>
-                  <a:tcPr marT="25400" marB="25400"/>
-                </a:tc>
-                <a:extLst>
-                  <a:ext uri="{0D108BD9-81ED-4DB2-BD59-A6C34878D82A}">
-                    <a16:rowId xmlns:a16="http://schemas.microsoft.com/office/drawing/2014/main" val="3449720881"/>
-                  </a:ext>
-                </a:extLst>
-              </a:tr>
-              <a:tr h="304800">
-                <a:tc>
-                  <a:txBody>
-                    <a:bodyPr/>
-                    <a:lstStyle/>
-                    <a:p>
-                      <a:r>
-                        <a:rPr lang="en-US" sz="1600" b="0">
-                          <a:latin typeface="Calibri" panose="020F0502020204030204" pitchFamily="34" charset="0"/>
-                        </a:rPr>
-                        <a:t>…</a:t>
-                      </a:r>
-                    </a:p>
-                  </a:txBody>
-                  <a:tcPr marT="25400" marB="25400"/>
-                </a:tc>
-                <a:tc>
-                  <a:txBody>
-                    <a:bodyPr/>
-                    <a:lstStyle/>
-                    <a:p>
-                      <a:r>
-                        <a:rPr lang="en-US" sz="1600" b="0">
-                          <a:latin typeface="Calibri" panose="020F0502020204030204" pitchFamily="34" charset="0"/>
-                        </a:rPr>
-                        <a:t>…</a:t>
-                      </a:r>
-                    </a:p>
-                  </a:txBody>
-                  <a:tcPr marT="25400" marB="25400"/>
-                </a:tc>
-                <a:tc>
-                  <a:txBody>
-                    <a:bodyPr/>
-                    <a:lstStyle/>
-                    <a:p>
-                      <a:r>
-                        <a:rPr lang="en-US" sz="1600" b="0">
-                          <a:latin typeface="Calibri" panose="020F0502020204030204" pitchFamily="34" charset="0"/>
-                        </a:rPr>
-                        <a:t>…</a:t>
-                      </a:r>
-                    </a:p>
-                  </a:txBody>
-                  <a:tcPr marT="25400" marB="25400"/>
-                </a:tc>
-                <a:extLst>
-                  <a:ext uri="{0D108BD9-81ED-4DB2-BD59-A6C34878D82A}">
-                    <a16:rowId xmlns:a16="http://schemas.microsoft.com/office/drawing/2014/main" val="1881628810"/>
-                  </a:ext>
-                </a:extLst>
-              </a:tr>
-            </a:tbl>
-          </a:graphicData>
-        </a:graphic>
-      </p:graphicFrame>
-    </p:spTree>
-    <p:extLst>
-      <p:ext uri="{BB962C8B-B14F-4D97-AF65-F5344CB8AC3E}">
-        <p14:creationId xmlns:p14="http://schemas.microsoft.com/office/powerpoint/2010/main" val="2702707855"/>
-      </p:ext>
-    </p:extLst>
-  </p:cSld>
-  <p:clrMapOvr>
-    <a:masterClrMapping/>
-  </p:clrMapOvr>
-</p:sld>
-</file>
-
-<file path=ppt/slides/slide19.xml><?xml version="1.0" encoding="utf-8"?>
-<p:sld xmlns:a="http://schemas.openxmlformats.org/drawingml/2006/main" xmlns:r="http://schemas.openxmlformats.org/officeDocument/2006/relationships" xmlns:p="http://schemas.openxmlformats.org/presentationml/2006/main">
-  <p:cSld>
-    <p:spTree>
-      <p:nvGrpSpPr>
-        <p:cNvPr id="1" name=""/>
-        <p:cNvGrpSpPr/>
-        <p:nvPr/>
-      </p:nvGrpSpPr>
-      <p:grpSpPr>
-        <a:xfrm>
-          <a:off x="0" y="0"/>
-          <a:ext cx="0" cy="0"/>
-          <a:chOff x="0" y="0"/>
-          <a:chExt cx="0" cy="0"/>
-        </a:xfrm>
-      </p:grpSpPr>
-      <p:sp>
-        <p:nvSpPr>
-          <p:cNvPr id="2" name="Title 1">
-            <a:extLst>
-              <a:ext uri="{FF2B5EF4-FFF2-40B4-BE49-F238E27FC236}">
-                <a16:creationId xmlns:a16="http://schemas.microsoft.com/office/drawing/2014/main" id="{C08D30B1-1864-30EF-7EAB-9BEE656C0012}"/>
-              </a:ext>
-            </a:extLst>
-          </p:cNvPr>
-          <p:cNvSpPr>
-            <a:spLocks noGrp="1"/>
-          </p:cNvSpPr>
-          <p:nvPr>
-            <p:ph type="title"/>
-          </p:nvPr>
-        </p:nvSpPr>
-        <p:spPr/>
-        <p:txBody>
-          <a:bodyPr>
-            <a:noAutofit/>
-          </a:bodyPr>
-          <a:lstStyle/>
-          <a:p>
-            <a:r>
-              <a:rPr lang="en-US">
-                <a:solidFill>
-                  <a:srgbClr val="1F3864"/>
-                </a:solidFill>
-              </a:rPr>
-              <a:t>Example: citrulline, 90% and 99%</a:t>
-            </a:r>
-          </a:p>
-        </p:txBody>
-      </p:sp>
-      <p:sp>
-        <p:nvSpPr>
-          <p:cNvPr id="4" name="Slide Number Placeholder 3">
-            <a:extLst>
-              <a:ext uri="{FF2B5EF4-FFF2-40B4-BE49-F238E27FC236}">
-                <a16:creationId xmlns:a16="http://schemas.microsoft.com/office/drawing/2014/main" id="{3F875068-D051-44AE-498E-1BEBEDE3A7C8}"/>
-              </a:ext>
-            </a:extLst>
-          </p:cNvPr>
-          <p:cNvSpPr>
-            <a:spLocks noGrp="1"/>
-          </p:cNvSpPr>
-          <p:nvPr>
-            <p:ph type="sldNum" sz="quarter" idx="12"/>
-          </p:nvPr>
-        </p:nvSpPr>
-        <p:spPr/>
-        <p:txBody>
-          <a:bodyPr/>
-          <a:lstStyle/>
-          <a:p>
-            <a:fld id="{A80A81DD-F10A-4B1C-963A-0ABBB4865886}" type="slidenum">
-              <a:rPr lang="en-US" sz="1600" smtClean="0"/>
-              <a:t>19</a:t>
-            </a:fld>
-            <a:endParaRPr lang="en-US" sz="1600"/>
-          </a:p>
-        </p:txBody>
-      </p:sp>
-      <p:sp>
-        <p:nvSpPr>
-          <p:cNvPr id="3" name="Title rule">
-            <a:extLst>
-              <a:ext uri="{FF2B5EF4-FFF2-40B4-BE49-F238E27FC236}">
-                <a16:creationId xmlns:a16="http://schemas.microsoft.com/office/drawing/2014/main" id="{30656AA8-9645-F028-C769-A313710853CC}"/>
-              </a:ext>
-            </a:extLst>
-          </p:cNvPr>
-          <p:cNvSpPr/>
-          <p:nvPr/>
-        </p:nvSpPr>
-        <p:spPr>
-          <a:xfrm>
-            <a:off x="838200" y="1600200"/>
-            <a:ext cx="10515600" cy="38100"/>
-          </a:xfrm>
-          <a:prstGeom prst="rect">
-            <a:avLst/>
-          </a:prstGeom>
-          <a:solidFill>
-            <a:srgbClr val="4472C4"/>
-          </a:solidFill>
-          <a:ln w="12700" cap="flat" cmpd="sng" algn="ctr">
-            <a:noFill/>
-            <a:prstDash val="solid"/>
-            <a:miter lim="800000"/>
-          </a:ln>
-          <a:effectLst/>
-          <a:extLst>
-            <a:ext uri="{91240B29-F687-4F45-9708-019B960494DF}">
-              <a14:hiddenLine xmlns:a14="http://schemas.microsoft.com/office/drawing/2010/main" w="12700" cap="flat" cmpd="sng" algn="ctr">
-                <a:solidFill>
-                  <a:schemeClr val="accent1">
-                    <a:shade val="15000"/>
-                  </a:schemeClr>
-                </a:solidFill>
-                <a:prstDash val="solid"/>
-                <a:miter lim="800000"/>
-              </a14:hiddenLine>
-            </a:ext>
-          </a:extLst>
-        </p:spPr>
-        <p:style>
-          <a:lnRef idx="2">
-            <a:schemeClr val="accent1">
-              <a:shade val="15000"/>
-            </a:schemeClr>
-          </a:lnRef>
-          <a:fillRef idx="1">
-            <a:schemeClr val="accent1"/>
-          </a:fillRef>
-          <a:effectRef idx="0">
-            <a:schemeClr val="accent1"/>
-          </a:effectRef>
-          <a:fontRef idx="minor">
-            <a:schemeClr val="lt1"/>
-          </a:fontRef>
-        </p:style>
-        <p:txBody>
-          <a:bodyPr rtlCol="0" anchor="ctr"/>
-          <a:lstStyle/>
-          <a:p>
-            <a:pPr algn="ctr"/>
-            <a:endParaRPr lang="en-US"/>
-          </a:p>
-        </p:txBody>
-      </p:sp>
-      <p:sp>
-        <p:nvSpPr>
-          <p:cNvPr id="8" name="Context">
-            <a:extLst>
-              <a:ext uri="{FF2B5EF4-FFF2-40B4-BE49-F238E27FC236}">
-                <a16:creationId xmlns:a16="http://schemas.microsoft.com/office/drawing/2014/main" id="{71E3EA8C-31B4-DAD4-BC4A-65D72E59AD46}"/>
-              </a:ext>
-            </a:extLst>
-          </p:cNvPr>
-          <p:cNvSpPr txBox="1"/>
-          <p:nvPr/>
-        </p:nvSpPr>
-        <p:spPr>
-          <a:xfrm>
-            <a:off x="762000" y="1879600"/>
-            <a:ext cx="10668000" cy="381000"/>
-          </a:xfrm>
-          <a:prstGeom prst="rect">
-            <a:avLst/>
-          </a:prstGeom>
-          <a:noFill/>
-        </p:spPr>
-        <p:txBody>
-          <a:bodyPr vert="horz" wrap="square" rtlCol="0">
-            <a:spAutoFit/>
-          </a:bodyPr>
-          <a:lstStyle/>
-          <a:p>
-            <a:pPr>
-              <a:spcAft>
-                <a:spcPts val="200"/>
-              </a:spcAft>
-            </a:pPr>
-            <a:r>
-              <a:rPr lang="en-US">
-                <a:solidFill>
-                  <a:srgbClr val="000000"/>
-                </a:solidFill>
-                <a:latin typeface="Calibri" panose="020F0502020204030204" pitchFamily="34" charset="0"/>
-              </a:rPr>
-              <a:t>Estimate μ, the mean citrulline of all 100 gene-bank varieties, from the sample of 12.</a:t>
-            </a:r>
-          </a:p>
-        </p:txBody>
-      </p:sp>
-      <p:sp>
-        <p:nvSpPr>
-          <p:cNvPr id="9" name="Numbers">
-            <a:extLst>
-              <a:ext uri="{FF2B5EF4-FFF2-40B4-BE49-F238E27FC236}">
-                <a16:creationId xmlns:a16="http://schemas.microsoft.com/office/drawing/2014/main" id="{C419F151-05B2-3E4B-BAE8-BB1F06D9D1FD}"/>
-              </a:ext>
-            </a:extLst>
-          </p:cNvPr>
-          <p:cNvSpPr txBox="1"/>
-          <p:nvPr/>
-        </p:nvSpPr>
-        <p:spPr>
-          <a:xfrm>
-            <a:off x="762000" y="2286000"/>
-            <a:ext cx="10668000" cy="400110"/>
-          </a:xfrm>
-          <a:prstGeom prst="rect">
-            <a:avLst/>
-          </a:prstGeom>
-          <a:noFill/>
-        </p:spPr>
-        <p:txBody>
-          <a:bodyPr vert="horz" wrap="square" rtlCol="0">
-            <a:spAutoFit/>
-          </a:bodyPr>
-          <a:lstStyle/>
-          <a:p>
-            <a:pPr>
-              <a:spcAft>
-                <a:spcPts val="200"/>
-              </a:spcAft>
-            </a:pPr>
-            <a:r>
-              <a:rPr lang="pt-BR" sz="2000" b="1">
-                <a:solidFill>
-                  <a:srgbClr val="000000"/>
-                </a:solidFill>
-                <a:latin typeface="Calibri" panose="020F0502020204030204" pitchFamily="34" charset="0"/>
-              </a:rPr>
-              <a:t>n = 12;     x̄ = 27.07 mg/g;     s = 5.27 mg/g</a:t>
-            </a:r>
-            <a:endParaRPr lang="en-US" sz="2000" b="1">
-              <a:solidFill>
-                <a:srgbClr val="000000"/>
-              </a:solidFill>
-              <a:latin typeface="Calibri" panose="020F0502020204030204" pitchFamily="34" charset="0"/>
-            </a:endParaRPr>
-          </a:p>
-        </p:txBody>
-      </p:sp>
-      <p:sp>
-        <p:nvSpPr>
-          <p:cNvPr id="10" name="Question">
-            <a:extLst>
-              <a:ext uri="{FF2B5EF4-FFF2-40B4-BE49-F238E27FC236}">
-                <a16:creationId xmlns:a16="http://schemas.microsoft.com/office/drawing/2014/main" id="{B31E395F-B84E-D1E9-D22A-222467FC4105}"/>
-              </a:ext>
-            </a:extLst>
-          </p:cNvPr>
-          <p:cNvSpPr txBox="1"/>
-          <p:nvPr/>
-        </p:nvSpPr>
-        <p:spPr>
-          <a:xfrm>
-            <a:off x="762000" y="2711510"/>
-            <a:ext cx="10668000" cy="974626"/>
-          </a:xfrm>
-          <a:prstGeom prst="rect">
-            <a:avLst/>
-          </a:prstGeom>
-          <a:noFill/>
-        </p:spPr>
-        <p:txBody>
-          <a:bodyPr vert="horz" wrap="square" rtlCol="0">
-            <a:spAutoFit/>
-          </a:bodyPr>
-          <a:lstStyle/>
-          <a:p>
-            <a:pPr>
-              <a:spcAft>
-                <a:spcPts val="200"/>
-              </a:spcAft>
-            </a:pPr>
-            <a:r>
-              <a:rPr lang="en-US" b="1">
-                <a:solidFill>
-                  <a:srgbClr val="C00000"/>
-                </a:solidFill>
-                <a:latin typeface="Calibri" panose="020F0502020204030204" pitchFamily="34" charset="0"/>
-              </a:rPr>
-              <a:t>(a)  What are the degrees of freedom and the standard error?</a:t>
-            </a:r>
-          </a:p>
-          <a:p>
-            <a:pPr>
-              <a:spcAft>
-                <a:spcPts val="200"/>
-              </a:spcAft>
-            </a:pPr>
-            <a:r>
-              <a:rPr lang="en-US" b="1">
-                <a:solidFill>
-                  <a:srgbClr val="C00000"/>
-                </a:solidFill>
-                <a:latin typeface="Calibri" panose="020F0502020204030204" pitchFamily="34" charset="0"/>
-              </a:rPr>
-              <a:t>(b)  What are the 90% and 99% confidence intervals for μ?</a:t>
-            </a:r>
-          </a:p>
-          <a:p>
-            <a:pPr>
-              <a:spcAft>
-                <a:spcPts val="200"/>
-              </a:spcAft>
-            </a:pPr>
-            <a:r>
-              <a:rPr lang="en-US" b="1">
-                <a:solidFill>
-                  <a:srgbClr val="C00000"/>
-                </a:solidFill>
-                <a:latin typeface="Calibri" panose="020F0502020204030204" pitchFamily="34" charset="0"/>
-              </a:rPr>
-              <a:t>(c)  Which is wider, and why?</a:t>
-            </a:r>
-          </a:p>
-        </p:txBody>
-      </p:sp>
-      <p:sp>
-        <p:nvSpPr>
-          <p:cNvPr id="11" name="Result">
-            <a:extLst>
-              <a:ext uri="{FF2B5EF4-FFF2-40B4-BE49-F238E27FC236}">
-                <a16:creationId xmlns:a16="http://schemas.microsoft.com/office/drawing/2014/main" id="{5A70F68E-0D93-07B8-82B2-4D8F2F681D0D}"/>
-              </a:ext>
-            </a:extLst>
-          </p:cNvPr>
-          <p:cNvSpPr/>
-          <p:nvPr/>
-        </p:nvSpPr>
-        <p:spPr>
-          <a:xfrm>
-            <a:off x="762000" y="3838536"/>
-            <a:ext cx="10668000" cy="1411784"/>
-          </a:xfrm>
-          <a:prstGeom prst="roundRect">
-            <a:avLst>
-              <a:gd name="adj" fmla="val 4000"/>
-            </a:avLst>
-          </a:prstGeom>
-          <a:solidFill>
-            <a:srgbClr val="F2F6FC"/>
-          </a:solidFill>
-          <a:ln w="15875">
-            <a:solidFill>
-              <a:srgbClr val="4472C4"/>
-            </a:solidFill>
-          </a:ln>
-        </p:spPr>
-        <p:style>
-          <a:lnRef idx="2">
-            <a:schemeClr val="accent1">
-              <a:shade val="15000"/>
-            </a:schemeClr>
-          </a:lnRef>
-          <a:fillRef idx="1">
-            <a:schemeClr val="accent1"/>
-          </a:fillRef>
-          <a:effectRef idx="0">
-            <a:schemeClr val="accent1"/>
-          </a:effectRef>
-          <a:fontRef idx="minor">
-            <a:schemeClr val="lt1"/>
-          </a:fontRef>
-        </p:style>
-        <p:txBody>
-          <a:bodyPr wrap="square" lIns="152400" tIns="76200" rIns="152400" bIns="76200" rtlCol="0" anchor="ctr">
-            <a:spAutoFit/>
-          </a:bodyPr>
-          <a:lstStyle/>
-          <a:p>
-            <a:r>
-              <a:rPr lang="en-US" sz="2000" b="1">
-                <a:solidFill>
-                  <a:srgbClr val="C00000"/>
-                </a:solidFill>
-                <a:latin typeface="Calibri" panose="020F0502020204030204" pitchFamily="34" charset="0"/>
-              </a:rPr>
-              <a:t>(a)  df = 11;    SE = 5.27 / √12 ≈ 1.52</a:t>
-            </a:r>
-          </a:p>
-          <a:p>
-            <a:r>
-              <a:rPr lang="en-US" sz="2000" b="1">
-                <a:solidFill>
-                  <a:srgbClr val="C00000"/>
-                </a:solidFill>
-                <a:latin typeface="Calibri" panose="020F0502020204030204" pitchFamily="34" charset="0"/>
-              </a:rPr>
-              <a:t>(b)  90%:  27.07 ± 1.796(1.52):  24.34 to 29.80</a:t>
-            </a:r>
-          </a:p>
-          <a:p>
-            <a:r>
-              <a:rPr lang="en-US" sz="2000" b="1">
-                <a:solidFill>
-                  <a:srgbClr val="C00000"/>
-                </a:solidFill>
-                <a:latin typeface="Calibri" panose="020F0502020204030204" pitchFamily="34" charset="0"/>
-              </a:rPr>
-              <a:t>       99%:  27.07 ± 3.106(1.52):  22.35 to 31.79</a:t>
-            </a:r>
-          </a:p>
-          <a:p>
-            <a:r>
-              <a:rPr lang="en-US" sz="2000" b="1">
-                <a:solidFill>
-                  <a:srgbClr val="C00000"/>
-                </a:solidFill>
-                <a:latin typeface="Calibri" panose="020F0502020204030204" pitchFamily="34" charset="0"/>
-              </a:rPr>
-              <a:t>(c)  The 99% interval:  more confidence needs a larger t</a:t>
-            </a:r>
-          </a:p>
-        </p:txBody>
-      </p:sp>
-    </p:spTree>
-    <p:extLst>
-      <p:ext uri="{BB962C8B-B14F-4D97-AF65-F5344CB8AC3E}">
-        <p14:creationId xmlns:p14="http://schemas.microsoft.com/office/powerpoint/2010/main" val="369073265"/>
-      </p:ext>
-    </p:extLst>
-  </p:cSld>
-  <p:clrMapOvr>
-    <a:masterClrMapping/>
-  </p:clrMapOvr>
-  <p:timing>
-    <p:tnLst>
-      <p:par>
-        <p:cTn id="1" dur="indefinite" restart="never" nodeType="tmRoot">
-          <p:childTnLst>
-            <p:seq concurrent="1" nextAc="seek">
-              <p:cTn id="2" dur="indefinite" nodeType="mainSeq">
-                <p:childTnLst>
-                  <p:par>
-                    <p:cTn id="3" fill="hold">
-                      <p:stCondLst>
-                        <p:cond delay="indefinite"/>
-                      </p:stCondLst>
-                      <p:childTnLst>
-                        <p:par>
-                          <p:cTn id="4" fill="hold">
-                            <p:stCondLst>
-                              <p:cond delay="0"/>
-                            </p:stCondLst>
-                            <p:childTnLst>
-                              <p:par>
-                                <p:cTn id="5" presetID="1" presetClass="entr" presetSubtype="0" fill="hold" grpId="0" nodeType="clickEffect">
-                                  <p:stCondLst>
-                                    <p:cond delay="0"/>
-                                  </p:stCondLst>
-                                  <p:childTnLst>
-                                    <p:set>
-                                      <p:cBhvr>
-                                        <p:cTn id="6" dur="1" fill="hold">
-                                          <p:stCondLst>
-                                            <p:cond delay="0"/>
-                                          </p:stCondLst>
-                                        </p:cTn>
-                                        <p:tgtEl>
-                                          <p:spTgt spid="11"/>
-                                        </p:tgtEl>
-                                        <p:attrNameLst>
-                                          <p:attrName>style.visibility</p:attrName>
-                                        </p:attrNameLst>
-                                      </p:cBhvr>
-                                      <p:to>
-                                        <p:strVal val="visible"/>
-                                      </p:to>
-                                    </p:set>
-                                  </p:childTnLst>
-                                </p:cTn>
-                              </p:par>
-                            </p:childTnLst>
-                          </p:cTn>
-                        </p:par>
-                      </p:childTnLst>
-                    </p:cTn>
-                  </p:par>
-                </p:childTnLst>
-              </p:cTn>
-              <p:prevCondLst>
-                <p:cond evt="onPrev" delay="0">
-                  <p:tgtEl>
-                    <p:sldTgt/>
-                  </p:tgtEl>
-                </p:cond>
-              </p:prevCondLst>
-              <p:nextCondLst>
-                <p:cond evt="onNext" delay="0">
-                  <p:tgtEl>
-                    <p:sldTgt/>
-                  </p:tgtEl>
-                </p:cond>
-              </p:nextCondLst>
-            </p:seq>
-          </p:childTnLst>
-        </p:cTn>
-      </p:par>
-    </p:tnLst>
-    <p:bldLst>
-      <p:bldP spid="11" grpId="0" animBg="1"/>
-    </p:bldLst>
-  </p:timing>
 </p:sld>
 </file>
 
@@ -10171,951 +4072,6 @@
         </p:cTn>
       </p:par>
     </p:tnLst>
-  </p:timing>
-</p:sld>
-</file>
-
-<file path=ppt/slides/slide20.xml><?xml version="1.0" encoding="utf-8"?>
-<p:sld xmlns:a="http://schemas.openxmlformats.org/drawingml/2006/main" xmlns:r="http://schemas.openxmlformats.org/officeDocument/2006/relationships" xmlns:p="http://schemas.openxmlformats.org/presentationml/2006/main">
-  <p:cSld>
-    <p:spTree>
-      <p:nvGrpSpPr>
-        <p:cNvPr id="1" name=""/>
-        <p:cNvGrpSpPr/>
-        <p:nvPr/>
-      </p:nvGrpSpPr>
-      <p:grpSpPr>
-        <a:xfrm>
-          <a:off x="0" y="0"/>
-          <a:ext cx="0" cy="0"/>
-          <a:chOff x="0" y="0"/>
-          <a:chExt cx="0" cy="0"/>
-        </a:xfrm>
-      </p:grpSpPr>
-      <p:sp>
-        <p:nvSpPr>
-          <p:cNvPr id="2" name="Title 1">
-            <a:extLst>
-              <a:ext uri="{FF2B5EF4-FFF2-40B4-BE49-F238E27FC236}">
-                <a16:creationId xmlns:a16="http://schemas.microsoft.com/office/drawing/2014/main" id="{D617AB41-6AD1-9EF2-7F95-46A904399681}"/>
-              </a:ext>
-            </a:extLst>
-          </p:cNvPr>
-          <p:cNvSpPr>
-            <a:spLocks noGrp="1"/>
-          </p:cNvSpPr>
-          <p:nvPr>
-            <p:ph type="title"/>
-          </p:nvPr>
-        </p:nvSpPr>
-        <p:spPr/>
-        <p:txBody>
-          <a:bodyPr>
-            <a:noAutofit/>
-          </a:bodyPr>
-          <a:lstStyle/>
-          <a:p>
-            <a:r>
-              <a:rPr lang="en-US">
-                <a:solidFill>
-                  <a:srgbClr val="1F3864"/>
-                </a:solidFill>
-              </a:rPr>
-              <a:t>What you should know</a:t>
-            </a:r>
-          </a:p>
-        </p:txBody>
-      </p:sp>
-      <p:sp>
-        <p:nvSpPr>
-          <p:cNvPr id="4" name="Slide Number Placeholder 3">
-            <a:extLst>
-              <a:ext uri="{FF2B5EF4-FFF2-40B4-BE49-F238E27FC236}">
-                <a16:creationId xmlns:a16="http://schemas.microsoft.com/office/drawing/2014/main" id="{97D44AE5-98B5-B840-6B8A-D345C7C2E2F0}"/>
-              </a:ext>
-            </a:extLst>
-          </p:cNvPr>
-          <p:cNvSpPr>
-            <a:spLocks noGrp="1"/>
-          </p:cNvSpPr>
-          <p:nvPr>
-            <p:ph type="sldNum" sz="quarter" idx="12"/>
-          </p:nvPr>
-        </p:nvSpPr>
-        <p:spPr/>
-        <p:txBody>
-          <a:bodyPr/>
-          <a:lstStyle/>
-          <a:p>
-            <a:fld id="{A80A81DD-F10A-4B1C-963A-0ABBB4865886}" type="slidenum">
-              <a:rPr lang="en-US" sz="1600" smtClean="0"/>
-              <a:t>20</a:t>
-            </a:fld>
-            <a:endParaRPr lang="en-US" sz="1600"/>
-          </a:p>
-        </p:txBody>
-      </p:sp>
-      <p:sp>
-        <p:nvSpPr>
-          <p:cNvPr id="5" name="TextBox 4">
-            <a:extLst>
-              <a:ext uri="{FF2B5EF4-FFF2-40B4-BE49-F238E27FC236}">
-                <a16:creationId xmlns:a16="http://schemas.microsoft.com/office/drawing/2014/main" id="{A34AAE17-27CE-D7A3-C663-11BB48ACBF5B}"/>
-              </a:ext>
-            </a:extLst>
-          </p:cNvPr>
-          <p:cNvSpPr txBox="1"/>
-          <p:nvPr/>
-        </p:nvSpPr>
-        <p:spPr>
-          <a:xfrm>
-            <a:off x="762000" y="1879600"/>
-            <a:ext cx="10668000" cy="345440"/>
-          </a:xfrm>
-          <a:prstGeom prst="rect">
-            <a:avLst/>
-          </a:prstGeom>
-          <a:noFill/>
-        </p:spPr>
-        <p:txBody>
-          <a:bodyPr vert="horz" wrap="square" rtlCol="0">
-            <a:spAutoFit/>
-          </a:bodyPr>
-          <a:lstStyle/>
-          <a:p>
-            <a:pPr marL="304800" indent="-304800"/>
-            <a:r>
-              <a:rPr lang="en-US" sz="1600">
-                <a:solidFill>
-                  <a:srgbClr val="000000"/>
-                </a:solidFill>
-              </a:rPr>
-              <a:t>confidence level</a:t>
-            </a:r>
-          </a:p>
-        </p:txBody>
-      </p:sp>
-      <p:sp>
-        <p:nvSpPr>
-          <p:cNvPr id="6" name="TextBox 5">
-            <a:extLst>
-              <a:ext uri="{FF2B5EF4-FFF2-40B4-BE49-F238E27FC236}">
-                <a16:creationId xmlns:a16="http://schemas.microsoft.com/office/drawing/2014/main" id="{E410A0F8-5E1E-9A1D-B64C-50827EE6C9B2}"/>
-              </a:ext>
-            </a:extLst>
-          </p:cNvPr>
-          <p:cNvSpPr txBox="1"/>
-          <p:nvPr/>
-        </p:nvSpPr>
-        <p:spPr>
-          <a:xfrm>
-            <a:off x="1117600" y="2225040"/>
-            <a:ext cx="10312400" cy="338554"/>
-          </a:xfrm>
-          <a:prstGeom prst="rect">
-            <a:avLst/>
-          </a:prstGeom>
-          <a:noFill/>
-        </p:spPr>
-        <p:txBody>
-          <a:bodyPr vert="horz" wrap="square" rtlCol="0">
-            <a:spAutoFit/>
-          </a:bodyPr>
-          <a:lstStyle/>
-          <a:p>
-            <a:r>
-              <a:rPr lang="en-US" sz="1600" b="1">
-                <a:solidFill>
-                  <a:srgbClr val="C00000"/>
-                </a:solidFill>
-              </a:rPr>
-              <a:t>C = 1 − α;  α/2 is left in each tail</a:t>
-            </a:r>
-          </a:p>
-        </p:txBody>
-      </p:sp>
-      <p:sp>
-        <p:nvSpPr>
-          <p:cNvPr id="7" name="TextBox 6">
-            <a:extLst>
-              <a:ext uri="{FF2B5EF4-FFF2-40B4-BE49-F238E27FC236}">
-                <a16:creationId xmlns:a16="http://schemas.microsoft.com/office/drawing/2014/main" id="{47D3CD95-D52E-5227-B663-7C0A72677B6E}"/>
-              </a:ext>
-            </a:extLst>
-          </p:cNvPr>
-          <p:cNvSpPr txBox="1"/>
-          <p:nvPr/>
-        </p:nvSpPr>
-        <p:spPr>
-          <a:xfrm>
-            <a:off x="762000" y="2741394"/>
-            <a:ext cx="10668000" cy="345440"/>
-          </a:xfrm>
-          <a:prstGeom prst="rect">
-            <a:avLst/>
-          </a:prstGeom>
-          <a:noFill/>
-        </p:spPr>
-        <p:txBody>
-          <a:bodyPr vert="horz" wrap="square" rtlCol="0">
-            <a:spAutoFit/>
-          </a:bodyPr>
-          <a:lstStyle/>
-          <a:p>
-            <a:pPr marL="304800" indent="-304800"/>
-            <a:r>
-              <a:rPr lang="en-US" sz="1600">
-                <a:solidFill>
-                  <a:srgbClr val="000000"/>
-                </a:solidFill>
-              </a:rPr>
-              <a:t>critical value z</a:t>
-            </a:r>
-            <a:r>
-              <a:rPr lang="en-US" sz="1600" baseline="-25000">
-                <a:solidFill>
-                  <a:srgbClr val="000000"/>
-                </a:solidFill>
-              </a:rPr>
-              <a:t>1−α/2</a:t>
-            </a:r>
-          </a:p>
-        </p:txBody>
-      </p:sp>
-      <p:sp>
-        <p:nvSpPr>
-          <p:cNvPr id="8" name="TextBox 7">
-            <a:extLst>
-              <a:ext uri="{FF2B5EF4-FFF2-40B4-BE49-F238E27FC236}">
-                <a16:creationId xmlns:a16="http://schemas.microsoft.com/office/drawing/2014/main" id="{1CE3E601-601D-C6B1-8265-C079CB8C9269}"/>
-              </a:ext>
-            </a:extLst>
-          </p:cNvPr>
-          <p:cNvSpPr txBox="1"/>
-          <p:nvPr/>
-        </p:nvSpPr>
-        <p:spPr>
-          <a:xfrm>
-            <a:off x="1117600" y="3086834"/>
-            <a:ext cx="10312400" cy="338554"/>
-          </a:xfrm>
-          <a:prstGeom prst="rect">
-            <a:avLst/>
-          </a:prstGeom>
-          <a:noFill/>
-        </p:spPr>
-        <p:txBody>
-          <a:bodyPr vert="horz" wrap="square" rtlCol="0">
-            <a:spAutoFit/>
-          </a:bodyPr>
-          <a:lstStyle/>
-          <a:p>
-            <a:r>
-              <a:rPr lang="en-US" sz="1600" b="1">
-                <a:solidFill>
-                  <a:srgbClr val="C00000"/>
-                </a:solidFill>
-              </a:rPr>
-              <a:t>area 1 − α/2 to its left:  1.645, 1.960, 2.576 for 90%, 95%, 99%</a:t>
-            </a:r>
-          </a:p>
-        </p:txBody>
-      </p:sp>
-      <p:sp>
-        <p:nvSpPr>
-          <p:cNvPr id="9" name="TextBox 8">
-            <a:extLst>
-              <a:ext uri="{FF2B5EF4-FFF2-40B4-BE49-F238E27FC236}">
-                <a16:creationId xmlns:a16="http://schemas.microsoft.com/office/drawing/2014/main" id="{FB002BF4-8037-2F73-E27A-7A453477E389}"/>
-              </a:ext>
-            </a:extLst>
-          </p:cNvPr>
-          <p:cNvSpPr txBox="1"/>
-          <p:nvPr/>
-        </p:nvSpPr>
-        <p:spPr>
-          <a:xfrm>
-            <a:off x="762000" y="3603188"/>
-            <a:ext cx="10668000" cy="345440"/>
-          </a:xfrm>
-          <a:prstGeom prst="rect">
-            <a:avLst/>
-          </a:prstGeom>
-          <a:noFill/>
-        </p:spPr>
-        <p:txBody>
-          <a:bodyPr vert="horz" wrap="square" rtlCol="0">
-            <a:spAutoFit/>
-          </a:bodyPr>
-          <a:lstStyle/>
-          <a:p>
-            <a:pPr marL="304800" indent="-304800"/>
-            <a:r>
-              <a:rPr lang="el-GR" sz="1600">
-                <a:solidFill>
-                  <a:srgbClr val="000000"/>
-                </a:solidFill>
-              </a:rPr>
-              <a:t>σ </a:t>
-            </a:r>
-            <a:r>
-              <a:rPr lang="en-US" sz="1600">
-                <a:solidFill>
-                  <a:srgbClr val="000000"/>
-                </a:solidFill>
-              </a:rPr>
-              <a:t>unknown</a:t>
-            </a:r>
-          </a:p>
-        </p:txBody>
-      </p:sp>
-      <p:sp>
-        <p:nvSpPr>
-          <p:cNvPr id="10" name="TextBox 9">
-            <a:extLst>
-              <a:ext uri="{FF2B5EF4-FFF2-40B4-BE49-F238E27FC236}">
-                <a16:creationId xmlns:a16="http://schemas.microsoft.com/office/drawing/2014/main" id="{10F3B3E3-D27C-E008-C93E-ED70BD2A4754}"/>
-              </a:ext>
-            </a:extLst>
-          </p:cNvPr>
-          <p:cNvSpPr txBox="1"/>
-          <p:nvPr/>
-        </p:nvSpPr>
-        <p:spPr>
-          <a:xfrm>
-            <a:off x="1117600" y="3948628"/>
-            <a:ext cx="10312400" cy="338554"/>
-          </a:xfrm>
-          <a:prstGeom prst="rect">
-            <a:avLst/>
-          </a:prstGeom>
-          <a:noFill/>
-        </p:spPr>
-        <p:txBody>
-          <a:bodyPr vert="horz" wrap="square" rtlCol="0">
-            <a:spAutoFit/>
-          </a:bodyPr>
-          <a:lstStyle/>
-          <a:p>
-            <a:r>
-              <a:rPr lang="en-US" sz="1600" b="1">
-                <a:solidFill>
-                  <a:srgbClr val="C00000"/>
-                </a:solidFill>
-              </a:rPr>
-              <a:t>use s and t with df = n − 1:   x̄ ± t s / √n</a:t>
-            </a:r>
-          </a:p>
-        </p:txBody>
-      </p:sp>
-      <p:sp>
-        <p:nvSpPr>
-          <p:cNvPr id="3" name="Title rule">
-            <a:extLst>
-              <a:ext uri="{FF2B5EF4-FFF2-40B4-BE49-F238E27FC236}">
-                <a16:creationId xmlns:a16="http://schemas.microsoft.com/office/drawing/2014/main" id="{B469CAAB-2B69-6863-7C28-0C5959E5734B}"/>
-              </a:ext>
-            </a:extLst>
-          </p:cNvPr>
-          <p:cNvSpPr/>
-          <p:nvPr/>
-        </p:nvSpPr>
-        <p:spPr>
-          <a:xfrm>
-            <a:off x="838200" y="1600200"/>
-            <a:ext cx="10515600" cy="38100"/>
-          </a:xfrm>
-          <a:prstGeom prst="rect">
-            <a:avLst/>
-          </a:prstGeom>
-          <a:solidFill>
-            <a:srgbClr val="4472C4"/>
-          </a:solidFill>
-          <a:ln w="12700" cap="flat" cmpd="sng" algn="ctr">
-            <a:noFill/>
-            <a:prstDash val="solid"/>
-            <a:miter lim="800000"/>
-          </a:ln>
-          <a:effectLst/>
-          <a:extLst>
-            <a:ext uri="{91240B29-F687-4F45-9708-019B960494DF}">
-              <a14:hiddenLine xmlns:a14="http://schemas.microsoft.com/office/drawing/2010/main" w="12700" cap="flat" cmpd="sng" algn="ctr">
-                <a:solidFill>
-                  <a:schemeClr val="accent1">
-                    <a:shade val="15000"/>
-                  </a:schemeClr>
-                </a:solidFill>
-                <a:prstDash val="solid"/>
-                <a:miter lim="800000"/>
-              </a14:hiddenLine>
-            </a:ext>
-          </a:extLst>
-        </p:spPr>
-        <p:style>
-          <a:lnRef idx="2">
-            <a:schemeClr val="accent1">
-              <a:shade val="15000"/>
-            </a:schemeClr>
-          </a:lnRef>
-          <a:fillRef idx="1">
-            <a:schemeClr val="accent1"/>
-          </a:fillRef>
-          <a:effectRef idx="0">
-            <a:schemeClr val="accent1"/>
-          </a:effectRef>
-          <a:fontRef idx="minor">
-            <a:schemeClr val="lt1"/>
-          </a:fontRef>
-        </p:style>
-        <p:txBody>
-          <a:bodyPr rtlCol="0" anchor="ctr"/>
-          <a:lstStyle/>
-          <a:p>
-            <a:pPr algn="ctr"/>
-            <a:endParaRPr lang="en-US"/>
-          </a:p>
-        </p:txBody>
-      </p:sp>
-      <p:sp>
-        <p:nvSpPr>
-          <p:cNvPr id="11" name="TextBox 10">
-            <a:extLst>
-              <a:ext uri="{FF2B5EF4-FFF2-40B4-BE49-F238E27FC236}">
-                <a16:creationId xmlns:a16="http://schemas.microsoft.com/office/drawing/2014/main" id="{7E252B31-0A80-8297-9AB5-9AED735ACDE2}"/>
-              </a:ext>
-            </a:extLst>
-          </p:cNvPr>
-          <p:cNvSpPr txBox="1"/>
-          <p:nvPr/>
-        </p:nvSpPr>
-        <p:spPr>
-          <a:xfrm>
-            <a:off x="762000" y="4464982"/>
-            <a:ext cx="10668000" cy="345440"/>
-          </a:xfrm>
-          <a:prstGeom prst="rect">
-            <a:avLst/>
-          </a:prstGeom>
-          <a:noFill/>
-        </p:spPr>
-        <p:txBody>
-          <a:bodyPr vert="horz" wrap="square" rtlCol="0">
-            <a:spAutoFit/>
-          </a:bodyPr>
-          <a:lstStyle/>
-          <a:p>
-            <a:pPr marL="304800" indent="-304800"/>
-            <a:r>
-              <a:rPr lang="en-US" sz="1600">
-                <a:solidFill>
-                  <a:srgbClr val="000000"/>
-                </a:solidFill>
-              </a:rPr>
-              <a:t>width</a:t>
-            </a:r>
-          </a:p>
-        </p:txBody>
-      </p:sp>
-      <p:sp>
-        <p:nvSpPr>
-          <p:cNvPr id="12" name="TextBox 11">
-            <a:extLst>
-              <a:ext uri="{FF2B5EF4-FFF2-40B4-BE49-F238E27FC236}">
-                <a16:creationId xmlns:a16="http://schemas.microsoft.com/office/drawing/2014/main" id="{A1980B2D-2D53-A814-88AF-46C2FDF3E298}"/>
-              </a:ext>
-            </a:extLst>
-          </p:cNvPr>
-          <p:cNvSpPr txBox="1"/>
-          <p:nvPr/>
-        </p:nvSpPr>
-        <p:spPr>
-          <a:xfrm>
-            <a:off x="1117600" y="4810422"/>
-            <a:ext cx="10312400" cy="338554"/>
-          </a:xfrm>
-          <a:prstGeom prst="rect">
-            <a:avLst/>
-          </a:prstGeom>
-          <a:noFill/>
-        </p:spPr>
-        <p:txBody>
-          <a:bodyPr vert="horz" wrap="square" rtlCol="0">
-            <a:spAutoFit/>
-          </a:bodyPr>
-          <a:lstStyle/>
-          <a:p>
-            <a:r>
-              <a:rPr lang="en-US" sz="1600" b="1">
-                <a:solidFill>
-                  <a:srgbClr val="C00000"/>
-                </a:solidFill>
-              </a:rPr>
-              <a:t>wider for higher confidence;  narrower for larger n</a:t>
-            </a:r>
-          </a:p>
-        </p:txBody>
-      </p:sp>
-    </p:spTree>
-    <p:extLst>
-      <p:ext uri="{BB962C8B-B14F-4D97-AF65-F5344CB8AC3E}">
-        <p14:creationId xmlns:p14="http://schemas.microsoft.com/office/powerpoint/2010/main" val="412465737"/>
-      </p:ext>
-    </p:extLst>
-  </p:cSld>
-  <p:clrMapOvr>
-    <a:masterClrMapping/>
-  </p:clrMapOvr>
-  <p:timing>
-    <p:tnLst>
-      <p:par>
-        <p:cTn id="1" dur="indefinite" restart="never" nodeType="tmRoot">
-          <p:childTnLst>
-            <p:seq concurrent="1" nextAc="seek">
-              <p:cTn id="2" dur="indefinite" nodeType="mainSeq">
-                <p:childTnLst>
-                  <p:par>
-                    <p:cTn id="3" fill="hold">
-                      <p:stCondLst>
-                        <p:cond delay="indefinite"/>
-                      </p:stCondLst>
-                      <p:childTnLst>
-                        <p:par>
-                          <p:cTn id="4" fill="hold">
-                            <p:stCondLst>
-                              <p:cond delay="0"/>
-                            </p:stCondLst>
-                            <p:childTnLst>
-                              <p:par>
-                                <p:cTn id="5" presetID="34" presetClass="entr" presetSubtype="0" fill="hold" grpId="0" nodeType="clickEffect">
-                                  <p:stCondLst>
-                                    <p:cond delay="0"/>
-                                  </p:stCondLst>
-                                  <p:childTnLst>
-                                    <p:set>
-                                      <p:cBhvr>
-                                        <p:cTn id="6" dur="1" fill="hold">
-                                          <p:stCondLst>
-                                            <p:cond delay="0"/>
-                                          </p:stCondLst>
-                                        </p:cTn>
-                                        <p:tgtEl>
-                                          <p:spTgt spid="6"/>
-                                        </p:tgtEl>
-                                        <p:attrNameLst>
-                                          <p:attrName>style.visibility</p:attrName>
-                                        </p:attrNameLst>
-                                      </p:cBhvr>
-                                      <p:to>
-                                        <p:strVal val="visible"/>
-                                      </p:to>
-                                    </p:set>
-                                    <p:anim from="(-#ppt_w/2)" to="(#ppt_x)" calcmode="lin" valueType="num">
-                                      <p:cBhvr>
-                                        <p:cTn id="7" dur="600" fill="hold">
-                                          <p:stCondLst>
-                                            <p:cond delay="0"/>
-                                          </p:stCondLst>
-                                        </p:cTn>
-                                        <p:tgtEl>
-                                          <p:spTgt spid="6"/>
-                                        </p:tgtEl>
-                                        <p:attrNameLst>
-                                          <p:attrName>ppt_x</p:attrName>
-                                        </p:attrNameLst>
-                                      </p:cBhvr>
-                                    </p:anim>
-                                    <p:anim from="0" to="-1.0" calcmode="lin" valueType="num">
-                                      <p:cBhvr>
-                                        <p:cTn id="8" dur="200" decel="50000" autoRev="1" fill="hold">
-                                          <p:stCondLst>
-                                            <p:cond delay="600"/>
-                                          </p:stCondLst>
-                                        </p:cTn>
-                                        <p:tgtEl>
-                                          <p:spTgt spid="6"/>
-                                        </p:tgtEl>
-                                        <p:attrNameLst>
-                                          <p:attrName>xshear</p:attrName>
-                                        </p:attrNameLst>
-                                      </p:cBhvr>
-                                    </p:anim>
-                                    <p:animScale>
-                                      <p:cBhvr>
-                                        <p:cTn id="9" dur="200" decel="100000" autoRev="1" fill="hold">
-                                          <p:stCondLst>
-                                            <p:cond delay="600"/>
-                                          </p:stCondLst>
-                                        </p:cTn>
-                                        <p:tgtEl>
-                                          <p:spTgt spid="6"/>
-                                        </p:tgtEl>
-                                      </p:cBhvr>
-                                      <p:from x="100000" y="100000"/>
-                                      <p:to x="80000" y="100000"/>
-                                    </p:animScale>
-                                    <p:anim by="(#ppt_h/3+#ppt_w*0.1)" calcmode="lin" valueType="num">
-                                      <p:cBhvr additive="sum">
-                                        <p:cTn id="10" dur="200" decel="100000" autoRev="1" fill="hold">
-                                          <p:stCondLst>
-                                            <p:cond delay="600"/>
-                                          </p:stCondLst>
-                                        </p:cTn>
-                                        <p:tgtEl>
-                                          <p:spTgt spid="6"/>
-                                        </p:tgtEl>
-                                        <p:attrNameLst>
-                                          <p:attrName>ppt_x</p:attrName>
-                                        </p:attrNameLst>
-                                      </p:cBhvr>
-                                    </p:anim>
-                                  </p:childTnLst>
-                                </p:cTn>
-                              </p:par>
-                            </p:childTnLst>
-                          </p:cTn>
-                        </p:par>
-                      </p:childTnLst>
-                    </p:cTn>
-                  </p:par>
-                  <p:par>
-                    <p:cTn id="11" fill="hold">
-                      <p:stCondLst>
-                        <p:cond delay="indefinite"/>
-                      </p:stCondLst>
-                      <p:childTnLst>
-                        <p:par>
-                          <p:cTn id="12" fill="hold">
-                            <p:stCondLst>
-                              <p:cond delay="0"/>
-                            </p:stCondLst>
-                            <p:childTnLst>
-                              <p:par>
-                                <p:cTn id="13" presetID="34" presetClass="entr" presetSubtype="0" fill="hold" grpId="0" nodeType="clickEffect">
-                                  <p:stCondLst>
-                                    <p:cond delay="0"/>
-                                  </p:stCondLst>
-                                  <p:childTnLst>
-                                    <p:set>
-                                      <p:cBhvr>
-                                        <p:cTn id="14" dur="1" fill="hold">
-                                          <p:stCondLst>
-                                            <p:cond delay="0"/>
-                                          </p:stCondLst>
-                                        </p:cTn>
-                                        <p:tgtEl>
-                                          <p:spTgt spid="8"/>
-                                        </p:tgtEl>
-                                        <p:attrNameLst>
-                                          <p:attrName>style.visibility</p:attrName>
-                                        </p:attrNameLst>
-                                      </p:cBhvr>
-                                      <p:to>
-                                        <p:strVal val="visible"/>
-                                      </p:to>
-                                    </p:set>
-                                    <p:anim from="(-#ppt_w/2)" to="(#ppt_x)" calcmode="lin" valueType="num">
-                                      <p:cBhvr>
-                                        <p:cTn id="15" dur="600" fill="hold">
-                                          <p:stCondLst>
-                                            <p:cond delay="0"/>
-                                          </p:stCondLst>
-                                        </p:cTn>
-                                        <p:tgtEl>
-                                          <p:spTgt spid="8"/>
-                                        </p:tgtEl>
-                                        <p:attrNameLst>
-                                          <p:attrName>ppt_x</p:attrName>
-                                        </p:attrNameLst>
-                                      </p:cBhvr>
-                                    </p:anim>
-                                    <p:anim from="0" to="-1.0" calcmode="lin" valueType="num">
-                                      <p:cBhvr>
-                                        <p:cTn id="16" dur="200" decel="50000" autoRev="1" fill="hold">
-                                          <p:stCondLst>
-                                            <p:cond delay="600"/>
-                                          </p:stCondLst>
-                                        </p:cTn>
-                                        <p:tgtEl>
-                                          <p:spTgt spid="8"/>
-                                        </p:tgtEl>
-                                        <p:attrNameLst>
-                                          <p:attrName>xshear</p:attrName>
-                                        </p:attrNameLst>
-                                      </p:cBhvr>
-                                    </p:anim>
-                                    <p:animScale>
-                                      <p:cBhvr>
-                                        <p:cTn id="17" dur="200" decel="100000" autoRev="1" fill="hold">
-                                          <p:stCondLst>
-                                            <p:cond delay="600"/>
-                                          </p:stCondLst>
-                                        </p:cTn>
-                                        <p:tgtEl>
-                                          <p:spTgt spid="8"/>
-                                        </p:tgtEl>
-                                      </p:cBhvr>
-                                      <p:from x="100000" y="100000"/>
-                                      <p:to x="80000" y="100000"/>
-                                    </p:animScale>
-                                    <p:anim by="(#ppt_h/3+#ppt_w*0.1)" calcmode="lin" valueType="num">
-                                      <p:cBhvr additive="sum">
-                                        <p:cTn id="18" dur="200" decel="100000" autoRev="1" fill="hold">
-                                          <p:stCondLst>
-                                            <p:cond delay="600"/>
-                                          </p:stCondLst>
-                                        </p:cTn>
-                                        <p:tgtEl>
-                                          <p:spTgt spid="8"/>
-                                        </p:tgtEl>
-                                        <p:attrNameLst>
-                                          <p:attrName>ppt_x</p:attrName>
-                                        </p:attrNameLst>
-                                      </p:cBhvr>
-                                    </p:anim>
-                                  </p:childTnLst>
-                                </p:cTn>
-                              </p:par>
-                            </p:childTnLst>
-                          </p:cTn>
-                        </p:par>
-                      </p:childTnLst>
-                    </p:cTn>
-                  </p:par>
-                  <p:par>
-                    <p:cTn id="19" fill="hold">
-                      <p:stCondLst>
-                        <p:cond delay="indefinite"/>
-                      </p:stCondLst>
-                      <p:childTnLst>
-                        <p:par>
-                          <p:cTn id="20" fill="hold">
-                            <p:stCondLst>
-                              <p:cond delay="0"/>
-                            </p:stCondLst>
-                            <p:childTnLst>
-                              <p:par>
-                                <p:cTn id="21" presetID="34" presetClass="entr" presetSubtype="0" fill="hold" grpId="0" nodeType="clickEffect">
-                                  <p:stCondLst>
-                                    <p:cond delay="0"/>
-                                  </p:stCondLst>
-                                  <p:childTnLst>
-                                    <p:set>
-                                      <p:cBhvr>
-                                        <p:cTn id="22" dur="1" fill="hold">
-                                          <p:stCondLst>
-                                            <p:cond delay="0"/>
-                                          </p:stCondLst>
-                                        </p:cTn>
-                                        <p:tgtEl>
-                                          <p:spTgt spid="10"/>
-                                        </p:tgtEl>
-                                        <p:attrNameLst>
-                                          <p:attrName>style.visibility</p:attrName>
-                                        </p:attrNameLst>
-                                      </p:cBhvr>
-                                      <p:to>
-                                        <p:strVal val="visible"/>
-                                      </p:to>
-                                    </p:set>
-                                    <p:anim from="(-#ppt_w/2)" to="(#ppt_x)" calcmode="lin" valueType="num">
-                                      <p:cBhvr>
-                                        <p:cTn id="23" dur="600" fill="hold">
-                                          <p:stCondLst>
-                                            <p:cond delay="0"/>
-                                          </p:stCondLst>
-                                        </p:cTn>
-                                        <p:tgtEl>
-                                          <p:spTgt spid="10"/>
-                                        </p:tgtEl>
-                                        <p:attrNameLst>
-                                          <p:attrName>ppt_x</p:attrName>
-                                        </p:attrNameLst>
-                                      </p:cBhvr>
-                                    </p:anim>
-                                    <p:anim from="0" to="-1.0" calcmode="lin" valueType="num">
-                                      <p:cBhvr>
-                                        <p:cTn id="24" dur="200" decel="50000" autoRev="1" fill="hold">
-                                          <p:stCondLst>
-                                            <p:cond delay="600"/>
-                                          </p:stCondLst>
-                                        </p:cTn>
-                                        <p:tgtEl>
-                                          <p:spTgt spid="10"/>
-                                        </p:tgtEl>
-                                        <p:attrNameLst>
-                                          <p:attrName>xshear</p:attrName>
-                                        </p:attrNameLst>
-                                      </p:cBhvr>
-                                    </p:anim>
-                                    <p:animScale>
-                                      <p:cBhvr>
-                                        <p:cTn id="25" dur="200" decel="100000" autoRev="1" fill="hold">
-                                          <p:stCondLst>
-                                            <p:cond delay="600"/>
-                                          </p:stCondLst>
-                                        </p:cTn>
-                                        <p:tgtEl>
-                                          <p:spTgt spid="10"/>
-                                        </p:tgtEl>
-                                      </p:cBhvr>
-                                      <p:from x="100000" y="100000"/>
-                                      <p:to x="80000" y="100000"/>
-                                    </p:animScale>
-                                    <p:anim by="(#ppt_h/3+#ppt_w*0.1)" calcmode="lin" valueType="num">
-                                      <p:cBhvr additive="sum">
-                                        <p:cTn id="26" dur="200" decel="100000" autoRev="1" fill="hold">
-                                          <p:stCondLst>
-                                            <p:cond delay="600"/>
-                                          </p:stCondLst>
-                                        </p:cTn>
-                                        <p:tgtEl>
-                                          <p:spTgt spid="10"/>
-                                        </p:tgtEl>
-                                        <p:attrNameLst>
-                                          <p:attrName>ppt_x</p:attrName>
-                                        </p:attrNameLst>
-                                      </p:cBhvr>
-                                    </p:anim>
-                                  </p:childTnLst>
-                                </p:cTn>
-                              </p:par>
-                            </p:childTnLst>
-                          </p:cTn>
-                        </p:par>
-                      </p:childTnLst>
-                    </p:cTn>
-                  </p:par>
-                  <p:par>
-                    <p:cTn id="27" fill="hold">
-                      <p:stCondLst>
-                        <p:cond delay="indefinite"/>
-                      </p:stCondLst>
-                      <p:childTnLst>
-                        <p:par>
-                          <p:cTn id="28" fill="hold">
-                            <p:stCondLst>
-                              <p:cond delay="0"/>
-                            </p:stCondLst>
-                            <p:childTnLst>
-                              <p:par>
-                                <p:cTn id="29" presetID="34" presetClass="entr" presetSubtype="0" fill="hold" grpId="1" nodeType="clickEffect">
-                                  <p:stCondLst>
-                                    <p:cond delay="0"/>
-                                  </p:stCondLst>
-                                  <p:childTnLst>
-                                    <p:set>
-                                      <p:cBhvr>
-                                        <p:cTn id="30" dur="1" fill="hold">
-                                          <p:stCondLst>
-                                            <p:cond delay="0"/>
-                                          </p:stCondLst>
-                                        </p:cTn>
-                                        <p:tgtEl>
-                                          <p:spTgt spid="12"/>
-                                        </p:tgtEl>
-                                        <p:attrNameLst>
-                                          <p:attrName>style.visibility</p:attrName>
-                                        </p:attrNameLst>
-                                      </p:cBhvr>
-                                      <p:to>
-                                        <p:strVal val="visible"/>
-                                      </p:to>
-                                    </p:set>
-                                    <p:anim from="(-#ppt_w/2)" to="(#ppt_x)" calcmode="lin" valueType="num">
-                                      <p:cBhvr>
-                                        <p:cTn id="31" dur="600" fill="hold">
-                                          <p:stCondLst>
-                                            <p:cond delay="0"/>
-                                          </p:stCondLst>
-                                        </p:cTn>
-                                        <p:tgtEl>
-                                          <p:spTgt spid="12"/>
-                                        </p:tgtEl>
-                                        <p:attrNameLst>
-                                          <p:attrName>ppt_x</p:attrName>
-                                        </p:attrNameLst>
-                                      </p:cBhvr>
-                                    </p:anim>
-                                    <p:anim from="0" to="-1.0" calcmode="lin" valueType="num">
-                                      <p:cBhvr>
-                                        <p:cTn id="32" dur="200" decel="50000" autoRev="1" fill="hold">
-                                          <p:stCondLst>
-                                            <p:cond delay="600"/>
-                                          </p:stCondLst>
-                                        </p:cTn>
-                                        <p:tgtEl>
-                                          <p:spTgt spid="12"/>
-                                        </p:tgtEl>
-                                        <p:attrNameLst>
-                                          <p:attrName>xshear</p:attrName>
-                                        </p:attrNameLst>
-                                      </p:cBhvr>
-                                    </p:anim>
-                                    <p:animScale>
-                                      <p:cBhvr>
-                                        <p:cTn id="33" dur="200" decel="100000" autoRev="1" fill="hold">
-                                          <p:stCondLst>
-                                            <p:cond delay="600"/>
-                                          </p:stCondLst>
-                                        </p:cTn>
-                                        <p:tgtEl>
-                                          <p:spTgt spid="12"/>
-                                        </p:tgtEl>
-                                      </p:cBhvr>
-                                      <p:from x="100000" y="100000"/>
-                                      <p:to x="80000" y="100000"/>
-                                    </p:animScale>
-                                    <p:anim by="(#ppt_h/3+#ppt_w*0.1)" calcmode="lin" valueType="num">
-                                      <p:cBhvr additive="sum">
-                                        <p:cTn id="34" dur="200" decel="100000" autoRev="1" fill="hold">
-                                          <p:stCondLst>
-                                            <p:cond delay="600"/>
-                                          </p:stCondLst>
-                                        </p:cTn>
-                                        <p:tgtEl>
-                                          <p:spTgt spid="12"/>
-                                        </p:tgtEl>
-                                        <p:attrNameLst>
-                                          <p:attrName>ppt_x</p:attrName>
-                                        </p:attrNameLst>
-                                      </p:cBhvr>
-                                    </p:anim>
-                                  </p:childTnLst>
-                                </p:cTn>
-                              </p:par>
-                            </p:childTnLst>
-                          </p:cTn>
-                        </p:par>
-                      </p:childTnLst>
-                    </p:cTn>
-                  </p:par>
-                </p:childTnLst>
-              </p:cTn>
-              <p:prevCondLst>
-                <p:cond evt="onPrev" delay="0">
-                  <p:tgtEl>
-                    <p:sldTgt/>
-                  </p:tgtEl>
-                </p:cond>
-              </p:prevCondLst>
-              <p:nextCondLst>
-                <p:cond evt="onNext" delay="0">
-                  <p:tgtEl>
-                    <p:sldTgt/>
-                  </p:tgtEl>
-                </p:cond>
-              </p:nextCondLst>
-            </p:seq>
-          </p:childTnLst>
-        </p:cTn>
-      </p:par>
-    </p:tnLst>
-    <p:bldLst>
-      <p:bldP spid="6" grpId="0"/>
-      <p:bldP spid="8" grpId="0"/>
-      <p:bldP spid="10" grpId="0"/>
-      <p:bldP spid="12" grpId="1"/>
-    </p:bldLst>
   </p:timing>
 </p:sld>
 </file>
@@ -14407,25 +7363,7 @@
                 </a:solidFill>
                 <a:latin typeface="Calibri" panose="020F0502020204030204" pitchFamily="34" charset="0"/>
               </a:rPr>
-              <a:t>Estimate p, the proportion of all individuals of East </a:t>
-            </a:r>
-            <a:r>
-              <a:rPr lang="en-US">
-                <a:solidFill>
-                  <a:srgbClr val="000000"/>
-                </a:solidFill>
-                <a:latin typeface="Calibri" panose="020F0502020204030204" pitchFamily="34" charset="0"/>
-              </a:rPr>
-              <a:t>Asian descent </a:t>
-            </a:r>
-            <a:r>
-              <a:rPr lang="en-US" dirty="0">
-                <a:solidFill>
-                  <a:srgbClr val="000000"/>
-                </a:solidFill>
-                <a:latin typeface="Calibri" panose="020F0502020204030204" pitchFamily="34" charset="0"/>
-              </a:rPr>
-              <a:t>who carry the *2 variant.</a:t>
+              <a:t>Estimate p, the proportion of all individuals of East Asian descent who carry the *2 variant.</a:t>
             </a:r>
           </a:p>
         </p:txBody>
@@ -14676,436 +7614,6 @@
     <p:extLst>
       <p:ext uri="{BB962C8B-B14F-4D97-AF65-F5344CB8AC3E}">
         <p14:creationId xmlns:p14="http://schemas.microsoft.com/office/powerpoint/2010/main" val="1844097397"/>
-      </p:ext>
-    </p:extLst>
-  </p:cSld>
-  <p:clrMapOvr>
-    <a:masterClrMapping/>
-  </p:clrMapOvr>
-  <p:timing>
-    <p:tnLst>
-      <p:par>
-        <p:cTn id="1" dur="indefinite" restart="never" nodeType="tmRoot">
-          <p:childTnLst>
-            <p:seq concurrent="1" nextAc="seek">
-              <p:cTn id="2" dur="indefinite" nodeType="mainSeq">
-                <p:childTnLst>
-                  <p:par>
-                    <p:cTn id="3" fill="hold">
-                      <p:stCondLst>
-                        <p:cond delay="indefinite"/>
-                      </p:stCondLst>
-                      <p:childTnLst>
-                        <p:par>
-                          <p:cTn id="4" fill="hold">
-                            <p:stCondLst>
-                              <p:cond delay="0"/>
-                            </p:stCondLst>
-                            <p:childTnLst>
-                              <p:par>
-                                <p:cTn id="5" presetID="1" presetClass="entr" presetSubtype="0" fill="hold" grpId="0" nodeType="clickEffect">
-                                  <p:stCondLst>
-                                    <p:cond delay="0"/>
-                                  </p:stCondLst>
-                                  <p:childTnLst>
-                                    <p:set>
-                                      <p:cBhvr>
-                                        <p:cTn id="6" dur="1" fill="hold">
-                                          <p:stCondLst>
-                                            <p:cond delay="0"/>
-                                          </p:stCondLst>
-                                        </p:cTn>
-                                        <p:tgtEl>
-                                          <p:spTgt spid="11"/>
-                                        </p:tgtEl>
-                                        <p:attrNameLst>
-                                          <p:attrName>style.visibility</p:attrName>
-                                        </p:attrNameLst>
-                                      </p:cBhvr>
-                                      <p:to>
-                                        <p:strVal val="visible"/>
-                                      </p:to>
-                                    </p:set>
-                                  </p:childTnLst>
-                                </p:cTn>
-                              </p:par>
-                            </p:childTnLst>
-                          </p:cTn>
-                        </p:par>
-                      </p:childTnLst>
-                    </p:cTn>
-                  </p:par>
-                </p:childTnLst>
-              </p:cTn>
-              <p:prevCondLst>
-                <p:cond evt="onPrev" delay="0">
-                  <p:tgtEl>
-                    <p:sldTgt/>
-                  </p:tgtEl>
-                </p:cond>
-              </p:prevCondLst>
-              <p:nextCondLst>
-                <p:cond evt="onNext" delay="0">
-                  <p:tgtEl>
-                    <p:sldTgt/>
-                  </p:tgtEl>
-                </p:cond>
-              </p:nextCondLst>
-            </p:seq>
-          </p:childTnLst>
-        </p:cTn>
-      </p:par>
-    </p:tnLst>
-    <p:bldLst>
-      <p:bldP spid="11" grpId="0" animBg="1"/>
-    </p:bldLst>
-  </p:timing>
-</p:sld>
-</file>
-
-<file path=ppt/slides/slide9.xml><?xml version="1.0" encoding="utf-8"?>
-<p:sld xmlns:a="http://schemas.openxmlformats.org/drawingml/2006/main" xmlns:r="http://schemas.openxmlformats.org/officeDocument/2006/relationships" xmlns:p="http://schemas.openxmlformats.org/presentationml/2006/main">
-  <p:cSld>
-    <p:spTree>
-      <p:nvGrpSpPr>
-        <p:cNvPr id="1" name=""/>
-        <p:cNvGrpSpPr/>
-        <p:nvPr/>
-      </p:nvGrpSpPr>
-      <p:grpSpPr>
-        <a:xfrm>
-          <a:off x="0" y="0"/>
-          <a:ext cx="0" cy="0"/>
-          <a:chOff x="0" y="0"/>
-          <a:chExt cx="0" cy="0"/>
-        </a:xfrm>
-      </p:grpSpPr>
-      <p:sp>
-        <p:nvSpPr>
-          <p:cNvPr id="2" name="Title 1">
-            <a:extLst>
-              <a:ext uri="{FF2B5EF4-FFF2-40B4-BE49-F238E27FC236}">
-                <a16:creationId xmlns:a16="http://schemas.microsoft.com/office/drawing/2014/main" id="{C08D30B1-1864-30EF-7EAB-9BEE656C0012}"/>
-              </a:ext>
-            </a:extLst>
-          </p:cNvPr>
-          <p:cNvSpPr>
-            <a:spLocks noGrp="1"/>
-          </p:cNvSpPr>
-          <p:nvPr>
-            <p:ph type="title"/>
-          </p:nvPr>
-        </p:nvSpPr>
-        <p:spPr/>
-        <p:txBody>
-          <a:bodyPr>
-            <a:noAutofit/>
-          </a:bodyPr>
-          <a:lstStyle/>
-          <a:p>
-            <a:r>
-              <a:rPr lang="en-US">
-                <a:solidFill>
-                  <a:srgbClr val="1F3864"/>
-                </a:solidFill>
-              </a:rPr>
-              <a:t>Making an interval narrower</a:t>
-            </a:r>
-          </a:p>
-        </p:txBody>
-      </p:sp>
-      <p:sp>
-        <p:nvSpPr>
-          <p:cNvPr id="4" name="Slide Number Placeholder 3">
-            <a:extLst>
-              <a:ext uri="{FF2B5EF4-FFF2-40B4-BE49-F238E27FC236}">
-                <a16:creationId xmlns:a16="http://schemas.microsoft.com/office/drawing/2014/main" id="{3F875068-D051-44AE-498E-1BEBEDE3A7C8}"/>
-              </a:ext>
-            </a:extLst>
-          </p:cNvPr>
-          <p:cNvSpPr>
-            <a:spLocks noGrp="1"/>
-          </p:cNvSpPr>
-          <p:nvPr>
-            <p:ph type="sldNum" sz="quarter" idx="12"/>
-          </p:nvPr>
-        </p:nvSpPr>
-        <p:spPr/>
-        <p:txBody>
-          <a:bodyPr/>
-          <a:lstStyle/>
-          <a:p>
-            <a:fld id="{A80A81DD-F10A-4B1C-963A-0ABBB4865886}" type="slidenum">
-              <a:rPr lang="en-US" sz="1600" smtClean="0"/>
-              <a:t>9</a:t>
-            </a:fld>
-            <a:endParaRPr lang="en-US" sz="1600"/>
-          </a:p>
-        </p:txBody>
-      </p:sp>
-      <p:sp>
-        <p:nvSpPr>
-          <p:cNvPr id="3" name="Title rule">
-            <a:extLst>
-              <a:ext uri="{FF2B5EF4-FFF2-40B4-BE49-F238E27FC236}">
-                <a16:creationId xmlns:a16="http://schemas.microsoft.com/office/drawing/2014/main" id="{30656AA8-9645-F028-C769-A313710853CC}"/>
-              </a:ext>
-            </a:extLst>
-          </p:cNvPr>
-          <p:cNvSpPr/>
-          <p:nvPr/>
-        </p:nvSpPr>
-        <p:spPr>
-          <a:xfrm>
-            <a:off x="838200" y="1600200"/>
-            <a:ext cx="10515600" cy="38100"/>
-          </a:xfrm>
-          <a:prstGeom prst="rect">
-            <a:avLst/>
-          </a:prstGeom>
-          <a:solidFill>
-            <a:srgbClr val="4472C4"/>
-          </a:solidFill>
-          <a:ln w="12700" cap="flat" cmpd="sng" algn="ctr">
-            <a:noFill/>
-            <a:prstDash val="solid"/>
-            <a:miter lim="800000"/>
-          </a:ln>
-          <a:effectLst/>
-          <a:extLst>
-            <a:ext uri="{91240B29-F687-4F45-9708-019B960494DF}">
-              <a14:hiddenLine xmlns:a14="http://schemas.microsoft.com/office/drawing/2010/main" w="12700" cap="flat" cmpd="sng" algn="ctr">
-                <a:solidFill>
-                  <a:schemeClr val="accent1">
-                    <a:shade val="15000"/>
-                  </a:schemeClr>
-                </a:solidFill>
-                <a:prstDash val="solid"/>
-                <a:miter lim="800000"/>
-              </a14:hiddenLine>
-            </a:ext>
-          </a:extLst>
-        </p:spPr>
-        <p:style>
-          <a:lnRef idx="2">
-            <a:schemeClr val="accent1">
-              <a:shade val="15000"/>
-            </a:schemeClr>
-          </a:lnRef>
-          <a:fillRef idx="1">
-            <a:schemeClr val="accent1"/>
-          </a:fillRef>
-          <a:effectRef idx="0">
-            <a:schemeClr val="accent1"/>
-          </a:effectRef>
-          <a:fontRef idx="minor">
-            <a:schemeClr val="lt1"/>
-          </a:fontRef>
-        </p:style>
-        <p:txBody>
-          <a:bodyPr rtlCol="0" anchor="ctr"/>
-          <a:lstStyle/>
-          <a:p>
-            <a:pPr algn="ctr"/>
-            <a:endParaRPr lang="en-US"/>
-          </a:p>
-        </p:txBody>
-      </p:sp>
-      <p:sp>
-        <p:nvSpPr>
-          <p:cNvPr id="8" name="Context">
-            <a:extLst>
-              <a:ext uri="{FF2B5EF4-FFF2-40B4-BE49-F238E27FC236}">
-                <a16:creationId xmlns:a16="http://schemas.microsoft.com/office/drawing/2014/main" id="{71E3EA8C-31B4-DAD4-BC4A-65D72E59AD46}"/>
-              </a:ext>
-            </a:extLst>
-          </p:cNvPr>
-          <p:cNvSpPr txBox="1"/>
-          <p:nvPr/>
-        </p:nvSpPr>
-        <p:spPr>
-          <a:xfrm>
-            <a:off x="762000" y="1879600"/>
-            <a:ext cx="10668000" cy="381000"/>
-          </a:xfrm>
-          <a:prstGeom prst="rect">
-            <a:avLst/>
-          </a:prstGeom>
-          <a:noFill/>
-        </p:spPr>
-        <p:txBody>
-          <a:bodyPr vert="horz" wrap="square" rtlCol="0">
-            <a:spAutoFit/>
-          </a:bodyPr>
-          <a:lstStyle/>
-          <a:p>
-            <a:pPr>
-              <a:spcAft>
-                <a:spcPts val="200"/>
-              </a:spcAft>
-            </a:pPr>
-            <a:r>
-              <a:rPr lang="en-US">
-                <a:solidFill>
-                  <a:srgbClr val="000000"/>
-                </a:solidFill>
-                <a:latin typeface="Calibri" panose="020F0502020204030204" pitchFamily="34" charset="0"/>
-              </a:rPr>
-              <a:t>The carrier interval (p̂ = 0.550) at four confidence levels, and at 95% with 4 times fewer or more people.</a:t>
-            </a:r>
-          </a:p>
-        </p:txBody>
-      </p:sp>
-      <p:sp>
-        <p:nvSpPr>
-          <p:cNvPr id="10" name="Question">
-            <a:extLst>
-              <a:ext uri="{FF2B5EF4-FFF2-40B4-BE49-F238E27FC236}">
-                <a16:creationId xmlns:a16="http://schemas.microsoft.com/office/drawing/2014/main" id="{B31E395F-B84E-D1E9-D22A-222467FC4105}"/>
-              </a:ext>
-            </a:extLst>
-          </p:cNvPr>
-          <p:cNvSpPr txBox="1"/>
-          <p:nvPr/>
-        </p:nvSpPr>
-        <p:spPr>
-          <a:xfrm>
-            <a:off x="762000" y="2286000"/>
-            <a:ext cx="10668000" cy="369332"/>
-          </a:xfrm>
-          <a:prstGeom prst="rect">
-            <a:avLst/>
-          </a:prstGeom>
-          <a:noFill/>
-        </p:spPr>
-        <p:txBody>
-          <a:bodyPr vert="horz" wrap="square" rtlCol="0">
-            <a:spAutoFit/>
-          </a:bodyPr>
-          <a:lstStyle/>
-          <a:p>
-            <a:pPr>
-              <a:spcAft>
-                <a:spcPts val="200"/>
-              </a:spcAft>
-            </a:pPr>
-            <a:r>
-              <a:rPr lang="en-US" b="1">
-                <a:solidFill>
-                  <a:srgbClr val="C00000"/>
-                </a:solidFill>
-                <a:latin typeface="Calibri" panose="020F0502020204030204" pitchFamily="34" charset="0"/>
-              </a:rPr>
-              <a:t>What happens to the width as C goes up?  As n goes up?</a:t>
-            </a:r>
-          </a:p>
-        </p:txBody>
-      </p:sp>
-      <p:sp>
-        <p:nvSpPr>
-          <p:cNvPr id="11" name="Result">
-            <a:extLst>
-              <a:ext uri="{FF2B5EF4-FFF2-40B4-BE49-F238E27FC236}">
-                <a16:creationId xmlns:a16="http://schemas.microsoft.com/office/drawing/2014/main" id="{5A70F68E-0D93-07B8-82B2-4D8F2F681D0D}"/>
-              </a:ext>
-            </a:extLst>
-          </p:cNvPr>
-          <p:cNvSpPr/>
-          <p:nvPr/>
-        </p:nvSpPr>
-        <p:spPr>
-          <a:xfrm>
-            <a:off x="762000" y="5487432"/>
-            <a:ext cx="10668000" cy="470595"/>
-          </a:xfrm>
-          <a:prstGeom prst="roundRect">
-            <a:avLst>
-              <a:gd name="adj" fmla="val 4000"/>
-            </a:avLst>
-          </a:prstGeom>
-          <a:solidFill>
-            <a:srgbClr val="F2F6FC"/>
-          </a:solidFill>
-          <a:ln w="15875">
-            <a:solidFill>
-              <a:srgbClr val="4472C4"/>
-            </a:solidFill>
-          </a:ln>
-        </p:spPr>
-        <p:style>
-          <a:lnRef idx="2">
-            <a:schemeClr val="accent1">
-              <a:shade val="15000"/>
-            </a:schemeClr>
-          </a:lnRef>
-          <a:fillRef idx="1">
-            <a:schemeClr val="accent1"/>
-          </a:fillRef>
-          <a:effectRef idx="0">
-            <a:schemeClr val="accent1"/>
-          </a:effectRef>
-          <a:fontRef idx="minor">
-            <a:schemeClr val="lt1"/>
-          </a:fontRef>
-        </p:style>
-        <p:txBody>
-          <a:bodyPr wrap="square" lIns="152400" tIns="76200" rIns="152400" bIns="76200" rtlCol="0" anchor="ctr">
-            <a:spAutoFit/>
-          </a:bodyPr>
-          <a:lstStyle/>
-          <a:p>
-            <a:r>
-              <a:rPr lang="en-US" sz="2000" b="1">
-                <a:solidFill>
-                  <a:srgbClr val="C00000"/>
-                </a:solidFill>
-                <a:latin typeface="Calibri" panose="020F0502020204030204" pitchFamily="34" charset="0"/>
-              </a:rPr>
-              <a:t>Higher C → wider.     4 times the n → half the width  (SE has √n on the bottom)</a:t>
-            </a:r>
-          </a:p>
-        </p:txBody>
-      </p:sp>
-      <p:pic>
-        <p:nvPicPr>
-          <p:cNvPr id="7" name="l20_width.png">
-            <a:extLst>
-              <a:ext uri="{FF2B5EF4-FFF2-40B4-BE49-F238E27FC236}">
-                <a16:creationId xmlns:a16="http://schemas.microsoft.com/office/drawing/2014/main" id="{23451720-5E0A-3C17-1245-844CB7EF6E7B}"/>
-              </a:ext>
-            </a:extLst>
-          </p:cNvPr>
-          <p:cNvPicPr>
-            <a:picLocks/>
-          </p:cNvPicPr>
-          <p:nvPr/>
-        </p:nvPicPr>
-        <p:blipFill>
-          <a:blip r:embed="rId2">
-            <a:extLst>
-              <a:ext uri="{28A0092B-C50C-407E-A947-70E740481C1C}">
-                <a14:useLocalDpi xmlns:a14="http://schemas.microsoft.com/office/drawing/2010/main" val="0"/>
-              </a:ext>
-            </a:extLst>
-          </a:blip>
-          <a:stretch>
-            <a:fillRect/>
-          </a:stretch>
-        </p:blipFill>
-        <p:spPr>
-          <a:xfrm>
-            <a:off x="762000" y="2706132"/>
-            <a:ext cx="10668000" cy="2730500"/>
-          </a:xfrm>
-          <a:prstGeom prst="rect">
-            <a:avLst/>
-          </a:prstGeom>
-        </p:spPr>
-      </p:pic>
-    </p:spTree>
-    <p:extLst>
-      <p:ext uri="{BB962C8B-B14F-4D97-AF65-F5344CB8AC3E}">
-        <p14:creationId xmlns:p14="http://schemas.microsoft.com/office/powerpoint/2010/main" val="917836242"/>
       </p:ext>
     </p:extLst>
   </p:cSld>
